--- a/lecture-3--2026-09-25/lecture3-hw.pptx
+++ b/lecture-3--2026-09-25/lecture3-hw.pptx
@@ -21,16 +21,16 @@
     <p:sldId id="425" r:id="rId12"/>
     <p:sldId id="426" r:id="rId13"/>
     <p:sldId id="427" r:id="rId14"/>
-    <p:sldId id="453" r:id="rId15"/>
-    <p:sldId id="428" r:id="rId16"/>
-    <p:sldId id="429" r:id="rId17"/>
-    <p:sldId id="451" r:id="rId18"/>
-    <p:sldId id="430" r:id="rId19"/>
-    <p:sldId id="431" r:id="rId20"/>
-    <p:sldId id="432" r:id="rId21"/>
-    <p:sldId id="433" r:id="rId22"/>
-    <p:sldId id="454" r:id="rId23"/>
-    <p:sldId id="434" r:id="rId24"/>
+    <p:sldId id="428" r:id="rId15"/>
+    <p:sldId id="429" r:id="rId16"/>
+    <p:sldId id="451" r:id="rId17"/>
+    <p:sldId id="430" r:id="rId18"/>
+    <p:sldId id="431" r:id="rId19"/>
+    <p:sldId id="432" r:id="rId20"/>
+    <p:sldId id="433" r:id="rId21"/>
+    <p:sldId id="454" r:id="rId22"/>
+    <p:sldId id="434" r:id="rId23"/>
+    <p:sldId id="456" r:id="rId24"/>
     <p:sldId id="435" r:id="rId25"/>
     <p:sldId id="436" r:id="rId26"/>
     <p:sldId id="437" r:id="rId27"/>
@@ -313,7 +313,6 @@
             <p14:sldId id="425"/>
             <p14:sldId id="426"/>
             <p14:sldId id="427"/>
-            <p14:sldId id="453"/>
             <p14:sldId id="428"/>
             <p14:sldId id="429"/>
             <p14:sldId id="451"/>
@@ -323,6 +322,7 @@
             <p14:sldId id="433"/>
             <p14:sldId id="454"/>
             <p14:sldId id="434"/>
+            <p14:sldId id="456"/>
             <p14:sldId id="435"/>
             <p14:sldId id="436"/>
             <p14:sldId id="437"/>
@@ -528,7 +528,7 @@
           <a:bodyPr/>
           <a:lstStyle/>
           <a:p>
-            <a:endParaRPr lang="en-US"/>
+            <a:endParaRPr lang="en-US" dirty="0"/>
           </a:p>
         </p:txBody>
       </p:sp>
@@ -661,7 +661,7 @@
             </a:lvl9pPr>
           </a:lstStyle>
           <a:p>
-            <a:endParaRPr/>
+            <a:endParaRPr dirty="0"/>
           </a:p>
         </p:txBody>
       </p:sp>
@@ -669,17 +669,6 @@
   </p:cSld>
   <p:clrMap bg1="lt1" tx1="dk1" bg2="dk2" tx2="lt2" accent1="accent1" accent2="accent2" accent3="accent3" accent4="accent4" accent5="accent5" accent6="accent6" hlink="hlink" folHlink="folHlink"/>
   <p:notesStyle>
-    <a:defPPr marR="0" lvl="0" algn="l" rtl="0">
-      <a:lnSpc>
-        <a:spcPct val="100000"/>
-      </a:lnSpc>
-      <a:spcBef>
-        <a:spcPts val="0"/>
-      </a:spcBef>
-      <a:spcAft>
-        <a:spcPts val="0"/>
-      </a:spcAft>
-    </a:defPPr>
     <a:lvl1pPr marR="0" lvl="0" algn="l" rtl="0">
       <a:lnSpc>
         <a:spcPct val="100000"/>
@@ -698,204 +687,12 @@
         <a:solidFill>
           <a:srgbClr val="000000"/>
         </a:solidFill>
-        <a:latin typeface="Arial"/>
-        <a:ea typeface="Arial"/>
+        <a:latin typeface="Fira Sans" panose="020B0503050000020004" pitchFamily="34" charset="0"/>
+        <a:ea typeface="Fira Sans" panose="020B0503050000020004" pitchFamily="34" charset="0"/>
         <a:cs typeface="Arial"/>
         <a:sym typeface="Arial"/>
       </a:defRPr>
     </a:lvl1pPr>
-    <a:lvl2pPr marR="0" lvl="1" algn="l" rtl="0">
-      <a:lnSpc>
-        <a:spcPct val="100000"/>
-      </a:lnSpc>
-      <a:spcBef>
-        <a:spcPts val="0"/>
-      </a:spcBef>
-      <a:spcAft>
-        <a:spcPts val="0"/>
-      </a:spcAft>
-      <a:buClr>
-        <a:srgbClr val="000000"/>
-      </a:buClr>
-      <a:buFont typeface="Arial"/>
-      <a:defRPr sz="1400" b="0" i="0" u="none" strike="noStrike" cap="none" spc="0">
-        <a:solidFill>
-          <a:srgbClr val="000000"/>
-        </a:solidFill>
-        <a:latin typeface="Arial"/>
-        <a:ea typeface="Arial"/>
-        <a:cs typeface="Arial"/>
-        <a:sym typeface="Arial"/>
-      </a:defRPr>
-    </a:lvl2pPr>
-    <a:lvl3pPr marR="0" lvl="2" algn="l" rtl="0">
-      <a:lnSpc>
-        <a:spcPct val="100000"/>
-      </a:lnSpc>
-      <a:spcBef>
-        <a:spcPts val="0"/>
-      </a:spcBef>
-      <a:spcAft>
-        <a:spcPts val="0"/>
-      </a:spcAft>
-      <a:buClr>
-        <a:srgbClr val="000000"/>
-      </a:buClr>
-      <a:buFont typeface="Arial"/>
-      <a:defRPr sz="1400" b="0" i="0" u="none" strike="noStrike" cap="none" spc="0">
-        <a:solidFill>
-          <a:srgbClr val="000000"/>
-        </a:solidFill>
-        <a:latin typeface="Arial"/>
-        <a:ea typeface="Arial"/>
-        <a:cs typeface="Arial"/>
-        <a:sym typeface="Arial"/>
-      </a:defRPr>
-    </a:lvl3pPr>
-    <a:lvl4pPr marR="0" lvl="3" algn="l" rtl="0">
-      <a:lnSpc>
-        <a:spcPct val="100000"/>
-      </a:lnSpc>
-      <a:spcBef>
-        <a:spcPts val="0"/>
-      </a:spcBef>
-      <a:spcAft>
-        <a:spcPts val="0"/>
-      </a:spcAft>
-      <a:buClr>
-        <a:srgbClr val="000000"/>
-      </a:buClr>
-      <a:buFont typeface="Arial"/>
-      <a:defRPr sz="1400" b="0" i="0" u="none" strike="noStrike" cap="none" spc="0">
-        <a:solidFill>
-          <a:srgbClr val="000000"/>
-        </a:solidFill>
-        <a:latin typeface="Arial"/>
-        <a:ea typeface="Arial"/>
-        <a:cs typeface="Arial"/>
-        <a:sym typeface="Arial"/>
-      </a:defRPr>
-    </a:lvl4pPr>
-    <a:lvl5pPr marR="0" lvl="4" algn="l" rtl="0">
-      <a:lnSpc>
-        <a:spcPct val="100000"/>
-      </a:lnSpc>
-      <a:spcBef>
-        <a:spcPts val="0"/>
-      </a:spcBef>
-      <a:spcAft>
-        <a:spcPts val="0"/>
-      </a:spcAft>
-      <a:buClr>
-        <a:srgbClr val="000000"/>
-      </a:buClr>
-      <a:buFont typeface="Arial"/>
-      <a:defRPr sz="1400" b="0" i="0" u="none" strike="noStrike" cap="none" spc="0">
-        <a:solidFill>
-          <a:srgbClr val="000000"/>
-        </a:solidFill>
-        <a:latin typeface="Arial"/>
-        <a:ea typeface="Arial"/>
-        <a:cs typeface="Arial"/>
-        <a:sym typeface="Arial"/>
-      </a:defRPr>
-    </a:lvl5pPr>
-    <a:lvl6pPr marR="0" lvl="5" algn="l" rtl="0">
-      <a:lnSpc>
-        <a:spcPct val="100000"/>
-      </a:lnSpc>
-      <a:spcBef>
-        <a:spcPts val="0"/>
-      </a:spcBef>
-      <a:spcAft>
-        <a:spcPts val="0"/>
-      </a:spcAft>
-      <a:buClr>
-        <a:srgbClr val="000000"/>
-      </a:buClr>
-      <a:buFont typeface="Arial"/>
-      <a:defRPr sz="1400" b="0" i="0" u="none" strike="noStrike" cap="none" spc="0">
-        <a:solidFill>
-          <a:srgbClr val="000000"/>
-        </a:solidFill>
-        <a:latin typeface="Arial"/>
-        <a:ea typeface="Arial"/>
-        <a:cs typeface="Arial"/>
-        <a:sym typeface="Arial"/>
-      </a:defRPr>
-    </a:lvl6pPr>
-    <a:lvl7pPr marR="0" lvl="6" algn="l" rtl="0">
-      <a:lnSpc>
-        <a:spcPct val="100000"/>
-      </a:lnSpc>
-      <a:spcBef>
-        <a:spcPts val="0"/>
-      </a:spcBef>
-      <a:spcAft>
-        <a:spcPts val="0"/>
-      </a:spcAft>
-      <a:buClr>
-        <a:srgbClr val="000000"/>
-      </a:buClr>
-      <a:buFont typeface="Arial"/>
-      <a:defRPr sz="1400" b="0" i="0" u="none" strike="noStrike" cap="none" spc="0">
-        <a:solidFill>
-          <a:srgbClr val="000000"/>
-        </a:solidFill>
-        <a:latin typeface="Arial"/>
-        <a:ea typeface="Arial"/>
-        <a:cs typeface="Arial"/>
-        <a:sym typeface="Arial"/>
-      </a:defRPr>
-    </a:lvl7pPr>
-    <a:lvl8pPr marR="0" lvl="7" algn="l" rtl="0">
-      <a:lnSpc>
-        <a:spcPct val="100000"/>
-      </a:lnSpc>
-      <a:spcBef>
-        <a:spcPts val="0"/>
-      </a:spcBef>
-      <a:spcAft>
-        <a:spcPts val="0"/>
-      </a:spcAft>
-      <a:buClr>
-        <a:srgbClr val="000000"/>
-      </a:buClr>
-      <a:buFont typeface="Arial"/>
-      <a:defRPr sz="1400" b="0" i="0" u="none" strike="noStrike" cap="none" spc="0">
-        <a:solidFill>
-          <a:srgbClr val="000000"/>
-        </a:solidFill>
-        <a:latin typeface="Arial"/>
-        <a:ea typeface="Arial"/>
-        <a:cs typeface="Arial"/>
-        <a:sym typeface="Arial"/>
-      </a:defRPr>
-    </a:lvl8pPr>
-    <a:lvl9pPr marR="0" lvl="8" algn="l" rtl="0">
-      <a:lnSpc>
-        <a:spcPct val="100000"/>
-      </a:lnSpc>
-      <a:spcBef>
-        <a:spcPts val="0"/>
-      </a:spcBef>
-      <a:spcAft>
-        <a:spcPts val="0"/>
-      </a:spcAft>
-      <a:buClr>
-        <a:srgbClr val="000000"/>
-      </a:buClr>
-      <a:buFont typeface="Arial"/>
-      <a:defRPr sz="1400" b="0" i="0" u="none" strike="noStrike" cap="none" spc="0">
-        <a:solidFill>
-          <a:srgbClr val="000000"/>
-        </a:solidFill>
-        <a:latin typeface="Arial"/>
-        <a:ea typeface="Arial"/>
-        <a:cs typeface="Arial"/>
-        <a:sym typeface="Arial"/>
-      </a:defRPr>
-    </a:lvl9pPr>
   </p:notesStyle>
 </p:notesMaster>
 </file>
@@ -937,7 +734,7 @@
           <a:bodyPr/>
           <a:lstStyle/>
           <a:p>
-            <a:endParaRPr lang="en-US"/>
+            <a:endParaRPr lang="en-US" dirty="0"/>
           </a:p>
         </p:txBody>
       </p:sp>
@@ -1003,7 +800,7 @@
           <a:bodyPr/>
           <a:lstStyle/>
           <a:p>
-            <a:endParaRPr lang="en-US"/>
+            <a:endParaRPr lang="en-US" dirty="0"/>
           </a:p>
         </p:txBody>
       </p:sp>
@@ -1023,7 +820,8 @@
           <a:lstStyle/>
           <a:p>
             <a:r>
-              <a:t>Adam Shostack, Threat Modeling: Designing for Security, Wiley 2014. STRIDE: Loren Kohnfelder and Praerit Garg, Microsoft, 1999. OWASP Threat Modeling Cheat Sheet, cheatsheetseries.owasp.org. Manadhata and Wing, An Attack Surface Metric, IEEE TSE 2011. Visa: github.com/visa/visa-vulnerability-agentic-harness, stages S1 to S3 and 'threat modeling before analysis'. Capital One: github.com/capitalone/vulnhunter, Recon then Parallel Hunt, attacker-first forward analysis from entry points.</a:t>
+              <a:rPr dirty="0"/>
+              <a:t>OWASP Top 10:2025, released 6 November 2025: eight families ranked from data on over 2.8 million applications, two raised by the practitioner survey, 589 CWEs considered. Over the 49 HW1 alerts: integrity failures 26, injection 7, cryptographic failures 6, misconfiguration 6 (the Benchmark's XML parses), and 4 outside the ten (B113, CWE-400).</a:t>
             </a:r>
           </a:p>
         </p:txBody>
@@ -1037,71 +835,6 @@
 </file>
 
 <file path=ppt/notesSlides/notesSlide11.xml><?xml version="1.0" encoding="utf-8"?>
-<p:notes xmlns:a="http://schemas.openxmlformats.org/drawingml/2006/main" xmlns:r="http://schemas.openxmlformats.org/officeDocument/2006/relationships" xmlns:p="http://schemas.openxmlformats.org/presentationml/2006/main">
-  <p:cSld>
-    <p:spTree>
-      <p:nvGrpSpPr>
-        <p:cNvPr id="1" name=""/>
-        <p:cNvGrpSpPr/>
-        <p:nvPr/>
-      </p:nvGrpSpPr>
-      <p:grpSpPr>
-        <a:xfrm>
-          <a:off x="0" y="0"/>
-          <a:ext cx="0" cy="0"/>
-          <a:chOff x="0" y="0"/>
-          <a:chExt cx="0" cy="0"/>
-        </a:xfrm>
-      </p:grpSpPr>
-      <p:sp>
-        <p:nvSpPr>
-          <p:cNvPr id="2" name="Slide Image Placeholder 1"/>
-          <p:cNvSpPr>
-            <a:spLocks noGrp="1" noRot="1" noChangeAspect="1"/>
-          </p:cNvSpPr>
-          <p:nvPr>
-            <p:ph type="sldImg" idx="2"/>
-          </p:nvPr>
-        </p:nvSpPr>
-        <p:spPr/>
-        <p:txBody>
-          <a:bodyPr/>
-          <a:lstStyle/>
-          <a:p>
-            <a:endParaRPr lang="en-US"/>
-          </a:p>
-        </p:txBody>
-      </p:sp>
-      <p:sp>
-        <p:nvSpPr>
-          <p:cNvPr id="3" name="Notes Placeholder 2"/>
-          <p:cNvSpPr>
-            <a:spLocks noGrp="1"/>
-          </p:cNvSpPr>
-          <p:nvPr>
-            <p:ph type="body" idx="1"/>
-          </p:nvPr>
-        </p:nvSpPr>
-        <p:spPr/>
-        <p:txBody>
-          <a:bodyPr/>
-          <a:lstStyle/>
-          <a:p>
-            <a:r>
-              <a:t>OWASP Top 10:2025, released 6 November 2025: eight families ranked from data on over 2.8 million applications, two raised by the practitioner survey, 589 CWEs considered. Over the 49 HW1 alerts: integrity failures 26, injection 7, cryptographic failures 6, misconfiguration 6 (the Benchmark's XML parses), and 4 outside the ten (B113, CWE-400).</a:t>
-            </a:r>
-          </a:p>
-        </p:txBody>
-      </p:sp>
-    </p:spTree>
-  </p:cSld>
-  <p:clrMapOvr>
-    <a:masterClrMapping/>
-  </p:clrMapOvr>
-</p:notes>
-</file>
-
-<file path=ppt/notesSlides/notesSlide12.xml><?xml version="1.0" encoding="utf-8"?>
 <p:notes xmlns:a="http://schemas.openxmlformats.org/drawingml/2006/main" xmlns:r="http://schemas.openxmlformats.org/officeDocument/2006/relationships" xmlns:p="http://schemas.openxmlformats.org/presentationml/2006/main">
   <p:cSld>
     <p:spTree>
@@ -1145,7 +878,7 @@
           <a:bodyPr/>
           <a:lstStyle/>
           <a:p>
-            <a:endParaRPr lang="en-US"/>
+            <a:endParaRPr lang="en-US" dirty="0"/>
           </a:p>
         </p:txBody>
       </p:sp>
@@ -1171,6 +904,7 @@
           <a:lstStyle/>
           <a:p>
             <a:r>
+              <a:rPr dirty="0"/>
               <a:t>OWASP Top 10:2025, released 6 November 2025: eight families ranked from data on over 2.8 million applications, two raised by the practitioner survey, 589 CWEs considered. Over the 49 HW1 alerts: integrity failures 26, injection 7, cryptographic failures 6, misconfiguration 6 (the Benchmark's XML parses), and 4 outside the ten (B113, CWE-400).</a:t>
             </a:r>
           </a:p>
@@ -1182,6 +916,80 @@
         <p14:creationId xmlns:p14="http://schemas.microsoft.com/office/powerpoint/2010/main" val="4099259612"/>
       </p:ext>
     </p:extLst>
+  </p:cSld>
+  <p:clrMapOvr>
+    <a:masterClrMapping/>
+  </p:clrMapOvr>
+</p:notes>
+</file>
+
+<file path=ppt/notesSlides/notesSlide12.xml><?xml version="1.0" encoding="utf-8"?>
+<p:notes xmlns:a="http://schemas.openxmlformats.org/drawingml/2006/main" xmlns:r="http://schemas.openxmlformats.org/officeDocument/2006/relationships" xmlns:p="http://schemas.openxmlformats.org/presentationml/2006/main">
+  <p:cSld>
+    <p:spTree>
+      <p:nvGrpSpPr>
+        <p:cNvPr id="1" name=""/>
+        <p:cNvGrpSpPr/>
+        <p:nvPr/>
+      </p:nvGrpSpPr>
+      <p:grpSpPr>
+        <a:xfrm>
+          <a:off x="0" y="0"/>
+          <a:ext cx="0" cy="0"/>
+          <a:chOff x="0" y="0"/>
+          <a:chExt cx="0" cy="0"/>
+        </a:xfrm>
+      </p:grpSpPr>
+      <p:sp>
+        <p:nvSpPr>
+          <p:cNvPr id="2" name="Slide Image Placeholder 1"/>
+          <p:cNvSpPr>
+            <a:spLocks noGrp="1" noRot="1" noChangeAspect="1"/>
+          </p:cNvSpPr>
+          <p:nvPr>
+            <p:ph type="sldImg" idx="2"/>
+          </p:nvPr>
+        </p:nvSpPr>
+        <p:spPr/>
+        <p:txBody>
+          <a:bodyPr/>
+          <a:lstStyle/>
+          <a:p>
+            <a:endParaRPr lang="en-US" dirty="0"/>
+          </a:p>
+        </p:txBody>
+      </p:sp>
+      <p:sp>
+        <p:nvSpPr>
+          <p:cNvPr id="3" name="Notes Placeholder 2"/>
+          <p:cNvSpPr>
+            <a:spLocks noGrp="1"/>
+          </p:cNvSpPr>
+          <p:nvPr>
+            <p:ph type="body" idx="1"/>
+          </p:nvPr>
+        </p:nvSpPr>
+        <p:spPr/>
+        <p:txBody>
+          <a:bodyPr/>
+          <a:lstStyle/>
+          <a:p>
+            <a:r>
+              <a:rPr dirty="0"/>
+              <a:t>Injection alone maps 37 CWEs in the 2025 Top 10, among them CWE-89, CWE-78, CWE-94 and CWE-95. Bandit 1.9.4 stamps </a:t>
+            </a:r>
+            <a:r>
+              <a:rPr dirty="0" err="1"/>
+              <a:t>issue_cwe</a:t>
+            </a:r>
+            <a:r>
+              <a:rPr dirty="0"/>
+              <a:t> on every result.</a:t>
+            </a:r>
+          </a:p>
+        </p:txBody>
+      </p:sp>
+    </p:spTree>
   </p:cSld>
   <p:clrMapOvr>
     <a:masterClrMapping/>
@@ -1221,7 +1029,7 @@
           <a:bodyPr/>
           <a:lstStyle/>
           <a:p>
-            <a:endParaRPr lang="en-US"/>
+            <a:endParaRPr lang="en-US" dirty="0"/>
           </a:p>
         </p:txBody>
       </p:sp>
@@ -1241,7 +1049,8 @@
           <a:lstStyle/>
           <a:p>
             <a:r>
-              <a:t>Injection alone maps 37 CWEs in the 2025 Top 10, among them CWE-89, CWE-78, CWE-94 and CWE-95. Bandit 1.9.4 stamps issue_cwe on every result.</a:t>
+              <a:rPr dirty="0"/>
+              <a:t>The call at the bottom of the ladder is the sink: the place where outside data does its harm, and the line a scanner rule points at. Bandit's rule for a request without a timeout reports CWE-400, which sits in none of the ten families: a scanner's rules and the Top 10 are different lists.</a:t>
             </a:r>
           </a:p>
         </p:txBody>
@@ -1286,7 +1095,7 @@
           <a:bodyPr/>
           <a:lstStyle/>
           <a:p>
-            <a:endParaRPr lang="en-US"/>
+            <a:endParaRPr lang="en-US" dirty="0"/>
           </a:p>
         </p:txBody>
       </p:sp>
@@ -1306,7 +1115,8 @@
           <a:lstStyle/>
           <a:p>
             <a:r>
-              <a:t>The call at the bottom of the ladder is the sink: the place where outside data does its harm, and the line a scanner rule points at. Bandit's rule for a request without a timeout reports CWE-400, which sits in none of the ten families: a scanner's rules and the Top 10 are different lists.</a:t>
+              <a:rPr dirty="0"/>
+              <a:t>Bandit's own description: it processes each file, builds an AST from it, and runs appropriate plugins against the AST nodes. HW2 and HW3 bring in other discovery tools.</a:t>
             </a:r>
           </a:p>
         </p:txBody>
@@ -1351,7 +1161,7 @@
           <a:bodyPr/>
           <a:lstStyle/>
           <a:p>
-            <a:endParaRPr lang="en-US"/>
+            <a:endParaRPr lang="en-US" dirty="0"/>
           </a:p>
         </p:txBody>
       </p:sp>
@@ -1371,7 +1181,56 @@
           <a:lstStyle/>
           <a:p>
             <a:r>
-              <a:t>Bandit's own description: it processes each file, builds an AST from it, and runs appropriate plugins against the AST nodes. HW2 and HW3 bring in other discovery tools.</a:t>
+              <a:rPr dirty="0"/>
+              <a:t>The tree is Python's own: </a:t>
+            </a:r>
+            <a:r>
+              <a:rPr dirty="0" err="1"/>
+              <a:t>ast.parse</a:t>
+            </a:r>
+            <a:r>
+              <a:rPr dirty="0"/>
+              <a:t> of line 131 of </a:t>
+            </a:r>
+            <a:r>
+              <a:rPr dirty="0" err="1"/>
+              <a:t>radicale</a:t>
+            </a:r>
+            <a:r>
+              <a:rPr dirty="0"/>
+              <a:t>/sharing/</a:t>
+            </a:r>
+            <a:r>
+              <a:rPr dirty="0" err="1"/>
+              <a:t>files.py</a:t>
+            </a:r>
+            <a:r>
+              <a:rPr dirty="0"/>
+              <a:t> gives Assign(targets=[Tuple(Name version, Name row)], value=Call(</a:t>
+            </a:r>
+            <a:r>
+              <a:rPr dirty="0" err="1"/>
+              <a:t>func</a:t>
+            </a:r>
+            <a:r>
+              <a:rPr dirty="0"/>
+              <a:t>=Attribute(Name pickle, load), </a:t>
+            </a:r>
+            <a:r>
+              <a:rPr dirty="0" err="1"/>
+              <a:t>args</a:t>
+            </a:r>
+            <a:r>
+              <a:rPr dirty="0"/>
+              <a:t>=[Name fb])). Bandit's blacklist checker takes the qualified name of the called function, </a:t>
+            </a:r>
+            <a:r>
+              <a:rPr dirty="0" err="1"/>
+              <a:t>pickle.load</a:t>
+            </a:r>
+            <a:r>
+              <a:rPr dirty="0"/>
+              <a:t>, and looks it up in the B301 entry. Figure source: slides/figures/hw1-ast-rule.tikz.</a:t>
             </a:r>
           </a:p>
         </p:txBody>
@@ -1416,7 +1275,7 @@
           <a:bodyPr/>
           <a:lstStyle/>
           <a:p>
-            <a:endParaRPr lang="en-US"/>
+            <a:endParaRPr lang="en-US" dirty="0"/>
           </a:p>
         </p:txBody>
       </p:sp>
@@ -1436,7 +1295,20 @@
           <a:lstStyle/>
           <a:p>
             <a:r>
-              <a:t>The tree is Python's own: ast.parse of line 131 of radicale/sharing/files.py gives Assign(targets=[Tuple(Name version, Name row)], value=Call(func=Attribute(Name pickle, load), args=[Name fb])). Bandit's blacklist checker takes the qualified name of the called function, pickle.load, and looks it up in the B301 entry. Figure source: slides/figures/hw1-ast-rule.tikz.</a:t>
+              <a:rPr dirty="0" err="1"/>
+              <a:t>build_conf_dict</a:t>
+            </a:r>
+            <a:r>
+              <a:rPr dirty="0"/>
+              <a:t> in bandit/blacklists/</a:t>
+            </a:r>
+            <a:r>
+              <a:rPr dirty="0" err="1"/>
+              <a:t>utils.py</a:t>
+            </a:r>
+            <a:r>
+              <a:rPr dirty="0"/>
+              <a:t> takes a name, an id, a CWE, the qualified names, the message, and a level that defaults to MEDIUM.</a:t>
             </a:r>
           </a:p>
         </p:txBody>
@@ -1454,7 +1326,13 @@
   <p:cSld>
     <p:spTree>
       <p:nvGrpSpPr>
-        <p:cNvPr id="1" name=""/>
+        <p:cNvPr id="1" name="">
+          <a:extLst>
+            <a:ext uri="{FF2B5EF4-FFF2-40B4-BE49-F238E27FC236}">
+              <a16:creationId xmlns:a16="http://schemas.microsoft.com/office/drawing/2014/main" id="{3DDD8162-FDE1-25BF-8655-EB2DB6142153}"/>
+            </a:ext>
+          </a:extLst>
+        </p:cNvPr>
         <p:cNvGrpSpPr/>
         <p:nvPr/>
       </p:nvGrpSpPr>
@@ -1468,7 +1346,13 @@
       </p:grpSpPr>
       <p:sp>
         <p:nvSpPr>
-          <p:cNvPr id="2" name="Slide Image Placeholder 1"/>
+          <p:cNvPr id="2" name="Slide Image Placeholder 1">
+            <a:extLst>
+              <a:ext uri="{FF2B5EF4-FFF2-40B4-BE49-F238E27FC236}">
+                <a16:creationId xmlns:a16="http://schemas.microsoft.com/office/drawing/2014/main" id="{5E4B5A79-D67D-59D7-6286-195606984387}"/>
+              </a:ext>
+            </a:extLst>
+          </p:cNvPr>
           <p:cNvSpPr>
             <a:spLocks noGrp="1" noRot="1" noChangeAspect="1"/>
           </p:cNvSpPr>
@@ -1481,13 +1365,19 @@
           <a:bodyPr/>
           <a:lstStyle/>
           <a:p>
-            <a:endParaRPr lang="en-US"/>
+            <a:endParaRPr lang="en-US" dirty="0"/>
           </a:p>
         </p:txBody>
       </p:sp>
       <p:sp>
         <p:nvSpPr>
-          <p:cNvPr id="3" name="Notes Placeholder 2"/>
+          <p:cNvPr id="3" name="Notes Placeholder 2">
+            <a:extLst>
+              <a:ext uri="{FF2B5EF4-FFF2-40B4-BE49-F238E27FC236}">
+                <a16:creationId xmlns:a16="http://schemas.microsoft.com/office/drawing/2014/main" id="{B9DE1D64-2C76-9D8E-CC2E-FFB231154BD7}"/>
+              </a:ext>
+            </a:extLst>
+          </p:cNvPr>
           <p:cNvSpPr>
             <a:spLocks noGrp="1"/>
           </p:cNvSpPr>
@@ -1501,12 +1391,30 @@
           <a:lstStyle/>
           <a:p>
             <a:r>
-              <a:t>build_conf_dict in bandit/blacklists/utils.py takes a name, an id, a CWE, the qualified names, the message, and a level that defaults to MEDIUM.</a:t>
+              <a:rPr dirty="0" err="1"/>
+              <a:t>build_conf_dict</a:t>
+            </a:r>
+            <a:r>
+              <a:rPr dirty="0"/>
+              <a:t> in bandit/blacklists/</a:t>
+            </a:r>
+            <a:r>
+              <a:rPr dirty="0" err="1"/>
+              <a:t>utils.py</a:t>
+            </a:r>
+            <a:r>
+              <a:rPr dirty="0"/>
+              <a:t> takes a name, an id, a CWE, the qualified names, the message, and a level that defaults to MEDIUM.</a:t>
             </a:r>
           </a:p>
         </p:txBody>
       </p:sp>
     </p:spTree>
+    <p:extLst>
+      <p:ext uri="{BB962C8B-B14F-4D97-AF65-F5344CB8AC3E}">
+        <p14:creationId xmlns:p14="http://schemas.microsoft.com/office/powerpoint/2010/main" val="44739023"/>
+      </p:ext>
+    </p:extLst>
   </p:cSld>
   <p:clrMapOvr>
     <a:masterClrMapping/>
@@ -1546,7 +1454,7 @@
           <a:bodyPr/>
           <a:lstStyle/>
           <a:p>
-            <a:endParaRPr lang="en-US"/>
+            <a:endParaRPr lang="en-US" dirty="0"/>
           </a:p>
         </p:txBody>
       </p:sp>
@@ -1566,6 +1474,7 @@
           <a:lstStyle/>
           <a:p>
             <a:r>
+              <a:rPr dirty="0"/>
               <a:t>Values from Bandit 1.9.4 on the three targets. B608 reports MEDIUM confidence when the string reaches execute; on the Benchmark cases it reported LOW.</a:t>
             </a:r>
           </a:p>
@@ -1611,7 +1520,7 @@
           <a:bodyPr/>
           <a:lstStyle/>
           <a:p>
-            <a:endParaRPr lang="en-US"/>
+            <a:endParaRPr lang="en-US" dirty="0"/>
           </a:p>
         </p:txBody>
       </p:sp>
@@ -1685,7 +1594,7 @@
           <a:bodyPr/>
           <a:lstStyle/>
           <a:p>
-            <a:endParaRPr lang="en-US"/>
+            <a:endParaRPr lang="en-US" dirty="0"/>
           </a:p>
         </p:txBody>
       </p:sp>
@@ -1705,7 +1614,16 @@
           <a:lstStyle/>
           <a:p>
             <a:r>
-              <a:t>Lecture 1's problem statement named discover, triage and validate; patching is the fourth stage, and it is the one cyberbird demonstrates. Validation and patching return with HW2 and HW3.</a:t>
+              <a:rPr dirty="0"/>
+              <a:t>Lecture 1's problem statement named discover, triage and validate; patching is the fourth stage, and it is the one </a:t>
+            </a:r>
+            <a:r>
+              <a:rPr dirty="0" err="1"/>
+              <a:t>cyberbird</a:t>
+            </a:r>
+            <a:r>
+              <a:rPr dirty="0"/>
+              <a:t> demonstrates. Validation and patching return with HW2 and HW3.</a:t>
             </a:r>
           </a:p>
         </p:txBody>
@@ -1750,7 +1668,7 @@
           <a:bodyPr/>
           <a:lstStyle/>
           <a:p>
-            <a:endParaRPr lang="en-US"/>
+            <a:endParaRPr lang="en-US" dirty="0"/>
           </a:p>
         </p:txBody>
       </p:sp>
@@ -1770,7 +1688,40 @@
           <a:lstStyle/>
           <a:p>
             <a:r>
-              <a:t>The full record also carries issue_text, the message from the rule; line_range; col_offset; code, the three lines around the match; and more_info, a link to the rule's page.</a:t>
+              <a:rPr dirty="0"/>
+              <a:t>The full record also carries </a:t>
+            </a:r>
+            <a:r>
+              <a:rPr dirty="0" err="1"/>
+              <a:t>issue_text</a:t>
+            </a:r>
+            <a:r>
+              <a:rPr dirty="0"/>
+              <a:t>, the message from the rule; </a:t>
+            </a:r>
+            <a:r>
+              <a:rPr dirty="0" err="1"/>
+              <a:t>line_range</a:t>
+            </a:r>
+            <a:r>
+              <a:rPr dirty="0"/>
+              <a:t>; </a:t>
+            </a:r>
+            <a:r>
+              <a:rPr dirty="0" err="1"/>
+              <a:t>col_offset</a:t>
+            </a:r>
+            <a:r>
+              <a:rPr dirty="0"/>
+              <a:t>; code, the three lines around the match; and </a:t>
+            </a:r>
+            <a:r>
+              <a:rPr dirty="0" err="1"/>
+              <a:t>more_info</a:t>
+            </a:r>
+            <a:r>
+              <a:rPr dirty="0"/>
+              <a:t>, a link to the rule's page.</a:t>
             </a:r>
           </a:p>
         </p:txBody>
@@ -1815,7 +1766,7 @@
           <a:bodyPr/>
           <a:lstStyle/>
           <a:p>
-            <a:endParaRPr lang="en-US"/>
+            <a:endParaRPr lang="en-US" dirty="0"/>
           </a:p>
         </p:txBody>
       </p:sp>
@@ -1835,6 +1786,7 @@
           <a:lstStyle/>
           <a:p>
             <a:r>
+              <a:rPr dirty="0"/>
               <a:t>NIST's glossary: a vulnerability is a weakness in an information system, system security procedures, internal controls, or implementation that could be exploited or triggered by a threat source.</a:t>
             </a:r>
           </a:p>
@@ -1880,7 +1832,7 @@
           <a:bodyPr/>
           <a:lstStyle/>
           <a:p>
-            <a:endParaRPr lang="en-US"/>
+            <a:endParaRPr lang="en-US" dirty="0"/>
           </a:p>
         </p:txBody>
       </p:sp>
@@ -1900,6 +1852,7 @@
           <a:lstStyle/>
           <a:p>
             <a:r>
+              <a:rPr dirty="0"/>
               <a:t>The answer key marks BenchmarkTest00099 as a real SQL injection, CWE-89. Bandit's B608 fires on the f-string.</a:t>
             </a:r>
           </a:p>
@@ -1945,7 +1898,7 @@
           <a:bodyPr/>
           <a:lstStyle/>
           <a:p>
-            <a:endParaRPr lang="en-US"/>
+            <a:endParaRPr lang="en-US" dirty="0"/>
           </a:p>
         </p:txBody>
       </p:sp>
@@ -1965,6 +1918,7 @@
           <a:lstStyle/>
           <a:p>
             <a:r>
+              <a:rPr dirty="0"/>
               <a:t>The answer key marks BenchmarkTest00011 and 00012 as safe. The f-string carries no interpolation at all; the rule matches the shape of the string, and the placeholder and the tuple are the evidence.</a:t>
             </a:r>
           </a:p>
@@ -2010,7 +1964,7 @@
           <a:bodyPr/>
           <a:lstStyle/>
           <a:p>
-            <a:endParaRPr lang="en-US"/>
+            <a:endParaRPr lang="en-US" dirty="0"/>
           </a:p>
         </p:txBody>
       </p:sp>
@@ -2030,6 +1984,7 @@
           <a:lstStyle/>
           <a:p>
             <a:r>
+              <a:rPr dirty="0"/>
               <a:t>The answer key marks BenchmarkTest00074 as real, CWE-94. Bandit's B102 reports CWE-78 for exec; the two catalogues disagree on the number and agree on the family.</a:t>
             </a:r>
           </a:p>
@@ -2075,7 +2030,7 @@
           <a:bodyPr/>
           <a:lstStyle/>
           <a:p>
-            <a:endParaRPr lang="en-US"/>
+            <a:endParaRPr lang="en-US" dirty="0"/>
           </a:p>
         </p:txBody>
       </p:sp>
@@ -2095,6 +2050,7 @@
           <a:lstStyle/>
           <a:p>
             <a:r>
+              <a:rPr dirty="0"/>
               <a:t>The answer key marks BenchmarkTest00073 as safe. Lines 47 to 49, the error message, and 53 and 55, the parentheses around eval, are cut.</a:t>
             </a:r>
           </a:p>
@@ -2140,7 +2096,7 @@
           <a:bodyPr/>
           <a:lstStyle/>
           <a:p>
-            <a:endParaRPr lang="en-US"/>
+            <a:endParaRPr lang="en-US" dirty="0"/>
           </a:p>
         </p:txBody>
       </p:sp>
@@ -2160,6 +2116,7 @@
           <a:lstStyle/>
           <a:p>
             <a:r>
+              <a:rPr dirty="0"/>
               <a:t>The answer key marks all five hash cases Bandit flags as real, CWE-328. Line 72 calls the input a sensitive value; a cache key hashed with MD5 would be label 0.</a:t>
             </a:r>
           </a:p>
@@ -2205,7 +2162,7 @@
           <a:bodyPr/>
           <a:lstStyle/>
           <a:p>
-            <a:endParaRPr lang="en-US"/>
+            <a:endParaRPr lang="en-US" dirty="0"/>
           </a:p>
         </p:txBody>
       </p:sp>
@@ -2225,7 +2182,16 @@
           <a:lstStyle/>
           <a:p>
             <a:r>
-              <a:t>The answer key lists BenchmarkTest00013 under xpathi and marks it safe; the XPath injection is the category under test, and this instance is the safe twin. The B314 alert is a false alarm on its own terms: the parsed file is fixed.</a:t>
+              <a:rPr dirty="0"/>
+              <a:t>The answer key lists BenchmarkTest00013 under </a:t>
+            </a:r>
+            <a:r>
+              <a:rPr dirty="0" err="1"/>
+              <a:t>xpathi</a:t>
+            </a:r>
+            <a:r>
+              <a:rPr dirty="0"/>
+              <a:t> and marks it safe; the XPath injection is the category under test, and this instance is the safe twin. The B314 alert is a false alarm on its own terms: the parsed file is fixed.</a:t>
             </a:r>
           </a:p>
         </p:txBody>
@@ -2270,7 +2236,7 @@
           <a:bodyPr/>
           <a:lstStyle/>
           <a:p>
-            <a:endParaRPr lang="en-US"/>
+            <a:endParaRPr lang="en-US" dirty="0"/>
           </a:p>
         </p:txBody>
       </p:sp>
@@ -2290,6 +2256,7 @@
           <a:lstStyle/>
           <a:p>
             <a:r>
+              <a:rPr dirty="0"/>
               <a:t>Bandit 1.9.4 at MEDIUM or higher on BenchmarkTest00001 to 00099, against expectedresults-0.1.csv: 18 alerts in 17 files, 8 files real. Precision by file 0.47, recall 0.24.</a:t>
             </a:r>
           </a:p>
@@ -2335,7 +2302,7 @@
           <a:bodyPr/>
           <a:lstStyle/>
           <a:p>
-            <a:endParaRPr lang="en-US"/>
+            <a:endParaRPr lang="en-US" dirty="0"/>
           </a:p>
         </p:txBody>
       </p:sp>
@@ -2409,7 +2376,7 @@
           <a:bodyPr/>
           <a:lstStyle/>
           <a:p>
-            <a:endParaRPr lang="en-US"/>
+            <a:endParaRPr lang="en-US" dirty="0"/>
           </a:p>
         </p:txBody>
       </p:sp>
@@ -2429,6 +2396,7 @@
           <a:lstStyle/>
           <a:p>
             <a:r>
+              <a:rPr dirty="0"/>
               <a:t>SAST is static application security testing and DAST is dynamic application security testing. Bandit is HW1's SAST tool. Fuzzing is dynamic testing with generated rather than crafted inputs. Dependency scanning is also called software composition analysis.</a:t>
             </a:r>
           </a:p>
@@ -2474,7 +2442,7 @@
           <a:bodyPr/>
           <a:lstStyle/>
           <a:p>
-            <a:endParaRPr lang="en-US"/>
+            <a:endParaRPr lang="en-US" dirty="0"/>
           </a:p>
         </p:txBody>
       </p:sp>
@@ -2494,6 +2462,7 @@
           <a:lstStyle/>
           <a:p>
             <a:r>
+              <a:rPr dirty="0"/>
               <a:t>The field's feeds: CISA's Known Exploited Vulnerabilities catalogue and the EPSS exploit likelihood score. Google's vulnerability management blueprint weights severity, asset exposure and threat activity into one priority.</a:t>
             </a:r>
           </a:p>
@@ -2539,7 +2508,7 @@
           <a:bodyPr/>
           <a:lstStyle/>
           <a:p>
-            <a:endParaRPr lang="en-US"/>
+            <a:endParaRPr lang="en-US" dirty="0"/>
           </a:p>
         </p:txBody>
       </p:sp>
@@ -2559,7 +2528,16 @@
           <a:lstStyle/>
           <a:p>
             <a:r>
-              <a:t>The brief's report.example.json fixes the field names; the rationale and evidence here are what an agent should write for the guarded eval, and the row omits path, severity and confidence for room.</a:t>
+              <a:rPr dirty="0"/>
+              <a:t>The brief's </a:t>
+            </a:r>
+            <a:r>
+              <a:rPr dirty="0" err="1"/>
+              <a:t>report.example.json</a:t>
+            </a:r>
+            <a:r>
+              <a:rPr dirty="0"/>
+              <a:t> fixes the field names; the rationale and evidence here are what an agent should write for the guarded eval, and the row omits path, severity and confidence for room.</a:t>
             </a:r>
           </a:p>
         </p:txBody>
@@ -2604,7 +2582,7 @@
           <a:bodyPr/>
           <a:lstStyle/>
           <a:p>
-            <a:endParaRPr lang="en-US"/>
+            <a:endParaRPr lang="en-US" dirty="0"/>
           </a:p>
         </p:txBody>
       </p:sp>
@@ -2624,7 +2602,40 @@
           <a:lstStyle/>
           <a:p>
             <a:r>
-              <a:t>Rahul's link: gitlab.com/gitlab-org/security-products/analyzers/semgrep, rules/bandit.yml at e0f35024, line 1231. The same file ports B608 at line 1179, with patterns for %-formatting, .format, f-strings and concatenation feeding execute. The 'A1: Injection' tag is the 2017 numbering of the Top 10.</a:t>
+              <a:rPr dirty="0"/>
+              <a:t>Rahul's link: </a:t>
+            </a:r>
+            <a:r>
+              <a:rPr dirty="0" err="1"/>
+              <a:t>gitlab.com</a:t>
+            </a:r>
+            <a:r>
+              <a:rPr dirty="0"/>
+              <a:t>/</a:t>
+            </a:r>
+            <a:r>
+              <a:rPr dirty="0" err="1"/>
+              <a:t>gitlab</a:t>
+            </a:r>
+            <a:r>
+              <a:rPr dirty="0"/>
+              <a:t>-org/security-products/analyzers/</a:t>
+            </a:r>
+            <a:r>
+              <a:rPr dirty="0" err="1"/>
+              <a:t>semgrep</a:t>
+            </a:r>
+            <a:r>
+              <a:rPr dirty="0"/>
+              <a:t>, rules/</a:t>
+            </a:r>
+            <a:r>
+              <a:rPr dirty="0" err="1"/>
+              <a:t>bandit.yml</a:t>
+            </a:r>
+            <a:r>
+              <a:rPr dirty="0"/>
+              <a:t> at e0f35024, line 1231. The same file ports B608 at line 1179, with patterns for %-formatting, .format, f-strings and concatenation feeding execute. The 'A1: Injection' tag is the 2017 numbering of the Top 10.</a:t>
             </a:r>
           </a:p>
         </p:txBody>
@@ -2669,7 +2680,7 @@
           <a:bodyPr/>
           <a:lstStyle/>
           <a:p>
-            <a:endParaRPr lang="en-US"/>
+            <a:endParaRPr lang="en-US" dirty="0"/>
           </a:p>
         </p:txBody>
       </p:sp>
@@ -2689,7 +2700,16 @@
           <a:lstStyle/>
           <a:p>
             <a:r>
-              <a:t>GitLab's rules/bandit.yml at e0f35024, the B608 entry at line 1179: four direct execute patterns plus the pattern-inside forms for a query built earlier with %, .format or an f-string. BenchmarkTest00099 lines 46 and 49 fill the f-string form. BenchmarkTest00011's f-string carries no hole, so this port does not fire on it, while Bandit's own B608 does. Figure source: slides/figures/hw1-semgrep-rule.tikz.</a:t>
+              <a:rPr dirty="0"/>
+              <a:t>GitLab's rules/</a:t>
+            </a:r>
+            <a:r>
+              <a:rPr dirty="0" err="1"/>
+              <a:t>bandit.yml</a:t>
+            </a:r>
+            <a:r>
+              <a:rPr dirty="0"/>
+              <a:t> at e0f35024, the B608 entry at line 1179: four direct execute patterns plus the pattern-inside forms for a query built earlier with %, .format or an f-string. BenchmarkTest00099 lines 46 and 49 fill the f-string form. BenchmarkTest00011's f-string carries no hole, so this port does not fire on it, while Bandit's own B608 does. Figure source: slides/figures/hw1-semgrep-rule.tikz.</a:t>
             </a:r>
           </a:p>
         </p:txBody>
@@ -2734,7 +2754,7 @@
           <a:bodyPr/>
           <a:lstStyle/>
           <a:p>
-            <a:endParaRPr lang="en-US"/>
+            <a:endParaRPr lang="en-US" dirty="0"/>
           </a:p>
         </p:txBody>
       </p:sp>
@@ -2800,7 +2820,7 @@
           <a:bodyPr/>
           <a:lstStyle/>
           <a:p>
-            <a:endParaRPr lang="en-US"/>
+            <a:endParaRPr lang="en-US" dirty="0"/>
           </a:p>
         </p:txBody>
       </p:sp>
@@ -2820,6 +2840,7 @@
           <a:lstStyle/>
           <a:p>
             <a:r>
+              <a:rPr dirty="0"/>
               <a:t>Manadhata and Wing define the attack surface as the set of ways an adversary can enter the system and potentially cause damage: entry and exit points, channels, and untrusted data items.</a:t>
             </a:r>
           </a:p>
@@ -2865,7 +2886,7 @@
           <a:bodyPr/>
           <a:lstStyle/>
           <a:p>
-            <a:endParaRPr lang="en-US"/>
+            <a:endParaRPr lang="en-US" dirty="0"/>
           </a:p>
         </p:txBody>
       </p:sp>
@@ -2885,6 +2906,7 @@
           <a:lstStyle/>
           <a:p>
             <a:r>
+              <a:rPr dirty="0"/>
               <a:t>The config object is the Benchmark's way of hiding a data flow from a scanner: the value goes in under one key and comes out under the same key.</a:t>
             </a:r>
           </a:p>
@@ -2930,7 +2952,7 @@
           <a:bodyPr/>
           <a:lstStyle/>
           <a:p>
-            <a:endParaRPr lang="en-US"/>
+            <a:endParaRPr lang="en-US" dirty="0"/>
           </a:p>
         </p:txBody>
       </p:sp>
@@ -3312,7 +3334,7 @@
           <a:lstStyle>
             <a:lvl1pPr lvl="0">
               <a:buNone/>
-              <a:defRPr/>
+              <a:defRPr b="0" i="0"/>
             </a:lvl1pPr>
             <a:lvl2pPr lvl="1">
               <a:buNone/>
@@ -3353,7 +3375,7 @@
               <a:pPr/>
               <a:t>‹#›</a:t>
             </a:fld>
-            <a:endParaRPr lang="en"/>
+            <a:endParaRPr lang="en" dirty="0"/>
           </a:p>
         </p:txBody>
       </p:sp>
@@ -3922,13 +3944,18 @@
         <p:spPr/>
         <p:txBody>
           <a:bodyPr/>
-          <a:lstStyle/>
+          <a:lstStyle>
+            <a:lvl1pPr>
+              <a:defRPr b="0" i="0"/>
+            </a:lvl1pPr>
+          </a:lstStyle>
           <a:p>
             <a:fld id="{26FBAF0E-C96E-D64F-8B24-1AA70EC4AC83}" type="slidenum">
               <a:rPr lang="en-US" smtClean="0"/>
+              <a:pPr/>
               <a:t>‹#›</a:t>
             </a:fld>
-            <a:endParaRPr lang="en-US"/>
+            <a:endParaRPr lang="en-US" dirty="0"/>
           </a:p>
         </p:txBody>
       </p:sp>
@@ -3981,13 +4008,18 @@
         <p:spPr/>
         <p:txBody>
           <a:bodyPr/>
-          <a:lstStyle/>
+          <a:lstStyle>
+            <a:lvl1pPr>
+              <a:defRPr b="0" i="0"/>
+            </a:lvl1pPr>
+          </a:lstStyle>
           <a:p>
             <a:fld id="{26FBAF0E-C96E-D64F-8B24-1AA70EC4AC83}" type="slidenum">
               <a:rPr lang="en-US" smtClean="0"/>
+              <a:pPr/>
               <a:t>‹#›</a:t>
             </a:fld>
-            <a:endParaRPr lang="en-US"/>
+            <a:endParaRPr lang="en-US" dirty="0"/>
           </a:p>
         </p:txBody>
       </p:sp>
@@ -4662,10 +4694,11 @@
           <a:bodyPr vert="horz" lIns="91440" tIns="45720" rIns="91440" bIns="45720" rtlCol="0" anchor="ctr"/>
           <a:lstStyle>
             <a:lvl1pPr algn="r">
-              <a:defRPr sz="1050">
+              <a:defRPr sz="1050" b="0" i="0">
                 <a:solidFill>
                   <a:schemeClr val="bg2"/>
                 </a:solidFill>
+                <a:latin typeface="Fira Sans" panose="020B0503050000020004" pitchFamily="34" charset="0"/>
               </a:defRPr>
             </a:lvl1pPr>
           </a:lstStyle>
@@ -4675,7 +4708,7 @@
               <a:pPr/>
               <a:t>‹#›</a:t>
             </a:fld>
-            <a:endParaRPr lang="en-US"/>
+            <a:endParaRPr lang="en-US" dirty="0"/>
           </a:p>
         </p:txBody>
       </p:sp>
@@ -5549,6 +5582,7 @@
           <a:lstStyle/>
           <a:p>
             <a:r>
+              <a:rPr dirty="0"/>
               <a:t>Attack surface: where outside data enters</a:t>
             </a:r>
           </a:p>
@@ -5730,7 +5764,7 @@
           <a:p>
             <a:pPr algn="ctr"/>
             <a:r>
-              <a:rPr sz="1400" b="0">
+              <a:rPr sz="1400" b="1" dirty="0">
                 <a:solidFill>
                   <a:schemeClr val="tx2"/>
                 </a:solidFill>
@@ -5847,7 +5881,7 @@
         <p:spPr>
           <a:xfrm>
             <a:off x="319251" y="700000"/>
-            <a:ext cx="6014545" cy="509712"/>
+            <a:ext cx="6014545" cy="523220"/>
           </a:xfrm>
           <a:prstGeom prst="rect">
             <a:avLst/>
@@ -5861,10 +5895,11 @@
           <a:lstStyle/>
           <a:p>
             <a:r>
-              <a:rPr sz="1400" b="1">
+              <a:rPr sz="1400" dirty="0">
                 <a:solidFill>
                   <a:srgbClr val="28285E"/>
                 </a:solidFill>
+                <a:latin typeface="Fira Sans" panose="020B0503050000020004" pitchFamily="34" charset="0"/>
               </a:rPr>
               <a:t>The form field enters at line 31 and, after a detour through a config object, is bar at line 42.</a:t>
             </a:r>
@@ -5880,7 +5915,7 @@
         <p:spPr>
           <a:xfrm>
             <a:off x="319251" y="1439712"/>
-            <a:ext cx="6014545" cy="200000"/>
+            <a:ext cx="4637488" cy="184666"/>
           </a:xfrm>
           <a:prstGeom prst="rect">
             <a:avLst/>
@@ -5894,10 +5929,11 @@
           <a:lstStyle/>
           <a:p>
             <a:r>
-              <a:rPr sz="1200" b="1">
+              <a:rPr sz="1200" dirty="0">
                 <a:solidFill>
                   <a:srgbClr val="28285E"/>
                 </a:solidFill>
+                <a:latin typeface="Fira Sans" panose="020B0503050000020004" pitchFamily="34" charset="0"/>
               </a:rPr>
               <a:t>BenchmarkTest00099.py, BenchmarkTest00099_post, lines 31 to 42</a:t>
             </a:r>
@@ -6829,7 +6865,7 @@
           <a:lstStyle/>
           <a:p>
             <a:r>
-              <a:rPr sz="1400" b="1" dirty="0">
+              <a:rPr sz="1400" dirty="0">
                 <a:solidFill>
                   <a:srgbClr val="28285E"/>
                 </a:solidFill>
@@ -7451,712 +7487,6 @@
       </p:grpSpPr>
       <p:sp>
         <p:nvSpPr>
-          <p:cNvPr id="2" name="Title 1"/>
-          <p:cNvSpPr>
-            <a:spLocks noGrp="1"/>
-          </p:cNvSpPr>
-          <p:nvPr>
-            <p:ph type="title"/>
-          </p:nvPr>
-        </p:nvSpPr>
-        <p:spPr/>
-        <p:txBody>
-          <a:bodyPr/>
-          <a:lstStyle/>
-          <a:p>
-            <a:r>
-              <a:t>Threat modelling: sources and two practices</a:t>
-            </a:r>
-          </a:p>
-        </p:txBody>
-      </p:sp>
-      <p:sp>
-        <p:nvSpPr>
-          <p:cNvPr id="3" name="TextBox 2"/>
-          <p:cNvSpPr txBox="1"/>
-          <p:nvPr/>
-        </p:nvSpPr>
-        <p:spPr>
-          <a:xfrm>
-            <a:off x="319251" y="700000"/>
-            <a:ext cx="6014545" cy="509712"/>
-          </a:xfrm>
-          <a:prstGeom prst="rect">
-            <a:avLst/>
-          </a:prstGeom>
-          <a:noFill/>
-        </p:spPr>
-        <p:txBody>
-          <a:bodyPr wrap="square" anchor="t">
-            <a:spAutoFit/>
-          </a:bodyPr>
-          <a:lstStyle/>
-          <a:p>
-            <a:r>
-              <a:rPr sz="1400" b="1">
-                <a:solidFill>
-                  <a:srgbClr val="28285E"/>
-                </a:solidFill>
-              </a:rPr>
-              <a:t>The idea has a short reading list, and the harnesses the field ships run it as a stage before any analysis.</a:t>
-            </a:r>
-          </a:p>
-        </p:txBody>
-      </p:sp>
-      <p:graphicFrame>
-        <p:nvGraphicFramePr>
-          <p:cNvPr id="4" name="Table 3"/>
-          <p:cNvGraphicFramePr>
-            <a:graphicFrameLocks noGrp="1"/>
-          </p:cNvGraphicFramePr>
-          <p:nvPr/>
-        </p:nvGraphicFramePr>
-        <p:xfrm>
-          <a:off x="319251" y="1396379"/>
-          <a:ext cx="6014545" cy="2700300"/>
-        </p:xfrm>
-        <a:graphic>
-          <a:graphicData uri="http://schemas.openxmlformats.org/drawingml/2006/table">
-            <a:tbl>
-              <a:tblPr firstRow="1" bandRow="1">
-                <a:tableStyleId>{5C22544A-7EE6-4342-B048-85BDC9FD1C3A}</a:tableStyleId>
-              </a:tblPr>
-              <a:tblGrid>
-                <a:gridCol w="2200000">
-                  <a:extLst>
-                    <a:ext uri="{9D8B030D-6E8A-4147-A177-3AD203B41FA5}">
-                      <a16:colId xmlns:a16="http://schemas.microsoft.com/office/drawing/2014/main" val="20000"/>
-                    </a:ext>
-                  </a:extLst>
-                </a:gridCol>
-                <a:gridCol w="3814545">
-                  <a:extLst>
-                    <a:ext uri="{9D8B030D-6E8A-4147-A177-3AD203B41FA5}">
-                      <a16:colId xmlns:a16="http://schemas.microsoft.com/office/drawing/2014/main" val="20001"/>
-                    </a:ext>
-                  </a:extLst>
-                </a:gridCol>
-              </a:tblGrid>
-              <a:tr h="300000">
-                <a:tc>
-                  <a:txBody>
-                    <a:bodyPr/>
-                    <a:lstStyle/>
-                    <a:p>
-                      <a:pPr>
-                        <a:buNone/>
-                      </a:pPr>
-                      <a:r>
-                        <a:rPr sz="1000" b="1">
-                          <a:solidFill>
-                            <a:schemeClr val="tx1"/>
-                          </a:solidFill>
-                        </a:rPr>
-                        <a:t>Source</a:t>
-                      </a:r>
-                    </a:p>
-                  </a:txBody>
-                  <a:tcPr marL="95250" marR="95250" marT="47625" marB="47625">
-                    <a:lnB w="12700" cap="flat" cmpd="sng" algn="ctr">
-                      <a:solidFill>
-                        <a:schemeClr val="tx1"/>
-                      </a:solidFill>
-                    </a:lnB>
-                    <a:noFill/>
-                  </a:tcPr>
-                </a:tc>
-                <a:tc>
-                  <a:txBody>
-                    <a:bodyPr/>
-                    <a:lstStyle/>
-                    <a:p>
-                      <a:pPr>
-                        <a:buNone/>
-                      </a:pPr>
-                      <a:r>
-                        <a:rPr sz="1000" b="1">
-                          <a:solidFill>
-                            <a:schemeClr val="tx1"/>
-                          </a:solidFill>
-                        </a:rPr>
-                        <a:t>What it gives you</a:t>
-                      </a:r>
-                    </a:p>
-                  </a:txBody>
-                  <a:tcPr marL="95250" marR="95250" marT="47625" marB="47625">
-                    <a:lnB w="12700" cap="flat" cmpd="sng" algn="ctr">
-                      <a:solidFill>
-                        <a:schemeClr val="tx1"/>
-                      </a:solidFill>
-                    </a:lnB>
-                    <a:noFill/>
-                  </a:tcPr>
-                </a:tc>
-                <a:extLst>
-                  <a:ext uri="{0D108BD9-81ED-4DB2-BD59-A6C34878D82A}">
-                    <a16:rowId xmlns:a16="http://schemas.microsoft.com/office/drawing/2014/main" val="10000"/>
-                  </a:ext>
-                </a:extLst>
-              </a:tr>
-              <a:tr h="0">
-                <a:tc>
-                  <a:txBody>
-                    <a:bodyPr/>
-                    <a:lstStyle/>
-                    <a:p>
-                      <a:pPr>
-                        <a:buNone/>
-                      </a:pPr>
-                      <a:r>
-                        <a:rPr sz="1000" b="1">
-                          <a:solidFill>
-                            <a:srgbClr val="28285E"/>
-                          </a:solidFill>
-                        </a:rPr>
-                        <a:t>Shostack, Threat Modeling (2014)</a:t>
-                      </a:r>
-                    </a:p>
-                  </a:txBody>
-                  <a:tcPr marL="95250" marR="95250" marT="47625" marB="47625">
-                    <a:lnT w="12700" cap="flat" cmpd="sng" algn="ctr">
-                      <a:solidFill>
-                        <a:schemeClr val="tx1"/>
-                      </a:solidFill>
-                      <a:prstDash val="solid"/>
-                      <a:round/>
-                      <a:headEnd type="none" w="med" len="med"/>
-                      <a:tailEnd type="none" w="med" len="med"/>
-                    </a:lnT>
-                    <a:lnB w="12700" cap="flat" cmpd="sng" algn="ctr">
-                      <a:solidFill>
-                        <a:schemeClr val="tx1"/>
-                      </a:solidFill>
-                    </a:lnB>
-                    <a:noFill/>
-                  </a:tcPr>
-                </a:tc>
-                <a:tc>
-                  <a:txBody>
-                    <a:bodyPr/>
-                    <a:lstStyle/>
-                    <a:p>
-                      <a:pPr>
-                        <a:buNone/>
-                      </a:pPr>
-                      <a:r>
-                        <a:rPr sz="1000" b="0">
-                          <a:solidFill>
-                            <a:schemeClr val="tx1"/>
-                          </a:solidFill>
-                        </a:rPr>
-                        <a:t>four questions: what are we building, what can go wrong, what will we do about it, did we do a good job</a:t>
-                      </a:r>
-                    </a:p>
-                  </a:txBody>
-                  <a:tcPr marL="95250" marR="95250" marT="47625" marB="47625">
-                    <a:lnT w="12700" cap="flat" cmpd="sng" algn="ctr">
-                      <a:solidFill>
-                        <a:schemeClr val="tx1"/>
-                      </a:solidFill>
-                      <a:prstDash val="solid"/>
-                      <a:round/>
-                      <a:headEnd type="none" w="med" len="med"/>
-                      <a:tailEnd type="none" w="med" len="med"/>
-                    </a:lnT>
-                    <a:lnB w="12700" cap="flat" cmpd="sng" algn="ctr">
-                      <a:solidFill>
-                        <a:schemeClr val="tx1"/>
-                      </a:solidFill>
-                    </a:lnB>
-                    <a:noFill/>
-                  </a:tcPr>
-                </a:tc>
-                <a:extLst>
-                  <a:ext uri="{0D108BD9-81ED-4DB2-BD59-A6C34878D82A}">
-                    <a16:rowId xmlns:a16="http://schemas.microsoft.com/office/drawing/2014/main" val="10001"/>
-                  </a:ext>
-                </a:extLst>
-              </a:tr>
-              <a:tr h="0">
-                <a:tc>
-                  <a:txBody>
-                    <a:bodyPr/>
-                    <a:lstStyle/>
-                    <a:p>
-                      <a:pPr>
-                        <a:buNone/>
-                      </a:pPr>
-                      <a:r>
-                        <a:rPr sz="1000" b="1">
-                          <a:solidFill>
-                            <a:srgbClr val="28285E"/>
-                          </a:solidFill>
-                        </a:rPr>
-                        <a:t>STRIDE, Microsoft (1999)</a:t>
-                      </a:r>
-                    </a:p>
-                  </a:txBody>
-                  <a:tcPr marL="95250" marR="95250" marT="47625" marB="47625">
-                    <a:lnT w="12700" cap="flat" cmpd="sng" algn="ctr">
-                      <a:solidFill>
-                        <a:schemeClr val="tx1"/>
-                      </a:solidFill>
-                      <a:prstDash val="solid"/>
-                      <a:round/>
-                      <a:headEnd type="none" w="med" len="med"/>
-                      <a:tailEnd type="none" w="med" len="med"/>
-                    </a:lnT>
-                    <a:lnB w="12700" cap="flat" cmpd="sng" algn="ctr">
-                      <a:solidFill>
-                        <a:schemeClr val="tx1"/>
-                      </a:solidFill>
-                    </a:lnB>
-                    <a:noFill/>
-                  </a:tcPr>
-                </a:tc>
-                <a:tc>
-                  <a:txBody>
-                    <a:bodyPr/>
-                    <a:lstStyle/>
-                    <a:p>
-                      <a:pPr>
-                        <a:buNone/>
-                      </a:pPr>
-                      <a:r>
-                        <a:rPr sz="1000" b="0">
-                          <a:solidFill>
-                            <a:schemeClr val="tx1"/>
-                          </a:solidFill>
-                        </a:rPr>
-                        <a:t>six threats to check at every boundary: spoofing, tampering, repudiation, disclosure, denial of service, elevation</a:t>
-                      </a:r>
-                    </a:p>
-                  </a:txBody>
-                  <a:tcPr marL="95250" marR="95250" marT="47625" marB="47625">
-                    <a:lnT w="12700" cap="flat" cmpd="sng" algn="ctr">
-                      <a:solidFill>
-                        <a:schemeClr val="tx1"/>
-                      </a:solidFill>
-                      <a:prstDash val="solid"/>
-                      <a:round/>
-                      <a:headEnd type="none" w="med" len="med"/>
-                      <a:tailEnd type="none" w="med" len="med"/>
-                    </a:lnT>
-                    <a:lnB w="12700" cap="flat" cmpd="sng" algn="ctr">
-                      <a:solidFill>
-                        <a:schemeClr val="tx1"/>
-                      </a:solidFill>
-                    </a:lnB>
-                    <a:noFill/>
-                  </a:tcPr>
-                </a:tc>
-                <a:extLst>
-                  <a:ext uri="{0D108BD9-81ED-4DB2-BD59-A6C34878D82A}">
-                    <a16:rowId xmlns:a16="http://schemas.microsoft.com/office/drawing/2014/main" val="10002"/>
-                  </a:ext>
-                </a:extLst>
-              </a:tr>
-              <a:tr h="0">
-                <a:tc>
-                  <a:txBody>
-                    <a:bodyPr/>
-                    <a:lstStyle/>
-                    <a:p>
-                      <a:pPr>
-                        <a:buNone/>
-                      </a:pPr>
-                      <a:r>
-                        <a:rPr sz="1000" b="1">
-                          <a:solidFill>
-                            <a:srgbClr val="28285E"/>
-                          </a:solidFill>
-                        </a:rPr>
-                        <a:t>OWASP Threat Modeling Cheat Sheet</a:t>
-                      </a:r>
-                    </a:p>
-                  </a:txBody>
-                  <a:tcPr marL="95250" marR="95250" marT="47625" marB="47625">
-                    <a:lnT w="12700" cap="flat" cmpd="sng" algn="ctr">
-                      <a:solidFill>
-                        <a:schemeClr val="tx1"/>
-                      </a:solidFill>
-                      <a:prstDash val="solid"/>
-                      <a:round/>
-                      <a:headEnd type="none" w="med" len="med"/>
-                      <a:tailEnd type="none" w="med" len="med"/>
-                    </a:lnT>
-                    <a:lnB w="12700" cap="flat" cmpd="sng" algn="ctr">
-                      <a:solidFill>
-                        <a:schemeClr val="tx1"/>
-                      </a:solidFill>
-                    </a:lnB>
-                    <a:noFill/>
-                  </a:tcPr>
-                </a:tc>
-                <a:tc>
-                  <a:txBody>
-                    <a:bodyPr/>
-                    <a:lstStyle/>
-                    <a:p>
-                      <a:pPr>
-                        <a:buNone/>
-                      </a:pPr>
-                      <a:r>
-                        <a:rPr sz="1000" b="0">
-                          <a:solidFill>
-                            <a:schemeClr val="tx1"/>
-                          </a:solidFill>
-                        </a:rPr>
-                        <a:t>a step-by-step method for an application team, framed by the four questions</a:t>
-                      </a:r>
-                    </a:p>
-                  </a:txBody>
-                  <a:tcPr marL="95250" marR="95250" marT="47625" marB="47625">
-                    <a:lnT w="12700" cap="flat" cmpd="sng" algn="ctr">
-                      <a:solidFill>
-                        <a:schemeClr val="tx1"/>
-                      </a:solidFill>
-                      <a:prstDash val="solid"/>
-                      <a:round/>
-                      <a:headEnd type="none" w="med" len="med"/>
-                      <a:tailEnd type="none" w="med" len="med"/>
-                    </a:lnT>
-                    <a:lnB w="12700" cap="flat" cmpd="sng" algn="ctr">
-                      <a:solidFill>
-                        <a:schemeClr val="tx1"/>
-                      </a:solidFill>
-                    </a:lnB>
-                    <a:noFill/>
-                  </a:tcPr>
-                </a:tc>
-                <a:extLst>
-                  <a:ext uri="{0D108BD9-81ED-4DB2-BD59-A6C34878D82A}">
-                    <a16:rowId xmlns:a16="http://schemas.microsoft.com/office/drawing/2014/main" val="10003"/>
-                  </a:ext>
-                </a:extLst>
-              </a:tr>
-              <a:tr h="0">
-                <a:tc>
-                  <a:txBody>
-                    <a:bodyPr/>
-                    <a:lstStyle/>
-                    <a:p>
-                      <a:pPr>
-                        <a:buNone/>
-                      </a:pPr>
-                      <a:r>
-                        <a:rPr sz="1000" b="1">
-                          <a:solidFill>
-                            <a:srgbClr val="28285E"/>
-                          </a:solidFill>
-                        </a:rPr>
-                        <a:t>Manadhata and Wing (2011)</a:t>
-                      </a:r>
-                    </a:p>
-                  </a:txBody>
-                  <a:tcPr marL="95250" marR="95250" marT="47625" marB="47625">
-                    <a:lnT w="12700" cap="flat" cmpd="sng" algn="ctr">
-                      <a:solidFill>
-                        <a:schemeClr val="tx1"/>
-                      </a:solidFill>
-                      <a:prstDash val="solid"/>
-                      <a:round/>
-                      <a:headEnd type="none" w="med" len="med"/>
-                      <a:tailEnd type="none" w="med" len="med"/>
-                    </a:lnT>
-                    <a:lnB w="12700" cap="flat" cmpd="sng" algn="ctr">
-                      <a:solidFill>
-                        <a:schemeClr val="tx1"/>
-                      </a:solidFill>
-                    </a:lnB>
-                    <a:noFill/>
-                  </a:tcPr>
-                </a:tc>
-                <a:tc>
-                  <a:txBody>
-                    <a:bodyPr/>
-                    <a:lstStyle/>
-                    <a:p>
-                      <a:pPr>
-                        <a:buNone/>
-                      </a:pPr>
-                      <a:r>
-                        <a:rPr sz="1000" b="0">
-                          <a:solidFill>
-                            <a:schemeClr val="tx1"/>
-                          </a:solidFill>
-                        </a:rPr>
-                        <a:t>the attack surface as entry points, exit points, channels and untrusted data</a:t>
-                      </a:r>
-                    </a:p>
-                  </a:txBody>
-                  <a:tcPr marL="95250" marR="95250" marT="47625" marB="47625">
-                    <a:lnT w="12700" cap="flat" cmpd="sng" algn="ctr">
-                      <a:solidFill>
-                        <a:schemeClr val="tx1"/>
-                      </a:solidFill>
-                      <a:prstDash val="solid"/>
-                      <a:round/>
-                      <a:headEnd type="none" w="med" len="med"/>
-                      <a:tailEnd type="none" w="med" len="med"/>
-                    </a:lnT>
-                    <a:lnB w="12700" cap="flat" cmpd="sng" algn="ctr">
-                      <a:solidFill>
-                        <a:schemeClr val="tx1"/>
-                      </a:solidFill>
-                    </a:lnB>
-                    <a:noFill/>
-                  </a:tcPr>
-                </a:tc>
-                <a:extLst>
-                  <a:ext uri="{0D108BD9-81ED-4DB2-BD59-A6C34878D82A}">
-                    <a16:rowId xmlns:a16="http://schemas.microsoft.com/office/drawing/2014/main" val="10004"/>
-                  </a:ext>
-                </a:extLst>
-              </a:tr>
-              <a:tr h="0">
-                <a:tc>
-                  <a:txBody>
-                    <a:bodyPr/>
-                    <a:lstStyle/>
-                    <a:p>
-                      <a:pPr>
-                        <a:buNone/>
-                      </a:pPr>
-                      <a:r>
-                        <a:rPr sz="1000" b="1">
-                          <a:solidFill>
-                            <a:srgbClr val="28285E"/>
-                          </a:solidFill>
-                        </a:rPr>
-                        <a:t>Visa Vulnerability Agentic Harness</a:t>
-                      </a:r>
-                    </a:p>
-                  </a:txBody>
-                  <a:tcPr marL="95250" marR="95250" marT="47625" marB="47625">
-                    <a:lnT w="12700" cap="flat" cmpd="sng" algn="ctr">
-                      <a:solidFill>
-                        <a:schemeClr val="tx1"/>
-                      </a:solidFill>
-                      <a:prstDash val="solid"/>
-                      <a:round/>
-                      <a:headEnd type="none" w="med" len="med"/>
-                      <a:tailEnd type="none" w="med" len="med"/>
-                    </a:lnT>
-                    <a:lnB w="12700" cap="flat" cmpd="sng" algn="ctr">
-                      <a:solidFill>
-                        <a:schemeClr val="tx1"/>
-                      </a:solidFill>
-                    </a:lnB>
-                    <a:noFill/>
-                  </a:tcPr>
-                </a:tc>
-                <a:tc>
-                  <a:txBody>
-                    <a:bodyPr/>
-                    <a:lstStyle/>
-                    <a:p>
-                      <a:pPr>
-                        <a:buNone/>
-                      </a:pPr>
-                      <a:r>
-                        <a:rPr sz="1000" b="0">
-                          <a:solidFill>
-                            <a:schemeClr val="tx1"/>
-                          </a:solidFill>
-                        </a:rPr>
-                        <a:t>threat modelling before analysis: stages S1 to S3 map the surface, model the threats and plan the hunt</a:t>
-                      </a:r>
-                    </a:p>
-                  </a:txBody>
-                  <a:tcPr marL="95250" marR="95250" marT="47625" marB="47625">
-                    <a:lnT w="12700" cap="flat" cmpd="sng" algn="ctr">
-                      <a:solidFill>
-                        <a:schemeClr val="tx1"/>
-                      </a:solidFill>
-                      <a:prstDash val="solid"/>
-                      <a:round/>
-                      <a:headEnd type="none" w="med" len="med"/>
-                      <a:tailEnd type="none" w="med" len="med"/>
-                    </a:lnT>
-                    <a:lnB w="12700" cap="flat" cmpd="sng" algn="ctr">
-                      <a:solidFill>
-                        <a:schemeClr val="tx1"/>
-                      </a:solidFill>
-                    </a:lnB>
-                    <a:noFill/>
-                  </a:tcPr>
-                </a:tc>
-                <a:extLst>
-                  <a:ext uri="{0D108BD9-81ED-4DB2-BD59-A6C34878D82A}">
-                    <a16:rowId xmlns:a16="http://schemas.microsoft.com/office/drawing/2014/main" val="10005"/>
-                  </a:ext>
-                </a:extLst>
-              </a:tr>
-              <a:tr h="0">
-                <a:tc>
-                  <a:txBody>
-                    <a:bodyPr/>
-                    <a:lstStyle/>
-                    <a:p>
-                      <a:pPr>
-                        <a:buNone/>
-                      </a:pPr>
-                      <a:r>
-                        <a:rPr sz="1000" b="1">
-                          <a:solidFill>
-                            <a:srgbClr val="28285E"/>
-                          </a:solidFill>
-                        </a:rPr>
-                        <a:t>Capital One VulnHunter</a:t>
-                      </a:r>
-                    </a:p>
-                  </a:txBody>
-                  <a:tcPr marL="95250" marR="95250" marT="47625" marB="47625">
-                    <a:lnT w="12700" cap="flat" cmpd="sng" algn="ctr">
-                      <a:solidFill>
-                        <a:schemeClr val="tx1"/>
-                      </a:solidFill>
-                      <a:prstDash val="solid"/>
-                      <a:round/>
-                      <a:headEnd type="none" w="med" len="med"/>
-                      <a:tailEnd type="none" w="med" len="med"/>
-                    </a:lnT>
-                    <a:lnB w="12700" cap="flat" cmpd="sng" algn="ctr">
-                      <a:solidFill>
-                        <a:schemeClr val="tx1"/>
-                      </a:solidFill>
-                    </a:lnB>
-                    <a:noFill/>
-                  </a:tcPr>
-                </a:tc>
-                <a:tc>
-                  <a:txBody>
-                    <a:bodyPr/>
-                    <a:lstStyle/>
-                    <a:p>
-                      <a:pPr>
-                        <a:buNone/>
-                      </a:pPr>
-                      <a:r>
-                        <a:rPr sz="1000" b="0">
-                          <a:solidFill>
-                            <a:schemeClr val="tx1"/>
-                          </a:solidFill>
-                        </a:rPr>
-                        <a:t>attacker-first: recon maps entry points to sinks before any hunting starts</a:t>
-                      </a:r>
-                    </a:p>
-                  </a:txBody>
-                  <a:tcPr marL="95250" marR="95250" marT="47625" marB="47625">
-                    <a:lnT w="12700" cap="flat" cmpd="sng" algn="ctr">
-                      <a:solidFill>
-                        <a:schemeClr val="tx1"/>
-                      </a:solidFill>
-                      <a:prstDash val="solid"/>
-                      <a:round/>
-                      <a:headEnd type="none" w="med" len="med"/>
-                      <a:tailEnd type="none" w="med" len="med"/>
-                    </a:lnT>
-                    <a:lnB w="12700" cap="flat" cmpd="sng" algn="ctr">
-                      <a:solidFill>
-                        <a:schemeClr val="tx1"/>
-                      </a:solidFill>
-                    </a:lnB>
-                    <a:noFill/>
-                  </a:tcPr>
-                </a:tc>
-                <a:extLst>
-                  <a:ext uri="{0D108BD9-81ED-4DB2-BD59-A6C34878D82A}">
-                    <a16:rowId xmlns:a16="http://schemas.microsoft.com/office/drawing/2014/main" val="10006"/>
-                  </a:ext>
-                </a:extLst>
-              </a:tr>
-            </a:tbl>
-          </a:graphicData>
-        </a:graphic>
-      </p:graphicFrame>
-      <p:sp>
-        <p:nvSpPr>
-          <p:cNvPr id="5" name="Rectangle 4"/>
-          <p:cNvSpPr/>
-          <p:nvPr/>
-        </p:nvSpPr>
-        <p:spPr>
-          <a:xfrm>
-            <a:off x="319251" y="4313826"/>
-            <a:ext cx="6014545" cy="430000"/>
-          </a:xfrm>
-          <a:prstGeom prst="rect">
-            <a:avLst/>
-          </a:prstGeom>
-          <a:solidFill>
-            <a:srgbClr val="28285E"/>
-          </a:solidFill>
-          <a:ln>
-            <a:solidFill>
-              <a:srgbClr val="28285E"/>
-            </a:solidFill>
-          </a:ln>
-          <a:effectLst/>
-        </p:spPr>
-        <p:style>
-          <a:lnRef idx="1">
-            <a:schemeClr val="accent1"/>
-          </a:lnRef>
-          <a:fillRef idx="3">
-            <a:schemeClr val="accent1"/>
-          </a:fillRef>
-          <a:effectRef idx="2">
-            <a:schemeClr val="accent1"/>
-          </a:effectRef>
-          <a:fontRef idx="minor">
-            <a:schemeClr val="lt1"/>
-          </a:fontRef>
-        </p:style>
-        <p:txBody>
-          <a:bodyPr wrap="square" lIns="137160" rIns="137160" rtlCol="0" anchor="ctr"/>
-          <a:lstStyle/>
-          <a:p>
-            <a:pPr algn="ctr"/>
-            <a:r>
-              <a:rPr sz="1200">
-                <a:solidFill>
-                  <a:schemeClr val="tx2"/>
-                </a:solidFill>
-              </a:rPr>
-              <a:t>Both harnesses fix the threat model before they read any code.</a:t>
-            </a:r>
-          </a:p>
-        </p:txBody>
-      </p:sp>
-    </p:spTree>
-  </p:cSld>
-  <p:clrMapOvr>
-    <a:masterClrMapping/>
-  </p:clrMapOvr>
-</p:sld>
-</file>
-
-<file path=ppt/slides/slide15.xml><?xml version="1.0" encoding="utf-8"?>
-<p:sld xmlns:a="http://schemas.openxmlformats.org/drawingml/2006/main" xmlns:r="http://schemas.openxmlformats.org/officeDocument/2006/relationships" xmlns:p="http://schemas.openxmlformats.org/presentationml/2006/main">
-  <p:cSld>
-    <p:spTree>
-      <p:nvGrpSpPr>
-        <p:cNvPr id="1" name=""/>
-        <p:cNvGrpSpPr/>
-        <p:nvPr/>
-      </p:nvGrpSpPr>
-      <p:grpSpPr>
-        <a:xfrm>
-          <a:off x="0" y="0"/>
-          <a:ext cx="0" cy="0"/>
-          <a:chOff x="0" y="0"/>
-          <a:chExt cx="0" cy="0"/>
-        </a:xfrm>
-      </p:grpSpPr>
-      <p:sp>
-        <p:nvSpPr>
           <p:cNvPr id="2" name="TextBox 1"/>
           <p:cNvSpPr txBox="1"/>
           <p:nvPr/>
@@ -8198,7 +7528,7 @@
 </p:sld>
 </file>
 
-<file path=ppt/slides/slide16.xml><?xml version="1.0" encoding="utf-8"?>
+<file path=ppt/slides/slide15.xml><?xml version="1.0" encoding="utf-8"?>
 <p:sld xmlns:a="http://schemas.openxmlformats.org/drawingml/2006/main" xmlns:r="http://schemas.openxmlformats.org/officeDocument/2006/relationships" xmlns:p="http://schemas.openxmlformats.org/presentationml/2006/main">
   <p:cSld>
     <p:spTree>
@@ -8245,7 +7575,7 @@
         <p:spPr>
           <a:xfrm>
             <a:off x="319251" y="700000"/>
-            <a:ext cx="6014545" cy="509712"/>
+            <a:ext cx="6014545" cy="523220"/>
           </a:xfrm>
           <a:prstGeom prst="rect">
             <a:avLst/>
@@ -8259,10 +7589,11 @@
           <a:lstStyle/>
           <a:p>
             <a:r>
-              <a:rPr sz="1400" b="1">
+              <a:rPr sz="1400" dirty="0">
                 <a:solidFill>
                   <a:srgbClr val="28285E"/>
                 </a:solidFill>
+                <a:latin typeface="Fira Sans" panose="020B0503050000020004" pitchFamily="34" charset="0"/>
               </a:rPr>
               <a:t>The OWASP Top 10 ranks the families of flaws found most often in web applications.</a:t>
             </a:r>
@@ -9088,7 +8419,7 @@
         <p:spPr>
           <a:xfrm>
             <a:off x="319251" y="3947212"/>
-            <a:ext cx="6014545" cy="200000"/>
+            <a:ext cx="6014545" cy="161583"/>
           </a:xfrm>
           <a:prstGeom prst="rect">
             <a:avLst/>
@@ -9103,12 +8434,51 @@
           <a:p>
             <a:pPr algn="r"/>
             <a:r>
-              <a:rPr sz="1050" i="1" dirty="0">
+              <a:rPr sz="1050" dirty="0">
                 <a:solidFill>
                   <a:schemeClr val="bg2"/>
                 </a:solidFill>
-              </a:rPr>
-              <a:t>OWASP Top 10:2025, top10.owasp.org/2025, released 6 November 2025.</a:t>
+                <a:latin typeface="Fira Sans" panose="020B0503050000020004" pitchFamily="34" charset="0"/>
+              </a:rPr>
+              <a:t>OWASP Top 10:2025, </a:t>
+            </a:r>
+            <a:r>
+              <a:rPr lang="en-US" sz="1050" dirty="0">
+                <a:solidFill>
+                  <a:schemeClr val="bg2"/>
+                </a:solidFill>
+                <a:latin typeface="Fira Sans" panose="020B0503050000020004" pitchFamily="34" charset="0"/>
+                <a:hlinkClick r:id="rId4"/>
+              </a:rPr>
+              <a:t>https://</a:t>
+            </a:r>
+            <a:r>
+              <a:rPr sz="1050" dirty="0">
+                <a:solidFill>
+                  <a:schemeClr val="bg2"/>
+                </a:solidFill>
+                <a:latin typeface="Fira Sans" panose="020B0503050000020004" pitchFamily="34" charset="0"/>
+                <a:hlinkClick r:id="rId4"/>
+              </a:rPr>
+              <a:t>top10.owasp.org/2025</a:t>
+            </a:r>
+            <a:r>
+              <a:rPr lang="en-US" sz="1050" dirty="0">
+                <a:solidFill>
+                  <a:schemeClr val="bg2"/>
+                </a:solidFill>
+                <a:latin typeface="Fira Sans" panose="020B0503050000020004" pitchFamily="34" charset="0"/>
+              </a:rPr>
+              <a:t> </a:t>
+            </a:r>
+            <a:r>
+              <a:rPr sz="1050" dirty="0">
+                <a:solidFill>
+                  <a:schemeClr val="bg2"/>
+                </a:solidFill>
+                <a:latin typeface="Fira Sans" panose="020B0503050000020004" pitchFamily="34" charset="0"/>
+              </a:rPr>
+              <a:t>, released 6 November 2025.</a:t>
             </a:r>
           </a:p>
         </p:txBody>
@@ -9126,7 +8496,7 @@
 </p:sld>
 </file>
 
-<file path=ppt/slides/slide17.xml><?xml version="1.0" encoding="utf-8"?>
+<file path=ppt/slides/slide16.xml><?xml version="1.0" encoding="utf-8"?>
 <p:sld xmlns:a="http://schemas.openxmlformats.org/drawingml/2006/main" xmlns:r="http://schemas.openxmlformats.org/officeDocument/2006/relationships" xmlns:p="http://schemas.openxmlformats.org/presentationml/2006/main">
   <p:cSld>
     <p:spTree>
@@ -9191,7 +8561,7 @@
         <p:spPr>
           <a:xfrm>
             <a:off x="319251" y="700000"/>
-            <a:ext cx="6014545" cy="509712"/>
+            <a:ext cx="6014545" cy="523220"/>
           </a:xfrm>
           <a:prstGeom prst="rect">
             <a:avLst/>
@@ -9205,10 +8575,11 @@
           <a:lstStyle/>
           <a:p>
             <a:r>
-              <a:rPr sz="1400" b="1">
+              <a:rPr sz="1400" dirty="0">
                 <a:solidFill>
                   <a:srgbClr val="28285E"/>
                 </a:solidFill>
+                <a:latin typeface="Fira Sans" panose="020B0503050000020004" pitchFamily="34" charset="0"/>
               </a:rPr>
               <a:t>The OWASP Top 10 ranks the families of flaws found most often in web applications.</a:t>
             </a:r>
@@ -10136,7 +9507,7 @@
         <p:spPr>
           <a:xfrm>
             <a:off x="319251" y="3947212"/>
-            <a:ext cx="6014545" cy="200000"/>
+            <a:ext cx="6014545" cy="161583"/>
           </a:xfrm>
           <a:prstGeom prst="rect">
             <a:avLst/>
@@ -10151,12 +9522,42 @@
           <a:p>
             <a:pPr algn="r"/>
             <a:r>
-              <a:rPr sz="1050" i="1">
+              <a:rPr sz="1050" dirty="0">
                 <a:solidFill>
                   <a:schemeClr val="bg2"/>
                 </a:solidFill>
-              </a:rPr>
-              <a:t>OWASP Top 10:2025, top10.owasp.org/2025, released 6 November 2025.</a:t>
+                <a:latin typeface="Fira Sans" panose="020B0503050000020004" pitchFamily="34" charset="0"/>
+              </a:rPr>
+              <a:t>OWASP Top 10:2025, </a:t>
+            </a:r>
+            <a:r>
+              <a:rPr lang="en-US" sz="1050" dirty="0">
+                <a:solidFill>
+                  <a:schemeClr val="bg2"/>
+                </a:solidFill>
+                <a:latin typeface="Fira Sans" panose="020B0503050000020004" pitchFamily="34" charset="0"/>
+                <a:hlinkClick r:id="rId4"/>
+              </a:rPr>
+              <a:t>https://</a:t>
+            </a:r>
+            <a:r>
+              <a:rPr sz="1050" dirty="0">
+                <a:solidFill>
+                  <a:schemeClr val="bg2"/>
+                </a:solidFill>
+                <a:latin typeface="Fira Sans" panose="020B0503050000020004" pitchFamily="34" charset="0"/>
+                <a:hlinkClick r:id="rId4"/>
+              </a:rPr>
+              <a:t>top10.owasp.org/2025</a:t>
+            </a:r>
+            <a:r>
+              <a:rPr sz="1050" dirty="0">
+                <a:solidFill>
+                  <a:schemeClr val="bg2"/>
+                </a:solidFill>
+                <a:latin typeface="Fira Sans" panose="020B0503050000020004" pitchFamily="34" charset="0"/>
+              </a:rPr>
+              <a:t>, released 6 November 2025.</a:t>
             </a:r>
           </a:p>
         </p:txBody>
@@ -10179,7 +9580,7 @@
 </p:sld>
 </file>
 
-<file path=ppt/slides/slide18.xml><?xml version="1.0" encoding="utf-8"?>
+<file path=ppt/slides/slide17.xml><?xml version="1.0" encoding="utf-8"?>
 <p:sld xmlns:a="http://schemas.openxmlformats.org/drawingml/2006/main" xmlns:r="http://schemas.openxmlformats.org/officeDocument/2006/relationships" xmlns:p="http://schemas.openxmlformats.org/presentationml/2006/main">
   <p:cSld>
     <p:spTree>
@@ -10463,7 +9864,7 @@
 </p:sld>
 </file>
 
-<file path=ppt/slides/slide19.xml><?xml version="1.0" encoding="utf-8"?>
+<file path=ppt/slides/slide18.xml><?xml version="1.0" encoding="utf-8"?>
 <p:sld xmlns:a="http://schemas.openxmlformats.org/drawingml/2006/main" xmlns:r="http://schemas.openxmlformats.org/officeDocument/2006/relationships" xmlns:p="http://schemas.openxmlformats.org/presentationml/2006/main">
   <p:cSld>
     <p:spTree>
@@ -10496,7 +9897,8 @@
           <a:lstStyle/>
           <a:p>
             <a:r>
-              <a:t>From a family to a line of Python: the ladder</a:t>
+              <a:rPr dirty="0"/>
+              <a:t>From a family to a line of Python</a:t>
             </a:r>
           </a:p>
         </p:txBody>
@@ -11154,13 +10556,18 @@
                         <a:buNone/>
                       </a:pPr>
                       <a:r>
-                        <a:rPr sz="1000" b="0">
+                        <a:rPr sz="1000" b="0" dirty="0" err="1">
                           <a:solidFill>
                             <a:schemeClr val="tx1"/>
                           </a:solidFill>
                         </a:rPr>
                         <a:t>codeinj</a:t>
                       </a:r>
+                      <a:endParaRPr sz="1000" b="0" dirty="0">
+                        <a:solidFill>
+                          <a:schemeClr val="tx1"/>
+                        </a:solidFill>
+                      </a:endParaRPr>
                     </a:p>
                   </a:txBody>
                   <a:tcPr marL="95250" marR="95250" marT="47625" marB="47625">
@@ -11902,6 +11309,66 @@
 </p:sld>
 </file>
 
+<file path=ppt/slides/slide19.xml><?xml version="1.0" encoding="utf-8"?>
+<p:sld xmlns:a="http://schemas.openxmlformats.org/drawingml/2006/main" xmlns:r="http://schemas.openxmlformats.org/officeDocument/2006/relationships" xmlns:p="http://schemas.openxmlformats.org/presentationml/2006/main">
+  <p:cSld>
+    <p:spTree>
+      <p:nvGrpSpPr>
+        <p:cNvPr id="1" name=""/>
+        <p:cNvGrpSpPr/>
+        <p:nvPr/>
+      </p:nvGrpSpPr>
+      <p:grpSpPr>
+        <a:xfrm>
+          <a:off x="0" y="0"/>
+          <a:ext cx="0" cy="0"/>
+          <a:chOff x="0" y="0"/>
+          <a:chExt cx="0" cy="0"/>
+        </a:xfrm>
+      </p:grpSpPr>
+      <p:sp>
+        <p:nvSpPr>
+          <p:cNvPr id="2" name="TextBox 1"/>
+          <p:cNvSpPr txBox="1"/>
+          <p:nvPr/>
+        </p:nvSpPr>
+        <p:spPr>
+          <a:xfrm>
+            <a:off x="929000" y="2217270"/>
+            <a:ext cx="5000000" cy="708960"/>
+          </a:xfrm>
+          <a:prstGeom prst="rect">
+            <a:avLst/>
+          </a:prstGeom>
+          <a:noFill/>
+        </p:spPr>
+        <p:txBody>
+          <a:bodyPr wrap="square" anchor="ctr">
+            <a:spAutoFit/>
+          </a:bodyPr>
+          <a:lstStyle/>
+          <a:p>
+            <a:pPr algn="ctr"/>
+            <a:r>
+              <a:rPr sz="4000" b="1" dirty="0">
+                <a:solidFill>
+                  <a:schemeClr val="tx2"/>
+                </a:solidFill>
+                <a:latin typeface="+mj-lt"/>
+              </a:rPr>
+              <a:t>Bandit</a:t>
+            </a:r>
+          </a:p>
+        </p:txBody>
+      </p:sp>
+    </p:spTree>
+  </p:cSld>
+  <p:clrMapOvr>
+    <a:masterClrMapping/>
+  </p:clrMapOvr>
+</p:sld>
+</file>
+
 <file path=ppt/slides/slide2.xml><?xml version="1.0" encoding="utf-8"?>
 <p:sld xmlns:a="http://schemas.openxmlformats.org/drawingml/2006/main" xmlns:r="http://schemas.openxmlformats.org/officeDocument/2006/relationships" xmlns:p="http://schemas.openxmlformats.org/presentationml/2006/main">
   <p:cSld>
@@ -11949,7 +11416,7 @@
           <a:p>
             <a:pPr algn="ctr"/>
             <a:r>
-              <a:rPr lang="en-US" sz="4000" b="1" dirty="0">
+              <a:rPr lang="en-US" sz="4000" dirty="0">
                 <a:solidFill>
                   <a:schemeClr val="tx2"/>
                 </a:solidFill>
@@ -11974,66 +11441,6 @@
 </file>
 
 <file path=ppt/slides/slide20.xml><?xml version="1.0" encoding="utf-8"?>
-<p:sld xmlns:a="http://schemas.openxmlformats.org/drawingml/2006/main" xmlns:r="http://schemas.openxmlformats.org/officeDocument/2006/relationships" xmlns:p="http://schemas.openxmlformats.org/presentationml/2006/main">
-  <p:cSld>
-    <p:spTree>
-      <p:nvGrpSpPr>
-        <p:cNvPr id="1" name=""/>
-        <p:cNvGrpSpPr/>
-        <p:nvPr/>
-      </p:nvGrpSpPr>
-      <p:grpSpPr>
-        <a:xfrm>
-          <a:off x="0" y="0"/>
-          <a:ext cx="0" cy="0"/>
-          <a:chOff x="0" y="0"/>
-          <a:chExt cx="0" cy="0"/>
-        </a:xfrm>
-      </p:grpSpPr>
-      <p:sp>
-        <p:nvSpPr>
-          <p:cNvPr id="2" name="TextBox 1"/>
-          <p:cNvSpPr txBox="1"/>
-          <p:nvPr/>
-        </p:nvSpPr>
-        <p:spPr>
-          <a:xfrm>
-            <a:off x="929000" y="2217270"/>
-            <a:ext cx="5000000" cy="708960"/>
-          </a:xfrm>
-          <a:prstGeom prst="rect">
-            <a:avLst/>
-          </a:prstGeom>
-          <a:noFill/>
-        </p:spPr>
-        <p:txBody>
-          <a:bodyPr wrap="square" anchor="ctr">
-            <a:spAutoFit/>
-          </a:bodyPr>
-          <a:lstStyle/>
-          <a:p>
-            <a:pPr algn="ctr"/>
-            <a:r>
-              <a:rPr sz="4000" b="1" dirty="0">
-                <a:solidFill>
-                  <a:schemeClr val="tx2"/>
-                </a:solidFill>
-                <a:latin typeface="+mj-lt"/>
-              </a:rPr>
-              <a:t>Bandit</a:t>
-            </a:r>
-          </a:p>
-        </p:txBody>
-      </p:sp>
-    </p:spTree>
-  </p:cSld>
-  <p:clrMapOvr>
-    <a:masterClrMapping/>
-  </p:clrMapOvr>
-</p:sld>
-</file>
-
-<file path=ppt/slides/slide21.xml><?xml version="1.0" encoding="utf-8"?>
 <p:sld xmlns:a="http://schemas.openxmlformats.org/drawingml/2006/main" xmlns:r="http://schemas.openxmlformats.org/officeDocument/2006/relationships" xmlns:p="http://schemas.openxmlformats.org/presentationml/2006/main">
   <p:cSld>
     <p:spTree>
@@ -12322,7 +11729,7 @@
 </p:sld>
 </file>
 
-<file path=ppt/slides/slide22.xml><?xml version="1.0" encoding="utf-8"?>
+<file path=ppt/slides/slide21.xml><?xml version="1.0" encoding="utf-8"?>
 <p:sld xmlns:a="http://schemas.openxmlformats.org/drawingml/2006/main" xmlns:r="http://schemas.openxmlformats.org/officeDocument/2006/relationships" xmlns:p="http://schemas.openxmlformats.org/presentationml/2006/main">
   <p:cSld>
     <p:spTree>
@@ -12369,7 +11776,7 @@
         <p:spPr>
           <a:xfrm>
             <a:off x="319251" y="700000"/>
-            <a:ext cx="6014545" cy="509712"/>
+            <a:ext cx="6014545" cy="523220"/>
           </a:xfrm>
           <a:prstGeom prst="rect">
             <a:avLst/>
@@ -12383,10 +11790,11 @@
           <a:lstStyle/>
           <a:p>
             <a:r>
-              <a:rPr sz="1400" b="1">
+              <a:rPr sz="1400" dirty="0">
                 <a:solidFill>
                   <a:srgbClr val="28285E"/>
                 </a:solidFill>
+                <a:latin typeface="Fira Sans" panose="020B0503050000020004" pitchFamily="34" charset="0"/>
               </a:rPr>
               <a:t>Bandit parses the line into a tree, reads the called name off it, and looks that name up in the rule's list.</a:t>
             </a:r>
@@ -12477,7 +11885,7 @@
 </p:sld>
 </file>
 
-<file path=ppt/slides/slide23.xml><?xml version="1.0" encoding="utf-8"?>
+<file path=ppt/slides/slide22.xml><?xml version="1.0" encoding="utf-8"?>
 <p:sld xmlns:a="http://schemas.openxmlformats.org/drawingml/2006/main" xmlns:r="http://schemas.openxmlformats.org/officeDocument/2006/relationships" xmlns:p="http://schemas.openxmlformats.org/presentationml/2006/main">
   <p:cSld>
     <p:spTree>
@@ -12524,7 +11932,7 @@
         <p:spPr>
           <a:xfrm>
             <a:off x="319251" y="700000"/>
-            <a:ext cx="6014545" cy="509712"/>
+            <a:ext cx="6014545" cy="523220"/>
           </a:xfrm>
           <a:prstGeom prst="rect">
             <a:avLst/>
@@ -12538,10 +11946,11 @@
           <a:lstStyle/>
           <a:p>
             <a:r>
-              <a:rPr sz="1400" b="1">
+              <a:rPr sz="1400" dirty="0">
                 <a:solidFill>
                   <a:srgbClr val="28285E"/>
                 </a:solidFill>
+                <a:latin typeface="Fira Sans" panose="020B0503050000020004" pitchFamily="34" charset="0"/>
               </a:rPr>
               <a:t>The pickle rule is a list of names to match, and it knows nothing of what is unpickled.</a:t>
             </a:r>
@@ -12557,7 +11966,7 @@
         <p:spPr>
           <a:xfrm>
             <a:off x="319251" y="1439712"/>
-            <a:ext cx="6014545" cy="200000"/>
+            <a:ext cx="5466240" cy="184666"/>
           </a:xfrm>
           <a:prstGeom prst="rect">
             <a:avLst/>
@@ -12571,12 +11980,31 @@
           <a:lstStyle/>
           <a:p>
             <a:r>
-              <a:rPr sz="1200" b="1">
+              <a:rPr sz="1200" dirty="0">
                 <a:solidFill>
                   <a:srgbClr val="28285E"/>
                 </a:solidFill>
-              </a:rPr>
-              <a:t>bandit/blacklists/calls.py at 1.9.4, the B301 entry, lines 359 to 379, brackets cut</a:t>
+                <a:latin typeface="Fira Sans" panose="020B0503050000020004" pitchFamily="34" charset="0"/>
+              </a:rPr>
+              <a:t>bandit/blacklists/</a:t>
+            </a:r>
+            <a:r>
+              <a:rPr sz="1200" dirty="0" err="1">
+                <a:solidFill>
+                  <a:srgbClr val="28285E"/>
+                </a:solidFill>
+                <a:latin typeface="Fira Sans" panose="020B0503050000020004" pitchFamily="34" charset="0"/>
+              </a:rPr>
+              <a:t>calls.py</a:t>
+            </a:r>
+            <a:r>
+              <a:rPr sz="1200" dirty="0">
+                <a:solidFill>
+                  <a:srgbClr val="28285E"/>
+                </a:solidFill>
+                <a:latin typeface="Fira Sans" panose="020B0503050000020004" pitchFamily="34" charset="0"/>
+              </a:rPr>
+              <a:t> at 1.9.4, the B301 entry, lines 359 to 379, brackets cut</a:t>
             </a:r>
           </a:p>
         </p:txBody>
@@ -12791,7 +12219,7 @@
         <p:spPr>
           <a:xfrm>
             <a:off x="469251" y="2029712"/>
-            <a:ext cx="5714545" cy="1829998"/>
+            <a:ext cx="5309146" cy="1692771"/>
           </a:xfrm>
           <a:prstGeom prst="rect">
             <a:avLst/>
@@ -12808,7 +12236,7 @@
               <a:buNone/>
             </a:pPr>
             <a:r>
-              <a:rPr sz="1000">
+              <a:rPr sz="1000" dirty="0">
                 <a:solidFill>
                   <a:srgbClr val="8A8A9A"/>
                 </a:solidFill>
@@ -12817,7 +12245,7 @@
               <a:t>359 </a:t>
             </a:r>
             <a:r>
-              <a:rPr sz="1000">
+              <a:rPr sz="1000" dirty="0" err="1">
                 <a:solidFill>
                   <a:srgbClr val="9CDCFE"/>
                 </a:solidFill>
@@ -12826,7 +12254,7 @@
               <a:t>utils</a:t>
             </a:r>
             <a:r>
-              <a:rPr sz="1000">
+              <a:rPr sz="1000" dirty="0" err="1">
                 <a:solidFill>
                   <a:schemeClr val="tx2"/>
                 </a:solidFill>
@@ -12835,7 +12263,7 @@
               <a:t>.</a:t>
             </a:r>
             <a:r>
-              <a:rPr sz="1000">
+              <a:rPr sz="1000" dirty="0" err="1">
                 <a:solidFill>
                   <a:srgbClr val="DCDCAA"/>
                 </a:solidFill>
@@ -12844,7 +12272,7 @@
               <a:t>build_conf_dict</a:t>
             </a:r>
             <a:r>
-              <a:rPr sz="1000">
+              <a:rPr sz="1000" dirty="0">
                 <a:solidFill>
                   <a:schemeClr val="tx2"/>
                 </a:solidFill>
@@ -12858,7 +12286,7 @@
               <a:buNone/>
             </a:pPr>
             <a:r>
-              <a:rPr sz="1000">
+              <a:rPr sz="1000" dirty="0">
                 <a:solidFill>
                   <a:srgbClr val="8A8A9A"/>
                 </a:solidFill>
@@ -12867,7 +12295,7 @@
               <a:t>360 </a:t>
             </a:r>
             <a:r>
-              <a:rPr sz="1000">
+              <a:rPr sz="1000" dirty="0">
                 <a:solidFill>
                   <a:schemeClr val="tx2"/>
                 </a:solidFill>
@@ -12876,7 +12304,7 @@
               <a:t>    </a:t>
             </a:r>
             <a:r>
-              <a:rPr sz="1000">
+              <a:rPr sz="1000" dirty="0">
                 <a:solidFill>
                   <a:srgbClr val="CE9178"/>
                 </a:solidFill>
@@ -12885,7 +12313,7 @@
               <a:t>"pickle"</a:t>
             </a:r>
             <a:r>
-              <a:rPr sz="1000">
+              <a:rPr sz="1000" dirty="0">
                 <a:solidFill>
                   <a:schemeClr val="tx2"/>
                 </a:solidFill>
@@ -12899,7 +12327,7 @@
               <a:buNone/>
             </a:pPr>
             <a:r>
-              <a:rPr sz="1000">
+              <a:rPr sz="1000" dirty="0">
                 <a:solidFill>
                   <a:srgbClr val="8A8A9A"/>
                 </a:solidFill>
@@ -12908,7 +12336,7 @@
               <a:t>361 </a:t>
             </a:r>
             <a:r>
-              <a:rPr sz="1000">
+              <a:rPr sz="1000" dirty="0">
                 <a:solidFill>
                   <a:schemeClr val="tx2"/>
                 </a:solidFill>
@@ -12917,7 +12345,7 @@
               <a:t>    </a:t>
             </a:r>
             <a:r>
-              <a:rPr sz="1000">
+              <a:rPr sz="1000" dirty="0">
                 <a:solidFill>
                   <a:srgbClr val="CE9178"/>
                 </a:solidFill>
@@ -12926,7 +12354,7 @@
               <a:t>"B301"</a:t>
             </a:r>
             <a:r>
-              <a:rPr sz="1000">
+              <a:rPr sz="1000" dirty="0">
                 <a:solidFill>
                   <a:schemeClr val="tx2"/>
                 </a:solidFill>
@@ -12940,7 +12368,7 @@
               <a:buNone/>
             </a:pPr>
             <a:r>
-              <a:rPr sz="1000">
+              <a:rPr sz="1000" dirty="0">
                 <a:solidFill>
                   <a:srgbClr val="8A8A9A"/>
                 </a:solidFill>
@@ -12949,7 +12377,7 @@
               <a:t>362 </a:t>
             </a:r>
             <a:r>
-              <a:rPr sz="1000">
+              <a:rPr sz="1000" dirty="0">
                 <a:solidFill>
                   <a:schemeClr val="tx2"/>
                 </a:solidFill>
@@ -12958,7 +12386,7 @@
               <a:t>    </a:t>
             </a:r>
             <a:r>
-              <a:rPr sz="1000">
+              <a:rPr sz="1000" dirty="0" err="1">
                 <a:solidFill>
                   <a:srgbClr val="9CDCFE"/>
                 </a:solidFill>
@@ -12967,7 +12395,7 @@
               <a:t>issue</a:t>
             </a:r>
             <a:r>
-              <a:rPr sz="1000">
+              <a:rPr sz="1000" dirty="0" err="1">
                 <a:solidFill>
                   <a:schemeClr val="tx2"/>
                 </a:solidFill>
@@ -12976,7 +12404,7 @@
               <a:t>.</a:t>
             </a:r>
             <a:r>
-              <a:rPr sz="1000">
+              <a:rPr sz="1000" dirty="0" err="1">
                 <a:solidFill>
                   <a:srgbClr val="9CDCFE"/>
                 </a:solidFill>
@@ -12985,7 +12413,7 @@
               <a:t>Cwe</a:t>
             </a:r>
             <a:r>
-              <a:rPr sz="1000">
+              <a:rPr sz="1000" dirty="0" err="1">
                 <a:solidFill>
                   <a:schemeClr val="tx2"/>
                 </a:solidFill>
@@ -12994,7 +12422,7 @@
               <a:t>.</a:t>
             </a:r>
             <a:r>
-              <a:rPr sz="1000">
+              <a:rPr sz="1000" dirty="0" err="1">
                 <a:solidFill>
                   <a:srgbClr val="9CDCFE"/>
                 </a:solidFill>
@@ -13003,7 +12431,7 @@
               <a:t>DESERIALIZATION_OF_UNTRUSTED_DATA</a:t>
             </a:r>
             <a:r>
-              <a:rPr sz="1000">
+              <a:rPr sz="1000" dirty="0">
                 <a:solidFill>
                   <a:schemeClr val="tx2"/>
                 </a:solidFill>
@@ -13017,7 +12445,7 @@
               <a:buNone/>
             </a:pPr>
             <a:r>
-              <a:rPr sz="1000">
+              <a:rPr sz="1000" dirty="0">
                 <a:solidFill>
                   <a:srgbClr val="8A8A9A"/>
                 </a:solidFill>
@@ -13026,7 +12454,7 @@
               <a:t>364 </a:t>
             </a:r>
             <a:r>
-              <a:rPr sz="1000">
+              <a:rPr sz="1000" dirty="0">
                 <a:solidFill>
                   <a:schemeClr val="tx2"/>
                 </a:solidFill>
@@ -13035,16 +12463,34 @@
               <a:t>        </a:t>
             </a:r>
             <a:r>
-              <a:rPr sz="1000">
+              <a:rPr sz="1000" dirty="0">
                 <a:solidFill>
                   <a:srgbClr val="CE9178"/>
                 </a:solidFill>
                 <a:latin typeface="Maple Mono NF"/>
               </a:rPr>
-              <a:t>"pickle.loads"</a:t>
-            </a:r>
-            <a:r>
-              <a:rPr sz="1000">
+              <a:t>"</a:t>
+            </a:r>
+            <a:r>
+              <a:rPr sz="1000" dirty="0" err="1">
+                <a:solidFill>
+                  <a:srgbClr val="CE9178"/>
+                </a:solidFill>
+                <a:latin typeface="Maple Mono NF"/>
+              </a:rPr>
+              <a:t>pickle.loads</a:t>
+            </a:r>
+            <a:r>
+              <a:rPr sz="1000" dirty="0">
+                <a:solidFill>
+                  <a:srgbClr val="CE9178"/>
+                </a:solidFill>
+                <a:latin typeface="Maple Mono NF"/>
+              </a:rPr>
+              <a:t>"</a:t>
+            </a:r>
+            <a:r>
+              <a:rPr sz="1000" dirty="0">
                 <a:solidFill>
                   <a:schemeClr val="tx2"/>
                 </a:solidFill>
@@ -13058,7 +12504,7 @@
               <a:buNone/>
             </a:pPr>
             <a:r>
-              <a:rPr sz="1000">
+              <a:rPr sz="1000" dirty="0">
                 <a:solidFill>
                   <a:srgbClr val="8A8A9A"/>
                 </a:solidFill>
@@ -13067,7 +12513,7 @@
               <a:t>365 </a:t>
             </a:r>
             <a:r>
-              <a:rPr sz="1000">
+              <a:rPr sz="1000" dirty="0">
                 <a:solidFill>
                   <a:schemeClr val="tx2"/>
                 </a:solidFill>
@@ -13076,16 +12522,34 @@
               <a:t>        </a:t>
             </a:r>
             <a:r>
-              <a:rPr sz="1000">
+              <a:rPr sz="1000" dirty="0">
                 <a:solidFill>
                   <a:srgbClr val="CE9178"/>
                 </a:solidFill>
                 <a:latin typeface="Maple Mono NF"/>
               </a:rPr>
-              <a:t>"pickle.load"</a:t>
-            </a:r>
-            <a:r>
-              <a:rPr sz="1000">
+              <a:t>"</a:t>
+            </a:r>
+            <a:r>
+              <a:rPr sz="1000" dirty="0" err="1">
+                <a:solidFill>
+                  <a:srgbClr val="CE9178"/>
+                </a:solidFill>
+                <a:latin typeface="Maple Mono NF"/>
+              </a:rPr>
+              <a:t>pickle.load</a:t>
+            </a:r>
+            <a:r>
+              <a:rPr sz="1000" dirty="0">
+                <a:solidFill>
+                  <a:srgbClr val="CE9178"/>
+                </a:solidFill>
+                <a:latin typeface="Maple Mono NF"/>
+              </a:rPr>
+              <a:t>"</a:t>
+            </a:r>
+            <a:r>
+              <a:rPr sz="1000" dirty="0">
                 <a:solidFill>
                   <a:schemeClr val="tx2"/>
                 </a:solidFill>
@@ -13099,7 +12563,7 @@
               <a:buNone/>
             </a:pPr>
             <a:r>
-              <a:rPr sz="1000">
+              <a:rPr sz="1000" dirty="0">
                 <a:solidFill>
                   <a:srgbClr val="8A8A9A"/>
                 </a:solidFill>
@@ -13108,7 +12572,7 @@
               <a:t>366 </a:t>
             </a:r>
             <a:r>
-              <a:rPr sz="1000">
+              <a:rPr sz="1000" dirty="0">
                 <a:solidFill>
                   <a:schemeClr val="tx2"/>
                 </a:solidFill>
@@ -13117,16 +12581,34 @@
               <a:t>        </a:t>
             </a:r>
             <a:r>
-              <a:rPr sz="1000">
+              <a:rPr sz="1000" dirty="0">
                 <a:solidFill>
                   <a:srgbClr val="CE9178"/>
                 </a:solidFill>
                 <a:latin typeface="Maple Mono NF"/>
               </a:rPr>
-              <a:t>"pickle.Unpickler"</a:t>
-            </a:r>
-            <a:r>
-              <a:rPr sz="1000">
+              <a:t>"</a:t>
+            </a:r>
+            <a:r>
+              <a:rPr sz="1000" dirty="0" err="1">
+                <a:solidFill>
+                  <a:srgbClr val="CE9178"/>
+                </a:solidFill>
+                <a:latin typeface="Maple Mono NF"/>
+              </a:rPr>
+              <a:t>pickle.Unpickler</a:t>
+            </a:r>
+            <a:r>
+              <a:rPr sz="1000" dirty="0">
+                <a:solidFill>
+                  <a:srgbClr val="CE9178"/>
+                </a:solidFill>
+                <a:latin typeface="Maple Mono NF"/>
+              </a:rPr>
+              <a:t>"</a:t>
+            </a:r>
+            <a:r>
+              <a:rPr sz="1000" dirty="0">
                 <a:solidFill>
                   <a:schemeClr val="tx2"/>
                 </a:solidFill>
@@ -13140,7 +12622,7 @@
               <a:buNone/>
             </a:pPr>
             <a:r>
-              <a:rPr sz="1000">
+              <a:rPr sz="1000" dirty="0">
                 <a:solidFill>
                   <a:srgbClr val="8A8A9A"/>
                 </a:solidFill>
@@ -13149,21 +12631,36 @@
               <a:t>    </a:t>
             </a:r>
             <a:r>
-              <a:rPr sz="1000">
+              <a:rPr sz="1000" dirty="0">
                 <a:solidFill>
                   <a:schemeClr val="accent4"/>
                 </a:solidFill>
                 <a:latin typeface="Maple Mono NF"/>
               </a:rPr>
-              <a:t># ours: nine more names cut, from dill to pandas.read_pickle</a:t>
-            </a:r>
+              <a:t># ours: nine more names cut, from dill to </a:t>
+            </a:r>
+            <a:r>
+              <a:rPr sz="1000" dirty="0" err="1">
+                <a:solidFill>
+                  <a:schemeClr val="accent4"/>
+                </a:solidFill>
+                <a:latin typeface="Maple Mono NF"/>
+              </a:rPr>
+              <a:t>pandas.read_pickle</a:t>
+            </a:r>
+            <a:endParaRPr sz="1000" dirty="0">
+              <a:solidFill>
+                <a:schemeClr val="accent4"/>
+              </a:solidFill>
+              <a:latin typeface="Maple Mono NF"/>
+            </a:endParaRPr>
           </a:p>
           <a:p>
             <a:pPr algn="l">
               <a:buNone/>
             </a:pPr>
             <a:r>
-              <a:rPr sz="1000">
+              <a:rPr sz="1000" dirty="0">
                 <a:solidFill>
                   <a:srgbClr val="8A8A9A"/>
                 </a:solidFill>
@@ -13172,7 +12669,7 @@
               <a:t>377 </a:t>
             </a:r>
             <a:r>
-              <a:rPr sz="1000">
+              <a:rPr sz="1000" dirty="0">
                 <a:solidFill>
                   <a:schemeClr val="tx2"/>
                 </a:solidFill>
@@ -13181,7 +12678,7 @@
               <a:t>    </a:t>
             </a:r>
             <a:r>
-              <a:rPr sz="1000">
+              <a:rPr sz="1000" dirty="0">
                 <a:solidFill>
                   <a:srgbClr val="CE9178"/>
                 </a:solidFill>
@@ -13195,7 +12692,7 @@
               <a:buNone/>
             </a:pPr>
             <a:r>
-              <a:rPr sz="1000">
+              <a:rPr sz="1000" dirty="0">
                 <a:solidFill>
                   <a:srgbClr val="8A8A9A"/>
                 </a:solidFill>
@@ -13204,7 +12701,7 @@
               <a:t>378 </a:t>
             </a:r>
             <a:r>
-              <a:rPr sz="1000">
+              <a:rPr sz="1000" dirty="0">
                 <a:solidFill>
                   <a:schemeClr val="tx2"/>
                 </a:solidFill>
@@ -13213,7 +12710,7 @@
               <a:t>    </a:t>
             </a:r>
             <a:r>
-              <a:rPr sz="1000">
+              <a:rPr sz="1000" dirty="0">
                 <a:solidFill>
                   <a:srgbClr val="CE9178"/>
                 </a:solidFill>
@@ -13222,7 +12719,7 @@
               <a:t>"deserialize untrusted data, possible security issue."</a:t>
             </a:r>
             <a:r>
-              <a:rPr sz="1000">
+              <a:rPr sz="1000" dirty="0">
                 <a:solidFill>
                   <a:schemeClr val="tx2"/>
                 </a:solidFill>
@@ -13236,7 +12733,7 @@
               <a:buNone/>
             </a:pPr>
             <a:r>
-              <a:rPr sz="1000">
+              <a:rPr sz="1000" dirty="0">
                 <a:solidFill>
                   <a:srgbClr val="8A8A9A"/>
                 </a:solidFill>
@@ -13245,7 +12742,7 @@
               <a:t>379 </a:t>
             </a:r>
             <a:r>
-              <a:rPr sz="1000">
+              <a:rPr sz="1000" dirty="0">
                 <a:solidFill>
                   <a:schemeClr val="tx2"/>
                 </a:solidFill>
@@ -13316,6 +12813,962 @@
 </p:sld>
 </file>
 
+<file path=ppt/slides/slide23.xml><?xml version="1.0" encoding="utf-8"?>
+<p:sld xmlns:a="http://schemas.openxmlformats.org/drawingml/2006/main" xmlns:r="http://schemas.openxmlformats.org/officeDocument/2006/relationships" xmlns:p="http://schemas.openxmlformats.org/presentationml/2006/main">
+  <p:cSld>
+    <p:spTree>
+      <p:nvGrpSpPr>
+        <p:cNvPr id="1" name="">
+          <a:extLst>
+            <a:ext uri="{FF2B5EF4-FFF2-40B4-BE49-F238E27FC236}">
+              <a16:creationId xmlns:a16="http://schemas.microsoft.com/office/drawing/2014/main" id="{BCE4F2D3-A1A1-AD11-0D13-C960499372F6}"/>
+            </a:ext>
+          </a:extLst>
+        </p:cNvPr>
+        <p:cNvGrpSpPr/>
+        <p:nvPr/>
+      </p:nvGrpSpPr>
+      <p:grpSpPr>
+        <a:xfrm>
+          <a:off x="0" y="0"/>
+          <a:ext cx="0" cy="0"/>
+          <a:chOff x="0" y="0"/>
+          <a:chExt cx="0" cy="0"/>
+        </a:xfrm>
+      </p:grpSpPr>
+      <p:sp>
+        <p:nvSpPr>
+          <p:cNvPr id="102" name="Title 1">
+            <a:extLst>
+              <a:ext uri="{FF2B5EF4-FFF2-40B4-BE49-F238E27FC236}">
+                <a16:creationId xmlns:a16="http://schemas.microsoft.com/office/drawing/2014/main" id="{E2CF3B74-88BA-3BC1-D22F-7988E596FC34}"/>
+              </a:ext>
+            </a:extLst>
+          </p:cNvPr>
+          <p:cNvSpPr>
+            <a:spLocks noGrp="1"/>
+          </p:cNvSpPr>
+          <p:nvPr>
+            <p:ph type="title"/>
+          </p:nvPr>
+        </p:nvSpPr>
+        <p:spPr/>
+        <p:txBody>
+          <a:bodyPr/>
+          <a:lstStyle/>
+          <a:p>
+            <a:r>
+              <a:t>Bandit: one rule, in Bandit's own source</a:t>
+            </a:r>
+          </a:p>
+        </p:txBody>
+      </p:sp>
+      <p:sp>
+        <p:nvSpPr>
+          <p:cNvPr id="103" name="TextBox 2">
+            <a:extLst>
+              <a:ext uri="{FF2B5EF4-FFF2-40B4-BE49-F238E27FC236}">
+                <a16:creationId xmlns:a16="http://schemas.microsoft.com/office/drawing/2014/main" id="{A46DF6CE-E558-96AB-38E9-A71ABAB205E0}"/>
+              </a:ext>
+            </a:extLst>
+          </p:cNvPr>
+          <p:cNvSpPr txBox="1"/>
+          <p:nvPr/>
+        </p:nvSpPr>
+        <p:spPr>
+          <a:xfrm>
+            <a:off x="319251" y="700000"/>
+            <a:ext cx="6014545" cy="523220"/>
+          </a:xfrm>
+          <a:prstGeom prst="rect">
+            <a:avLst/>
+          </a:prstGeom>
+          <a:noFill/>
+        </p:spPr>
+        <p:txBody>
+          <a:bodyPr wrap="square" anchor="t">
+            <a:spAutoFit/>
+          </a:bodyPr>
+          <a:lstStyle/>
+          <a:p>
+            <a:r>
+              <a:rPr sz="1400" dirty="0">
+                <a:solidFill>
+                  <a:srgbClr val="28285E"/>
+                </a:solidFill>
+                <a:latin typeface="Fira Sans" panose="020B0503050000020004" pitchFamily="34" charset="0"/>
+              </a:rPr>
+              <a:t>The pickle rule is a list of names to match, and it knows nothing of what is unpickled.</a:t>
+            </a:r>
+          </a:p>
+        </p:txBody>
+      </p:sp>
+      <p:sp>
+        <p:nvSpPr>
+          <p:cNvPr id="104" name="TextBox 3">
+            <a:extLst>
+              <a:ext uri="{FF2B5EF4-FFF2-40B4-BE49-F238E27FC236}">
+                <a16:creationId xmlns:a16="http://schemas.microsoft.com/office/drawing/2014/main" id="{CB021A8A-6E5E-DE30-EF3E-9BF906CD106B}"/>
+              </a:ext>
+            </a:extLst>
+          </p:cNvPr>
+          <p:cNvSpPr txBox="1"/>
+          <p:nvPr/>
+        </p:nvSpPr>
+        <p:spPr>
+          <a:xfrm>
+            <a:off x="319251" y="1439712"/>
+            <a:ext cx="5466240" cy="184666"/>
+          </a:xfrm>
+          <a:prstGeom prst="rect">
+            <a:avLst/>
+          </a:prstGeom>
+          <a:noFill/>
+        </p:spPr>
+        <p:txBody>
+          <a:bodyPr wrap="none" lIns="0" tIns="0" rIns="0" bIns="0">
+            <a:spAutoFit/>
+          </a:bodyPr>
+          <a:lstStyle/>
+          <a:p>
+            <a:r>
+              <a:rPr sz="1200" dirty="0">
+                <a:solidFill>
+                  <a:srgbClr val="28285E"/>
+                </a:solidFill>
+                <a:latin typeface="Fira Sans" panose="020B0503050000020004" pitchFamily="34" charset="0"/>
+              </a:rPr>
+              <a:t>bandit/blacklists/</a:t>
+            </a:r>
+            <a:r>
+              <a:rPr sz="1200" dirty="0" err="1">
+                <a:solidFill>
+                  <a:srgbClr val="28285E"/>
+                </a:solidFill>
+                <a:latin typeface="Fira Sans" panose="020B0503050000020004" pitchFamily="34" charset="0"/>
+              </a:rPr>
+              <a:t>calls.py</a:t>
+            </a:r>
+            <a:r>
+              <a:rPr sz="1200" dirty="0">
+                <a:solidFill>
+                  <a:srgbClr val="28285E"/>
+                </a:solidFill>
+                <a:latin typeface="Fira Sans" panose="020B0503050000020004" pitchFamily="34" charset="0"/>
+              </a:rPr>
+              <a:t> at 1.9.4, the B301 entry, lines 359 to 379, brackets cut</a:t>
+            </a:r>
+          </a:p>
+        </p:txBody>
+      </p:sp>
+      <p:sp>
+        <p:nvSpPr>
+          <p:cNvPr id="105" name="Rounded Rectangle 2">
+            <a:extLst>
+              <a:ext uri="{FF2B5EF4-FFF2-40B4-BE49-F238E27FC236}">
+                <a16:creationId xmlns:a16="http://schemas.microsoft.com/office/drawing/2014/main" id="{BD566881-2316-8220-C77D-D5DE95F14CFA}"/>
+              </a:ext>
+            </a:extLst>
+          </p:cNvPr>
+          <p:cNvSpPr/>
+          <p:nvPr/>
+        </p:nvSpPr>
+        <p:spPr>
+          <a:xfrm>
+            <a:off x="319251" y="1699712"/>
+            <a:ext cx="6014545" cy="2259998"/>
+          </a:xfrm>
+          <a:prstGeom prst="roundRect">
+            <a:avLst>
+              <a:gd name="adj" fmla="val 2731"/>
+            </a:avLst>
+          </a:prstGeom>
+          <a:solidFill>
+            <a:schemeClr val="tx1">
+              <a:lumMod val="85000"/>
+              <a:lumOff val="15000"/>
+            </a:schemeClr>
+          </a:solidFill>
+        </p:spPr>
+        <p:style>
+          <a:lnRef idx="2">
+            <a:schemeClr val="accent1">
+              <a:shade val="15000"/>
+            </a:schemeClr>
+          </a:lnRef>
+          <a:fillRef idx="1">
+            <a:schemeClr val="accent1"/>
+          </a:fillRef>
+          <a:effectRef idx="0">
+            <a:schemeClr val="accent1"/>
+          </a:effectRef>
+          <a:fontRef idx="minor">
+            <a:schemeClr val="lt1"/>
+          </a:fontRef>
+        </p:style>
+        <p:txBody>
+          <a:bodyPr rtlCol="0" anchor="ctr"/>
+          <a:lstStyle/>
+          <a:p>
+            <a:pPr algn="ctr"/>
+            <a:endParaRPr lang="en-US"/>
+          </a:p>
+        </p:txBody>
+      </p:sp>
+      <p:sp>
+        <p:nvSpPr>
+          <p:cNvPr id="106" name="Oval 3">
+            <a:extLst>
+              <a:ext uri="{FF2B5EF4-FFF2-40B4-BE49-F238E27FC236}">
+                <a16:creationId xmlns:a16="http://schemas.microsoft.com/office/drawing/2014/main" id="{3B2C70BC-2EB1-3626-5DD1-B1AFA12DBED8}"/>
+              </a:ext>
+            </a:extLst>
+          </p:cNvPr>
+          <p:cNvSpPr/>
+          <p:nvPr/>
+        </p:nvSpPr>
+        <p:spPr>
+          <a:xfrm>
+            <a:off x="371717" y="1743528"/>
+            <a:ext cx="157397" cy="157397"/>
+          </a:xfrm>
+          <a:prstGeom prst="ellipse">
+            <a:avLst/>
+          </a:prstGeom>
+          <a:solidFill>
+            <a:srgbClr val="FF0000"/>
+          </a:solidFill>
+        </p:spPr>
+        <p:style>
+          <a:lnRef idx="2">
+            <a:schemeClr val="accent1">
+              <a:shade val="15000"/>
+            </a:schemeClr>
+          </a:lnRef>
+          <a:fillRef idx="1">
+            <a:schemeClr val="accent1"/>
+          </a:fillRef>
+          <a:effectRef idx="0">
+            <a:schemeClr val="accent1"/>
+          </a:effectRef>
+          <a:fontRef idx="minor">
+            <a:schemeClr val="lt1"/>
+          </a:fontRef>
+        </p:style>
+        <p:txBody>
+          <a:bodyPr rtlCol="0" anchor="ctr"/>
+          <a:lstStyle/>
+          <a:p>
+            <a:pPr algn="ctr"/>
+            <a:endParaRPr lang="en-US"/>
+          </a:p>
+        </p:txBody>
+      </p:sp>
+      <p:sp>
+        <p:nvSpPr>
+          <p:cNvPr id="107" name="Oval 7">
+            <a:extLst>
+              <a:ext uri="{FF2B5EF4-FFF2-40B4-BE49-F238E27FC236}">
+                <a16:creationId xmlns:a16="http://schemas.microsoft.com/office/drawing/2014/main" id="{74CC95AD-75E6-B6E0-BA8B-795143784311}"/>
+              </a:ext>
+            </a:extLst>
+          </p:cNvPr>
+          <p:cNvSpPr/>
+          <p:nvPr/>
+        </p:nvSpPr>
+        <p:spPr>
+          <a:xfrm>
+            <a:off x="566589" y="1743528"/>
+            <a:ext cx="157397" cy="157397"/>
+          </a:xfrm>
+          <a:prstGeom prst="ellipse">
+            <a:avLst/>
+          </a:prstGeom>
+          <a:solidFill>
+            <a:srgbClr val="FFC000"/>
+          </a:solidFill>
+        </p:spPr>
+        <p:style>
+          <a:lnRef idx="2">
+            <a:schemeClr val="accent1">
+              <a:shade val="15000"/>
+            </a:schemeClr>
+          </a:lnRef>
+          <a:fillRef idx="1">
+            <a:schemeClr val="accent1"/>
+          </a:fillRef>
+          <a:effectRef idx="0">
+            <a:schemeClr val="accent1"/>
+          </a:effectRef>
+          <a:fontRef idx="minor">
+            <a:schemeClr val="lt1"/>
+          </a:fontRef>
+        </p:style>
+        <p:txBody>
+          <a:bodyPr rtlCol="0" anchor="ctr"/>
+          <a:lstStyle/>
+          <a:p>
+            <a:pPr algn="ctr"/>
+            <a:endParaRPr lang="en-US"/>
+          </a:p>
+        </p:txBody>
+      </p:sp>
+      <p:sp>
+        <p:nvSpPr>
+          <p:cNvPr id="108" name="Oval 8">
+            <a:extLst>
+              <a:ext uri="{FF2B5EF4-FFF2-40B4-BE49-F238E27FC236}">
+                <a16:creationId xmlns:a16="http://schemas.microsoft.com/office/drawing/2014/main" id="{885E22F2-1B4C-EF1A-803C-F33349012D53}"/>
+              </a:ext>
+            </a:extLst>
+          </p:cNvPr>
+          <p:cNvSpPr/>
+          <p:nvPr/>
+        </p:nvSpPr>
+        <p:spPr>
+          <a:xfrm>
+            <a:off x="761461" y="1743528"/>
+            <a:ext cx="157397" cy="157397"/>
+          </a:xfrm>
+          <a:prstGeom prst="ellipse">
+            <a:avLst/>
+          </a:prstGeom>
+          <a:solidFill>
+            <a:srgbClr val="92D050"/>
+          </a:solidFill>
+        </p:spPr>
+        <p:style>
+          <a:lnRef idx="2">
+            <a:schemeClr val="accent1">
+              <a:shade val="15000"/>
+            </a:schemeClr>
+          </a:lnRef>
+          <a:fillRef idx="1">
+            <a:schemeClr val="accent1"/>
+          </a:fillRef>
+          <a:effectRef idx="0">
+            <a:schemeClr val="accent1"/>
+          </a:effectRef>
+          <a:fontRef idx="minor">
+            <a:schemeClr val="lt1"/>
+          </a:fontRef>
+        </p:style>
+        <p:txBody>
+          <a:bodyPr rtlCol="0" anchor="ctr"/>
+          <a:lstStyle/>
+          <a:p>
+            <a:pPr algn="ctr"/>
+            <a:endParaRPr lang="en-US"/>
+          </a:p>
+        </p:txBody>
+      </p:sp>
+      <p:sp>
+        <p:nvSpPr>
+          <p:cNvPr id="109" name="TextBox 108">
+            <a:extLst>
+              <a:ext uri="{FF2B5EF4-FFF2-40B4-BE49-F238E27FC236}">
+                <a16:creationId xmlns:a16="http://schemas.microsoft.com/office/drawing/2014/main" id="{A9F32058-66F4-D405-FDE2-372F3F272554}"/>
+              </a:ext>
+            </a:extLst>
+          </p:cNvPr>
+          <p:cNvSpPr txBox="1"/>
+          <p:nvPr/>
+        </p:nvSpPr>
+        <p:spPr>
+          <a:xfrm>
+            <a:off x="469251" y="2029712"/>
+            <a:ext cx="5309146" cy="1692771"/>
+          </a:xfrm>
+          <a:prstGeom prst="rect">
+            <a:avLst/>
+          </a:prstGeom>
+          <a:noFill/>
+        </p:spPr>
+        <p:txBody>
+          <a:bodyPr wrap="none" lIns="0" tIns="0" rIns="0" bIns="0" anchor="t">
+            <a:spAutoFit/>
+          </a:bodyPr>
+          <a:lstStyle/>
+          <a:p>
+            <a:pPr algn="l">
+              <a:buNone/>
+            </a:pPr>
+            <a:r>
+              <a:rPr sz="1000" dirty="0">
+                <a:solidFill>
+                  <a:srgbClr val="8A8A9A"/>
+                </a:solidFill>
+                <a:latin typeface="Maple Mono NF"/>
+              </a:rPr>
+              <a:t>359 </a:t>
+            </a:r>
+            <a:r>
+              <a:rPr sz="1000" dirty="0" err="1">
+                <a:solidFill>
+                  <a:srgbClr val="9CDCFE"/>
+                </a:solidFill>
+                <a:latin typeface="Maple Mono NF"/>
+              </a:rPr>
+              <a:t>utils</a:t>
+            </a:r>
+            <a:r>
+              <a:rPr sz="1000" dirty="0" err="1">
+                <a:solidFill>
+                  <a:schemeClr val="tx2"/>
+                </a:solidFill>
+                <a:latin typeface="Maple Mono NF"/>
+              </a:rPr>
+              <a:t>.</a:t>
+            </a:r>
+            <a:r>
+              <a:rPr sz="1000" dirty="0" err="1">
+                <a:solidFill>
+                  <a:srgbClr val="DCDCAA"/>
+                </a:solidFill>
+                <a:latin typeface="Maple Mono NF"/>
+              </a:rPr>
+              <a:t>build_conf_dict</a:t>
+            </a:r>
+            <a:r>
+              <a:rPr sz="1000" dirty="0">
+                <a:solidFill>
+                  <a:schemeClr val="tx2"/>
+                </a:solidFill>
+                <a:latin typeface="Maple Mono NF"/>
+              </a:rPr>
+              <a:t>(</a:t>
+            </a:r>
+          </a:p>
+          <a:p>
+            <a:pPr algn="l">
+              <a:buNone/>
+            </a:pPr>
+            <a:r>
+              <a:rPr sz="1000" dirty="0">
+                <a:solidFill>
+                  <a:srgbClr val="8A8A9A"/>
+                </a:solidFill>
+                <a:latin typeface="Maple Mono NF"/>
+              </a:rPr>
+              <a:t>360 </a:t>
+            </a:r>
+            <a:r>
+              <a:rPr sz="1000" dirty="0">
+                <a:solidFill>
+                  <a:schemeClr val="tx2"/>
+                </a:solidFill>
+                <a:latin typeface="Maple Mono NF"/>
+              </a:rPr>
+              <a:t>    </a:t>
+            </a:r>
+            <a:r>
+              <a:rPr sz="1000" dirty="0">
+                <a:solidFill>
+                  <a:srgbClr val="CE9178"/>
+                </a:solidFill>
+                <a:latin typeface="Maple Mono NF"/>
+              </a:rPr>
+              <a:t>"pickle"</a:t>
+            </a:r>
+            <a:r>
+              <a:rPr sz="1000" dirty="0">
+                <a:solidFill>
+                  <a:schemeClr val="tx2"/>
+                </a:solidFill>
+                <a:latin typeface="Maple Mono NF"/>
+              </a:rPr>
+              <a:t>,</a:t>
+            </a:r>
+          </a:p>
+          <a:p>
+            <a:pPr algn="l">
+              <a:buNone/>
+            </a:pPr>
+            <a:r>
+              <a:rPr sz="1000" dirty="0">
+                <a:solidFill>
+                  <a:srgbClr val="8A8A9A"/>
+                </a:solidFill>
+                <a:latin typeface="Maple Mono NF"/>
+              </a:rPr>
+              <a:t>361 </a:t>
+            </a:r>
+            <a:r>
+              <a:rPr sz="1000" dirty="0">
+                <a:solidFill>
+                  <a:schemeClr val="tx2"/>
+                </a:solidFill>
+                <a:latin typeface="Maple Mono NF"/>
+              </a:rPr>
+              <a:t>    </a:t>
+            </a:r>
+            <a:r>
+              <a:rPr sz="1000" dirty="0">
+                <a:solidFill>
+                  <a:srgbClr val="CE9178"/>
+                </a:solidFill>
+                <a:latin typeface="Maple Mono NF"/>
+              </a:rPr>
+              <a:t>"B301"</a:t>
+            </a:r>
+            <a:r>
+              <a:rPr sz="1000" dirty="0">
+                <a:solidFill>
+                  <a:schemeClr val="tx2"/>
+                </a:solidFill>
+                <a:latin typeface="Maple Mono NF"/>
+              </a:rPr>
+              <a:t>,</a:t>
+            </a:r>
+          </a:p>
+          <a:p>
+            <a:pPr algn="l">
+              <a:buNone/>
+            </a:pPr>
+            <a:r>
+              <a:rPr sz="1000" dirty="0">
+                <a:solidFill>
+                  <a:srgbClr val="8A8A9A"/>
+                </a:solidFill>
+                <a:latin typeface="Maple Mono NF"/>
+              </a:rPr>
+              <a:t>362 </a:t>
+            </a:r>
+            <a:r>
+              <a:rPr sz="1000" dirty="0">
+                <a:solidFill>
+                  <a:schemeClr val="tx2"/>
+                </a:solidFill>
+                <a:latin typeface="Maple Mono NF"/>
+              </a:rPr>
+              <a:t>    </a:t>
+            </a:r>
+            <a:r>
+              <a:rPr sz="1000" dirty="0" err="1">
+                <a:solidFill>
+                  <a:srgbClr val="9CDCFE"/>
+                </a:solidFill>
+                <a:latin typeface="Maple Mono NF"/>
+              </a:rPr>
+              <a:t>issue</a:t>
+            </a:r>
+            <a:r>
+              <a:rPr sz="1000" dirty="0" err="1">
+                <a:solidFill>
+                  <a:schemeClr val="tx2"/>
+                </a:solidFill>
+                <a:latin typeface="Maple Mono NF"/>
+              </a:rPr>
+              <a:t>.</a:t>
+            </a:r>
+            <a:r>
+              <a:rPr sz="1000" dirty="0" err="1">
+                <a:solidFill>
+                  <a:srgbClr val="9CDCFE"/>
+                </a:solidFill>
+                <a:latin typeface="Maple Mono NF"/>
+              </a:rPr>
+              <a:t>Cwe</a:t>
+            </a:r>
+            <a:r>
+              <a:rPr sz="1000" dirty="0" err="1">
+                <a:solidFill>
+                  <a:schemeClr val="tx2"/>
+                </a:solidFill>
+                <a:latin typeface="Maple Mono NF"/>
+              </a:rPr>
+              <a:t>.</a:t>
+            </a:r>
+            <a:r>
+              <a:rPr sz="1000" dirty="0" err="1">
+                <a:solidFill>
+                  <a:srgbClr val="9CDCFE"/>
+                </a:solidFill>
+                <a:latin typeface="Maple Mono NF"/>
+              </a:rPr>
+              <a:t>DESERIALIZATION_OF_UNTRUSTED_DATA</a:t>
+            </a:r>
+            <a:r>
+              <a:rPr sz="1000" dirty="0">
+                <a:solidFill>
+                  <a:schemeClr val="tx2"/>
+                </a:solidFill>
+                <a:latin typeface="Maple Mono NF"/>
+              </a:rPr>
+              <a:t>,</a:t>
+            </a:r>
+          </a:p>
+          <a:p>
+            <a:pPr algn="l">
+              <a:buNone/>
+            </a:pPr>
+            <a:r>
+              <a:rPr sz="1000" dirty="0">
+                <a:solidFill>
+                  <a:srgbClr val="8A8A9A"/>
+                </a:solidFill>
+                <a:latin typeface="Maple Mono NF"/>
+              </a:rPr>
+              <a:t>364 </a:t>
+            </a:r>
+            <a:r>
+              <a:rPr sz="1000" dirty="0">
+                <a:solidFill>
+                  <a:schemeClr val="tx2"/>
+                </a:solidFill>
+                <a:latin typeface="Maple Mono NF"/>
+              </a:rPr>
+              <a:t>        </a:t>
+            </a:r>
+            <a:r>
+              <a:rPr sz="1000" dirty="0">
+                <a:solidFill>
+                  <a:srgbClr val="CE9178"/>
+                </a:solidFill>
+                <a:latin typeface="Maple Mono NF"/>
+              </a:rPr>
+              <a:t>"</a:t>
+            </a:r>
+            <a:r>
+              <a:rPr sz="1000" dirty="0" err="1">
+                <a:solidFill>
+                  <a:srgbClr val="CE9178"/>
+                </a:solidFill>
+                <a:latin typeface="Maple Mono NF"/>
+              </a:rPr>
+              <a:t>pickle.loads</a:t>
+            </a:r>
+            <a:r>
+              <a:rPr sz="1000" dirty="0">
+                <a:solidFill>
+                  <a:srgbClr val="CE9178"/>
+                </a:solidFill>
+                <a:latin typeface="Maple Mono NF"/>
+              </a:rPr>
+              <a:t>"</a:t>
+            </a:r>
+            <a:r>
+              <a:rPr sz="1000" dirty="0">
+                <a:solidFill>
+                  <a:schemeClr val="tx2"/>
+                </a:solidFill>
+                <a:latin typeface="Maple Mono NF"/>
+              </a:rPr>
+              <a:t>,</a:t>
+            </a:r>
+          </a:p>
+          <a:p>
+            <a:pPr algn="l">
+              <a:buNone/>
+            </a:pPr>
+            <a:r>
+              <a:rPr sz="1000" dirty="0">
+                <a:solidFill>
+                  <a:srgbClr val="8A8A9A"/>
+                </a:solidFill>
+                <a:latin typeface="Maple Mono NF"/>
+              </a:rPr>
+              <a:t>365 </a:t>
+            </a:r>
+            <a:r>
+              <a:rPr sz="1000" dirty="0">
+                <a:solidFill>
+                  <a:schemeClr val="tx2"/>
+                </a:solidFill>
+                <a:latin typeface="Maple Mono NF"/>
+              </a:rPr>
+              <a:t>        </a:t>
+            </a:r>
+            <a:r>
+              <a:rPr sz="1000" dirty="0">
+                <a:solidFill>
+                  <a:srgbClr val="CE9178"/>
+                </a:solidFill>
+                <a:latin typeface="Maple Mono NF"/>
+              </a:rPr>
+              <a:t>"</a:t>
+            </a:r>
+            <a:r>
+              <a:rPr sz="1000" dirty="0" err="1">
+                <a:solidFill>
+                  <a:srgbClr val="CE9178"/>
+                </a:solidFill>
+                <a:latin typeface="Maple Mono NF"/>
+              </a:rPr>
+              <a:t>pickle.load</a:t>
+            </a:r>
+            <a:r>
+              <a:rPr sz="1000" dirty="0">
+                <a:solidFill>
+                  <a:srgbClr val="CE9178"/>
+                </a:solidFill>
+                <a:latin typeface="Maple Mono NF"/>
+              </a:rPr>
+              <a:t>"</a:t>
+            </a:r>
+            <a:r>
+              <a:rPr sz="1000" dirty="0">
+                <a:solidFill>
+                  <a:schemeClr val="tx2"/>
+                </a:solidFill>
+                <a:latin typeface="Maple Mono NF"/>
+              </a:rPr>
+              <a:t>,</a:t>
+            </a:r>
+          </a:p>
+          <a:p>
+            <a:pPr algn="l">
+              <a:buNone/>
+            </a:pPr>
+            <a:r>
+              <a:rPr sz="1000" dirty="0">
+                <a:solidFill>
+                  <a:srgbClr val="8A8A9A"/>
+                </a:solidFill>
+                <a:latin typeface="Maple Mono NF"/>
+              </a:rPr>
+              <a:t>366 </a:t>
+            </a:r>
+            <a:r>
+              <a:rPr sz="1000" dirty="0">
+                <a:solidFill>
+                  <a:schemeClr val="tx2"/>
+                </a:solidFill>
+                <a:latin typeface="Maple Mono NF"/>
+              </a:rPr>
+              <a:t>        </a:t>
+            </a:r>
+            <a:r>
+              <a:rPr sz="1000" dirty="0">
+                <a:solidFill>
+                  <a:srgbClr val="CE9178"/>
+                </a:solidFill>
+                <a:latin typeface="Maple Mono NF"/>
+              </a:rPr>
+              <a:t>"</a:t>
+            </a:r>
+            <a:r>
+              <a:rPr sz="1000" dirty="0" err="1">
+                <a:solidFill>
+                  <a:srgbClr val="CE9178"/>
+                </a:solidFill>
+                <a:latin typeface="Maple Mono NF"/>
+              </a:rPr>
+              <a:t>pickle.Unpickler</a:t>
+            </a:r>
+            <a:r>
+              <a:rPr sz="1000" dirty="0">
+                <a:solidFill>
+                  <a:srgbClr val="CE9178"/>
+                </a:solidFill>
+                <a:latin typeface="Maple Mono NF"/>
+              </a:rPr>
+              <a:t>"</a:t>
+            </a:r>
+            <a:r>
+              <a:rPr sz="1000" dirty="0">
+                <a:solidFill>
+                  <a:schemeClr val="tx2"/>
+                </a:solidFill>
+                <a:latin typeface="Maple Mono NF"/>
+              </a:rPr>
+              <a:t>,</a:t>
+            </a:r>
+          </a:p>
+          <a:p>
+            <a:pPr algn="l">
+              <a:buNone/>
+            </a:pPr>
+            <a:r>
+              <a:rPr sz="1000" dirty="0">
+                <a:solidFill>
+                  <a:srgbClr val="8A8A9A"/>
+                </a:solidFill>
+                <a:latin typeface="Maple Mono NF"/>
+              </a:rPr>
+              <a:t>    </a:t>
+            </a:r>
+            <a:r>
+              <a:rPr sz="1000" dirty="0">
+                <a:solidFill>
+                  <a:schemeClr val="accent4"/>
+                </a:solidFill>
+                <a:latin typeface="Maple Mono NF"/>
+              </a:rPr>
+              <a:t># ours: nine more names cut, from dill to </a:t>
+            </a:r>
+            <a:r>
+              <a:rPr sz="1000" dirty="0" err="1">
+                <a:solidFill>
+                  <a:schemeClr val="accent4"/>
+                </a:solidFill>
+                <a:latin typeface="Maple Mono NF"/>
+              </a:rPr>
+              <a:t>pandas.read_pickle</a:t>
+            </a:r>
+            <a:endParaRPr sz="1000" dirty="0">
+              <a:solidFill>
+                <a:schemeClr val="accent4"/>
+              </a:solidFill>
+              <a:latin typeface="Maple Mono NF"/>
+            </a:endParaRPr>
+          </a:p>
+          <a:p>
+            <a:pPr algn="l">
+              <a:buNone/>
+            </a:pPr>
+            <a:r>
+              <a:rPr sz="1000" b="1" dirty="0">
+                <a:solidFill>
+                  <a:schemeClr val="bg1"/>
+                </a:solidFill>
+                <a:latin typeface="Maple Mono NF"/>
+              </a:rPr>
+              <a:t>377     "Pickle and modules that wrap it can be unsafe when used to "</a:t>
+            </a:r>
+          </a:p>
+          <a:p>
+            <a:pPr algn="l">
+              <a:buNone/>
+            </a:pPr>
+            <a:r>
+              <a:rPr sz="1000" b="1" dirty="0">
+                <a:solidFill>
+                  <a:schemeClr val="bg1"/>
+                </a:solidFill>
+                <a:latin typeface="Maple Mono NF"/>
+              </a:rPr>
+              <a:t>378     "deserialize untrusted data, possible security issue.",</a:t>
+            </a:r>
+          </a:p>
+          <a:p>
+            <a:pPr algn="l">
+              <a:buNone/>
+            </a:pPr>
+            <a:r>
+              <a:rPr sz="1000" dirty="0">
+                <a:solidFill>
+                  <a:srgbClr val="8A8A9A"/>
+                </a:solidFill>
+                <a:latin typeface="Maple Mono NF"/>
+              </a:rPr>
+              <a:t>379 </a:t>
+            </a:r>
+            <a:r>
+              <a:rPr sz="1000" dirty="0">
+                <a:solidFill>
+                  <a:schemeClr val="tx2"/>
+                </a:solidFill>
+                <a:latin typeface="Maple Mono NF"/>
+              </a:rPr>
+              <a:t>)</a:t>
+            </a:r>
+          </a:p>
+        </p:txBody>
+      </p:sp>
+      <p:sp>
+        <p:nvSpPr>
+          <p:cNvPr id="110" name="Rectangle 109">
+            <a:extLst>
+              <a:ext uri="{FF2B5EF4-FFF2-40B4-BE49-F238E27FC236}">
+                <a16:creationId xmlns:a16="http://schemas.microsoft.com/office/drawing/2014/main" id="{0FEEAFED-4F7F-FA61-7A52-427ADF344861}"/>
+              </a:ext>
+            </a:extLst>
+          </p:cNvPr>
+          <p:cNvSpPr/>
+          <p:nvPr/>
+        </p:nvSpPr>
+        <p:spPr>
+          <a:xfrm>
+            <a:off x="319251" y="4189710"/>
+            <a:ext cx="6014545" cy="430000"/>
+          </a:xfrm>
+          <a:prstGeom prst="rect">
+            <a:avLst/>
+          </a:prstGeom>
+          <a:noFill/>
+          <a:ln>
+            <a:solidFill>
+              <a:srgbClr val="28285E"/>
+            </a:solidFill>
+          </a:ln>
+          <a:effectLst/>
+        </p:spPr>
+        <p:style>
+          <a:lnRef idx="1">
+            <a:schemeClr val="accent1"/>
+          </a:lnRef>
+          <a:fillRef idx="3">
+            <a:schemeClr val="accent1"/>
+          </a:fillRef>
+          <a:effectRef idx="2">
+            <a:schemeClr val="accent1"/>
+          </a:effectRef>
+          <a:fontRef idx="minor">
+            <a:schemeClr val="lt1"/>
+          </a:fontRef>
+        </p:style>
+        <p:txBody>
+          <a:bodyPr wrap="square" lIns="137160" rIns="137160" rtlCol="0" anchor="ctr"/>
+          <a:lstStyle/>
+          <a:p>
+            <a:pPr algn="ctr"/>
+            <a:r>
+              <a:rPr sz="1200" b="1">
+                <a:solidFill>
+                  <a:srgbClr val="28285E"/>
+                </a:solidFill>
+              </a:rPr>
+              <a:t>A rule is a list of function names to match, a message, a severity and a CWE.</a:t>
+            </a:r>
+          </a:p>
+        </p:txBody>
+      </p:sp>
+      <p:pic>
+        <p:nvPicPr>
+          <p:cNvPr id="2" name="Picture 1">
+            <a:extLst>
+              <a:ext uri="{FF2B5EF4-FFF2-40B4-BE49-F238E27FC236}">
+                <a16:creationId xmlns:a16="http://schemas.microsoft.com/office/drawing/2014/main" id="{FBFC31B3-403D-EE27-6C8B-F912E192714E}"/>
+              </a:ext>
+            </a:extLst>
+          </p:cNvPr>
+          <p:cNvPicPr>
+            <a:picLocks noChangeAspect="1"/>
+          </p:cNvPicPr>
+          <p:nvPr/>
+        </p:nvPicPr>
+        <p:blipFill>
+          <a:blip r:embed="rId3">
+            <a:alphaModFix amt="45000"/>
+          </a:blip>
+          <a:stretch>
+            <a:fillRect/>
+          </a:stretch>
+        </p:blipFill>
+        <p:spPr>
+          <a:xfrm>
+            <a:off x="371716" y="2029712"/>
+            <a:ext cx="5517741" cy="1212864"/>
+          </a:xfrm>
+          <a:prstGeom prst="rect">
+            <a:avLst/>
+          </a:prstGeom>
+        </p:spPr>
+      </p:pic>
+    </p:spTree>
+    <p:extLst>
+      <p:ext uri="{BB962C8B-B14F-4D97-AF65-F5344CB8AC3E}">
+        <p14:creationId xmlns:p14="http://schemas.microsoft.com/office/powerpoint/2010/main" val="1196443368"/>
+      </p:ext>
+    </p:extLst>
+  </p:cSld>
+  <p:clrMapOvr>
+    <a:masterClrMapping/>
+  </p:clrMapOvr>
+</p:sld>
+</file>
+
 <file path=ppt/slides/slide24.xml><?xml version="1.0" encoding="utf-8"?>
 <p:sld xmlns:a="http://schemas.openxmlformats.org/drawingml/2006/main" xmlns:r="http://schemas.openxmlformats.org/officeDocument/2006/relationships" xmlns:p="http://schemas.openxmlformats.org/presentationml/2006/main">
   <p:cSld>
@@ -13363,7 +13816,7 @@
         <p:spPr>
           <a:xfrm>
             <a:off x="319251" y="700000"/>
-            <a:ext cx="6014545" cy="509712"/>
+            <a:ext cx="6014545" cy="523220"/>
           </a:xfrm>
           <a:prstGeom prst="rect">
             <a:avLst/>
@@ -13377,10 +13830,11 @@
           <a:lstStyle/>
           <a:p>
             <a:r>
-              <a:rPr sz="1400" b="1">
+              <a:rPr sz="1400" dirty="0">
                 <a:solidFill>
                   <a:srgbClr val="28285E"/>
                 </a:solidFill>
+                <a:latin typeface="Fira Sans" panose="020B0503050000020004" pitchFamily="34" charset="0"/>
               </a:rPr>
               <a:t>Every rule stamps two estimates on its alerts, and HW1 keeps MEDIUM severity and above at any confidence.</a:t>
             </a:r>
@@ -14622,7 +15076,7 @@
         <p:spPr>
           <a:xfrm>
             <a:off x="319251" y="700000"/>
-            <a:ext cx="6014545" cy="200000"/>
+            <a:ext cx="5509522" cy="184666"/>
           </a:xfrm>
           <a:prstGeom prst="rect">
             <a:avLst/>
@@ -14636,10 +15090,11 @@
           <a:lstStyle/>
           <a:p>
             <a:r>
-              <a:rPr sz="1200" b="1" dirty="0">
+              <a:rPr sz="1200" dirty="0">
                 <a:solidFill>
                   <a:srgbClr val="28285E"/>
                 </a:solidFill>
+                <a:latin typeface="Fira Sans" panose="020B0503050000020004" pitchFamily="34" charset="0"/>
               </a:rPr>
               <a:t>The brief's Radicale command, and Bandit 1.9.4's ten results at commit eff8027f</a:t>
             </a:r>
@@ -14856,7 +15311,7 @@
         <p:spPr>
           <a:xfrm>
             <a:off x="469251" y="1290000"/>
-            <a:ext cx="5714545" cy="2186000"/>
+            <a:ext cx="5607304" cy="2031325"/>
           </a:xfrm>
           <a:prstGeom prst="rect">
             <a:avLst/>
@@ -15472,7 +15927,7 @@
         <p:spPr>
           <a:xfrm>
             <a:off x="319251" y="700000"/>
-            <a:ext cx="6014545" cy="200000"/>
+            <a:ext cx="5693866" cy="184666"/>
           </a:xfrm>
           <a:prstGeom prst="rect">
             <a:avLst/>
@@ -15486,34 +15941,38 @@
           <a:lstStyle/>
           <a:p>
             <a:r>
-              <a:rPr sz="1200" b="1" dirty="0" err="1">
+              <a:rPr sz="1200" dirty="0" err="1">
                 <a:solidFill>
                   <a:srgbClr val="28285E"/>
                 </a:solidFill>
+                <a:latin typeface="Fira Sans" panose="020B0503050000020004" pitchFamily="34" charset="0"/>
               </a:rPr>
               <a:t>radicale.bandit.json</a:t>
             </a:r>
             <a:r>
-              <a:rPr sz="1200" b="1" dirty="0">
+              <a:rPr sz="1200" dirty="0">
                 <a:solidFill>
                   <a:srgbClr val="28285E"/>
                 </a:solidFill>
+                <a:latin typeface="Fira Sans" panose="020B0503050000020004" pitchFamily="34" charset="0"/>
               </a:rPr>
               <a:t>, the result for sharing/</a:t>
             </a:r>
             <a:r>
-              <a:rPr sz="1200" b="1" dirty="0" err="1">
+              <a:rPr sz="1200" dirty="0" err="1">
                 <a:solidFill>
                   <a:srgbClr val="28285E"/>
                 </a:solidFill>
+                <a:latin typeface="Fira Sans" panose="020B0503050000020004" pitchFamily="34" charset="0"/>
               </a:rPr>
               <a:t>files.py</a:t>
             </a:r>
             <a:r>
-              <a:rPr sz="1200" b="1" dirty="0">
+              <a:rPr sz="1200" dirty="0">
                 <a:solidFill>
                   <a:srgbClr val="28285E"/>
                 </a:solidFill>
+                <a:latin typeface="Fira Sans" panose="020B0503050000020004" pitchFamily="34" charset="0"/>
               </a:rPr>
               <a:t> line 131, code and message cut</a:t>
             </a:r>
@@ -15730,7 +16189,7 @@
         <p:spPr>
           <a:xfrm>
             <a:off x="469251" y="1290000"/>
-            <a:ext cx="5714545" cy="2186000"/>
+            <a:ext cx="5182509" cy="2031325"/>
           </a:xfrm>
           <a:prstGeom prst="rect">
             <a:avLst/>
@@ -16447,8 +16906,8 @@
         </p:nvSpPr>
         <p:spPr>
           <a:xfrm>
-            <a:off x="929000" y="1932790"/>
-            <a:ext cx="5000000" cy="1277920"/>
+            <a:off x="929000" y="1910031"/>
+            <a:ext cx="5000000" cy="1323439"/>
           </a:xfrm>
           <a:prstGeom prst="rect">
             <a:avLst/>
@@ -16463,7 +16922,7 @@
           <a:p>
             <a:pPr algn="ctr"/>
             <a:r>
-              <a:rPr sz="4000" b="1">
+              <a:rPr sz="4000" dirty="0">
                 <a:solidFill>
                   <a:schemeClr val="tx2"/>
                 </a:solidFill>
@@ -16827,10 +17286,11 @@
           <a:lstStyle/>
           <a:p>
             <a:r>
-              <a:rPr sz="1400" b="1">
+              <a:rPr sz="1400" dirty="0">
                 <a:solidFill>
                   <a:srgbClr val="28285E"/>
                 </a:solidFill>
+                <a:latin typeface="Fira Sans" panose="020B0503050000020004" pitchFamily="34" charset="0"/>
               </a:rPr>
               <a:t>The form value arrives as bar, and line 46 pastes it into the query text.</a:t>
             </a:r>
@@ -16846,7 +17306,7 @@
         <p:spPr>
           <a:xfrm>
             <a:off x="319251" y="1240576"/>
-            <a:ext cx="6014545" cy="200000"/>
+            <a:ext cx="4655121" cy="184666"/>
           </a:xfrm>
           <a:prstGeom prst="rect">
             <a:avLst/>
@@ -16860,10 +17320,11 @@
           <a:lstStyle/>
           <a:p>
             <a:r>
-              <a:rPr sz="1200" b="1">
+              <a:rPr sz="1200" dirty="0">
                 <a:solidFill>
                   <a:srgbClr val="28285E"/>
                 </a:solidFill>
+                <a:latin typeface="Fira Sans" panose="020B0503050000020004" pitchFamily="34" charset="0"/>
               </a:rPr>
               <a:t>BenchmarkTest00099.py, BenchmarkTest00099_post, lines 42 to 49</a:t>
             </a:r>
@@ -17080,7 +17541,7 @@
         <p:spPr>
           <a:xfrm>
             <a:off x="469251" y="1830576"/>
-            <a:ext cx="5714545" cy="1118000"/>
+            <a:ext cx="5607304" cy="1015663"/>
           </a:xfrm>
           <a:prstGeom prst="rect">
             <a:avLst/>
@@ -17097,7 +17558,7 @@
               <a:buNone/>
             </a:pPr>
             <a:r>
-              <a:rPr sz="1100">
+              <a:rPr sz="1100" dirty="0">
                 <a:solidFill>
                   <a:srgbClr val="8A8A9A"/>
                 </a:solidFill>
@@ -17106,7 +17567,7 @@
               <a:t> 42 </a:t>
             </a:r>
             <a:r>
-              <a:rPr sz="1100">
+              <a:rPr sz="1100" dirty="0">
                 <a:solidFill>
                   <a:srgbClr val="9CDCFE"/>
                 </a:solidFill>
@@ -17115,7 +17576,7 @@
               <a:t>bar</a:t>
             </a:r>
             <a:r>
-              <a:rPr sz="1100">
+              <a:rPr sz="1100" dirty="0">
                 <a:solidFill>
                   <a:schemeClr val="tx2"/>
                 </a:solidFill>
@@ -17124,7 +17585,7 @@
               <a:t> = </a:t>
             </a:r>
             <a:r>
-              <a:rPr sz="1100">
+              <a:rPr sz="1100" dirty="0">
                 <a:solidFill>
                   <a:srgbClr val="9CDCFE"/>
                 </a:solidFill>
@@ -17133,7 +17594,7 @@
               <a:t>conf52528</a:t>
             </a:r>
             <a:r>
-              <a:rPr sz="1100">
+              <a:rPr sz="1100" dirty="0">
                 <a:solidFill>
                   <a:schemeClr val="tx2"/>
                 </a:solidFill>
@@ -17142,7 +17603,7 @@
               <a:t>.</a:t>
             </a:r>
             <a:r>
-              <a:rPr sz="1100">
+              <a:rPr sz="1100" dirty="0">
                 <a:solidFill>
                   <a:srgbClr val="DCDCAA"/>
                 </a:solidFill>
@@ -17151,7 +17612,7 @@
               <a:t>get</a:t>
             </a:r>
             <a:r>
-              <a:rPr sz="1100">
+              <a:rPr sz="1100" dirty="0">
                 <a:solidFill>
                   <a:schemeClr val="tx2"/>
                 </a:solidFill>
@@ -17160,7 +17621,7 @@
               <a:t>(</a:t>
             </a:r>
             <a:r>
-              <a:rPr sz="1100">
+              <a:rPr sz="1100" dirty="0">
                 <a:solidFill>
                   <a:srgbClr val="CE9178"/>
                 </a:solidFill>
@@ -17169,7 +17630,7 @@
               <a:t>'section52528'</a:t>
             </a:r>
             <a:r>
-              <a:rPr sz="1100">
+              <a:rPr sz="1100" dirty="0">
                 <a:solidFill>
                   <a:schemeClr val="tx2"/>
                 </a:solidFill>
@@ -17178,7 +17639,7 @@
               <a:t>, </a:t>
             </a:r>
             <a:r>
-              <a:rPr sz="1100">
+              <a:rPr sz="1100" dirty="0">
                 <a:solidFill>
                   <a:srgbClr val="CE9178"/>
                 </a:solidFill>
@@ -17187,7 +17648,7 @@
               <a:t>'keyB-52528'</a:t>
             </a:r>
             <a:r>
-              <a:rPr sz="1100">
+              <a:rPr sz="1100" dirty="0">
                 <a:solidFill>
                   <a:schemeClr val="tx2"/>
                 </a:solidFill>
@@ -17201,7 +17662,7 @@
               <a:buNone/>
             </a:pPr>
             <a:r>
-              <a:rPr sz="1100">
+              <a:rPr sz="1100" dirty="0">
                 <a:solidFill>
                   <a:srgbClr val="8A8A9A"/>
                 </a:solidFill>
@@ -17210,7 +17671,7 @@
               <a:t>    </a:t>
             </a:r>
             <a:r>
-              <a:rPr sz="1100">
+              <a:rPr sz="1100" dirty="0">
                 <a:solidFill>
                   <a:schemeClr val="accent4"/>
                 </a:solidFill>
@@ -17224,7 +17685,7 @@
               <a:buNone/>
             </a:pPr>
             <a:r>
-              <a:rPr sz="1100">
+              <a:rPr sz="1100" dirty="0">
                 <a:solidFill>
                   <a:srgbClr val="8A8A9A"/>
                 </a:solidFill>
@@ -17233,7 +17694,7 @@
               <a:t> 46 </a:t>
             </a:r>
             <a:r>
-              <a:rPr sz="1100">
+              <a:rPr sz="1100" dirty="0" err="1">
                 <a:solidFill>
                   <a:srgbClr val="9CDCFE"/>
                 </a:solidFill>
@@ -17242,7 +17703,7 @@
               <a:t>sql</a:t>
             </a:r>
             <a:r>
-              <a:rPr sz="1100">
+              <a:rPr sz="1100" dirty="0">
                 <a:solidFill>
                   <a:schemeClr val="tx2"/>
                 </a:solidFill>
@@ -17251,7 +17712,7 @@
               <a:t> = </a:t>
             </a:r>
             <a:r>
-              <a:rPr sz="1100">
+              <a:rPr sz="1100" dirty="0" err="1">
                 <a:solidFill>
                   <a:srgbClr val="569CD6"/>
                 </a:solidFill>
@@ -17260,16 +17721,25 @@
               <a:t>f</a:t>
             </a:r>
             <a:r>
-              <a:rPr sz="1100">
+              <a:rPr sz="1100" dirty="0" err="1">
                 <a:solidFill>
                   <a:srgbClr val="CE9178"/>
                 </a:solidFill>
                 <a:latin typeface="Maple Mono NF"/>
               </a:rPr>
-              <a:t>'SELECT username from USERS where password = \'</a:t>
-            </a:r>
-            <a:r>
-              <a:rPr sz="1100">
+              <a:t>'SELECT</a:t>
+            </a:r>
+            <a:r>
+              <a:rPr sz="1100" dirty="0">
+                <a:solidFill>
+                  <a:srgbClr val="CE9178"/>
+                </a:solidFill>
+                <a:latin typeface="Maple Mono NF"/>
+              </a:rPr>
+              <a:t> username from USERS where password = \'</a:t>
+            </a:r>
+            <a:r>
+              <a:rPr sz="1100" dirty="0">
                 <a:solidFill>
                   <a:srgbClr val="569CD6"/>
                 </a:solidFill>
@@ -17278,7 +17748,7 @@
               <a:t>{</a:t>
             </a:r>
             <a:r>
-              <a:rPr sz="1100">
+              <a:rPr sz="1100" dirty="0">
                 <a:solidFill>
                   <a:srgbClr val="9CDCFE"/>
                 </a:solidFill>
@@ -17287,7 +17757,7 @@
               <a:t>bar</a:t>
             </a:r>
             <a:r>
-              <a:rPr sz="1100">
+              <a:rPr sz="1100" dirty="0">
                 <a:solidFill>
                   <a:srgbClr val="569CD6"/>
                 </a:solidFill>
@@ -17296,7 +17766,7 @@
               <a:t>}</a:t>
             </a:r>
             <a:r>
-              <a:rPr sz="1100">
+              <a:rPr sz="1100" dirty="0">
                 <a:solidFill>
                   <a:srgbClr val="CE9178"/>
                 </a:solidFill>
@@ -17310,7 +17780,7 @@
               <a:buNone/>
             </a:pPr>
             <a:r>
-              <a:rPr sz="1100">
+              <a:rPr sz="1100" dirty="0">
                 <a:solidFill>
                   <a:srgbClr val="8A8A9A"/>
                 </a:solidFill>
@@ -17319,7 +17789,7 @@
               <a:t> 47 </a:t>
             </a:r>
             <a:r>
-              <a:rPr sz="1100">
+              <a:rPr sz="1100" dirty="0">
                 <a:solidFill>
                   <a:srgbClr val="9CDCFE"/>
                 </a:solidFill>
@@ -17328,7 +17798,7 @@
               <a:t>con</a:t>
             </a:r>
             <a:r>
-              <a:rPr sz="1100">
+              <a:rPr sz="1100" dirty="0">
                 <a:solidFill>
                   <a:schemeClr val="tx2"/>
                 </a:solidFill>
@@ -17337,7 +17807,7 @@
               <a:t> = </a:t>
             </a:r>
             <a:r>
-              <a:rPr sz="1100">
+              <a:rPr sz="1100" dirty="0" err="1">
                 <a:solidFill>
                   <a:srgbClr val="9CDCFE"/>
                 </a:solidFill>
@@ -17346,7 +17816,7 @@
               <a:t>helpers</a:t>
             </a:r>
             <a:r>
-              <a:rPr sz="1100">
+              <a:rPr sz="1100" dirty="0" err="1">
                 <a:solidFill>
                   <a:schemeClr val="tx2"/>
                 </a:solidFill>
@@ -17355,7 +17825,7 @@
               <a:t>.</a:t>
             </a:r>
             <a:r>
-              <a:rPr sz="1100">
+              <a:rPr sz="1100" dirty="0" err="1">
                 <a:solidFill>
                   <a:srgbClr val="9CDCFE"/>
                 </a:solidFill>
@@ -17364,7 +17834,7 @@
               <a:t>db_sqlite</a:t>
             </a:r>
             <a:r>
-              <a:rPr sz="1100">
+              <a:rPr sz="1100" dirty="0" err="1">
                 <a:solidFill>
                   <a:schemeClr val="tx2"/>
                 </a:solidFill>
@@ -17373,7 +17843,7 @@
               <a:t>.</a:t>
             </a:r>
             <a:r>
-              <a:rPr sz="1100">
+              <a:rPr sz="1100" dirty="0" err="1">
                 <a:solidFill>
                   <a:srgbClr val="DCDCAA"/>
                 </a:solidFill>
@@ -17382,7 +17852,7 @@
               <a:t>get_connection</a:t>
             </a:r>
             <a:r>
-              <a:rPr sz="1100">
+              <a:rPr sz="1100" dirty="0">
                 <a:solidFill>
                   <a:schemeClr val="tx2"/>
                 </a:solidFill>
@@ -17396,7 +17866,7 @@
               <a:buNone/>
             </a:pPr>
             <a:r>
-              <a:rPr sz="1100">
+              <a:rPr sz="1100" dirty="0">
                 <a:solidFill>
                   <a:srgbClr val="8A8A9A"/>
                 </a:solidFill>
@@ -17405,7 +17875,7 @@
               <a:t> 48 </a:t>
             </a:r>
             <a:r>
-              <a:rPr sz="1100">
+              <a:rPr sz="1100" dirty="0">
                 <a:solidFill>
                   <a:srgbClr val="9CDCFE"/>
                 </a:solidFill>
@@ -17414,7 +17884,7 @@
               <a:t>cur</a:t>
             </a:r>
             <a:r>
-              <a:rPr sz="1100">
+              <a:rPr sz="1100" dirty="0">
                 <a:solidFill>
                   <a:schemeClr val="tx2"/>
                 </a:solidFill>
@@ -17423,7 +17893,7 @@
               <a:t> = </a:t>
             </a:r>
             <a:r>
-              <a:rPr sz="1100">
+              <a:rPr sz="1100" dirty="0" err="1">
                 <a:solidFill>
                   <a:srgbClr val="9CDCFE"/>
                 </a:solidFill>
@@ -17432,7 +17902,7 @@
               <a:t>con</a:t>
             </a:r>
             <a:r>
-              <a:rPr sz="1100">
+              <a:rPr sz="1100" dirty="0" err="1">
                 <a:solidFill>
                   <a:schemeClr val="tx2"/>
                 </a:solidFill>
@@ -17441,7 +17911,7 @@
               <a:t>.</a:t>
             </a:r>
             <a:r>
-              <a:rPr sz="1100">
+              <a:rPr sz="1100" dirty="0" err="1">
                 <a:solidFill>
                   <a:srgbClr val="DCDCAA"/>
                 </a:solidFill>
@@ -17450,7 +17920,7 @@
               <a:t>cursor</a:t>
             </a:r>
             <a:r>
-              <a:rPr sz="1100">
+              <a:rPr sz="1100" dirty="0">
                 <a:solidFill>
                   <a:schemeClr val="tx2"/>
                 </a:solidFill>
@@ -17464,7 +17934,7 @@
               <a:buNone/>
             </a:pPr>
             <a:r>
-              <a:rPr sz="1100">
+              <a:rPr sz="1100" dirty="0">
                 <a:solidFill>
                   <a:srgbClr val="8A8A9A"/>
                 </a:solidFill>
@@ -17473,7 +17943,7 @@
               <a:t> 49 </a:t>
             </a:r>
             <a:r>
-              <a:rPr sz="1100">
+              <a:rPr sz="1100" dirty="0" err="1">
                 <a:solidFill>
                   <a:srgbClr val="9CDCFE"/>
                 </a:solidFill>
@@ -17482,7 +17952,7 @@
               <a:t>cur</a:t>
             </a:r>
             <a:r>
-              <a:rPr sz="1100">
+              <a:rPr sz="1100" dirty="0" err="1">
                 <a:solidFill>
                   <a:schemeClr val="tx2"/>
                 </a:solidFill>
@@ -17491,7 +17961,7 @@
               <a:t>.</a:t>
             </a:r>
             <a:r>
-              <a:rPr sz="1100">
+              <a:rPr sz="1100" dirty="0" err="1">
                 <a:solidFill>
                   <a:srgbClr val="DCDCAA"/>
                 </a:solidFill>
@@ -17500,7 +17970,7 @@
               <a:t>execute</a:t>
             </a:r>
             <a:r>
-              <a:rPr sz="1100">
+              <a:rPr sz="1100" dirty="0">
                 <a:solidFill>
                   <a:schemeClr val="tx2"/>
                 </a:solidFill>
@@ -17509,7 +17979,7 @@
               <a:t>(</a:t>
             </a:r>
             <a:r>
-              <a:rPr sz="1100">
+              <a:rPr sz="1100" dirty="0" err="1">
                 <a:solidFill>
                   <a:srgbClr val="9CDCFE"/>
                 </a:solidFill>
@@ -17518,7 +17988,7 @@
               <a:t>sql</a:t>
             </a:r>
             <a:r>
-              <a:rPr sz="1100">
+              <a:rPr sz="1100" dirty="0">
                 <a:solidFill>
                   <a:schemeClr val="tx2"/>
                 </a:solidFill>
@@ -17630,7 +18100,7 @@
           <a:p>
             <a:pPr algn="ctr"/>
             <a:r>
-              <a:rPr sz="4000" b="1" dirty="0">
+              <a:rPr sz="4000" dirty="0">
                 <a:solidFill>
                   <a:schemeClr val="tx2"/>
                 </a:solidFill>
@@ -17759,7 +18229,7 @@
           <a:lstStyle/>
           <a:p>
             <a:r>
-              <a:rPr sz="1600" b="1" dirty="0">
+              <a:rPr sz="1600" dirty="0">
                 <a:solidFill>
                   <a:schemeClr val="tx2"/>
                 </a:solidFill>
@@ -17850,7 +18320,7 @@
           <a:lstStyle/>
           <a:p>
             <a:r>
-              <a:rPr sz="1600" b="1">
+              <a:rPr sz="1600" dirty="0">
                 <a:solidFill>
                   <a:schemeClr val="tx2"/>
                 </a:solidFill>
@@ -17941,7 +18411,7 @@
           <a:lstStyle/>
           <a:p>
             <a:r>
-              <a:rPr sz="1600" b="1">
+              <a:rPr sz="1600" dirty="0">
                 <a:solidFill>
                   <a:schemeClr val="tx2"/>
                 </a:solidFill>
@@ -18032,7 +18502,7 @@
           <a:lstStyle/>
           <a:p>
             <a:r>
-              <a:rPr sz="1600" b="1">
+              <a:rPr sz="1600" dirty="0">
                 <a:solidFill>
                   <a:schemeClr val="tx2"/>
                 </a:solidFill>
@@ -18123,7 +18593,7 @@
           <a:lstStyle/>
           <a:p>
             <a:r>
-              <a:rPr sz="1600" b="1">
+              <a:rPr sz="1600" dirty="0">
                 <a:solidFill>
                   <a:schemeClr val="tx2"/>
                 </a:solidFill>
@@ -18214,7 +18684,7 @@
           <a:lstStyle/>
           <a:p>
             <a:r>
-              <a:rPr sz="1600" b="1">
+              <a:rPr sz="1600" dirty="0">
                 <a:solidFill>
                   <a:schemeClr val="tx2"/>
                 </a:solidFill>
@@ -18280,7 +18750,7 @@
         <p:spPr>
           <a:xfrm>
             <a:off x="319251" y="700000"/>
-            <a:ext cx="6014545" cy="509712"/>
+            <a:ext cx="6014545" cy="523220"/>
           </a:xfrm>
           <a:prstGeom prst="rect">
             <a:avLst/>
@@ -18294,10 +18764,11 @@
           <a:lstStyle/>
           <a:p>
             <a:r>
-              <a:rPr sz="1400" b="1">
+              <a:rPr sz="1400" dirty="0">
                 <a:solidFill>
                   <a:srgbClr val="28285E"/>
                 </a:solidFill>
+                <a:latin typeface="Fira Sans" panose="020B0503050000020004" pitchFamily="34" charset="0"/>
               </a:rPr>
               <a:t>The same rule fires here, because the query text is an f-string. The value travels as a parameter.</a:t>
             </a:r>
@@ -18313,7 +18784,7 @@
         <p:spPr>
           <a:xfrm>
             <a:off x="319251" y="1439712"/>
-            <a:ext cx="6014545" cy="200000"/>
+            <a:ext cx="4595810" cy="184666"/>
           </a:xfrm>
           <a:prstGeom prst="rect">
             <a:avLst/>
@@ -18327,10 +18798,11 @@
           <a:lstStyle/>
           <a:p>
             <a:r>
-              <a:rPr sz="1200" b="1">
+              <a:rPr sz="1200" dirty="0">
                 <a:solidFill>
                   <a:srgbClr val="28285E"/>
                 </a:solidFill>
+                <a:latin typeface="Fira Sans" panose="020B0503050000020004" pitchFamily="34" charset="0"/>
               </a:rPr>
               <a:t>BenchmarkTest00011.py, BenchmarkTest00011_post, lines 41 to 50</a:t>
             </a:r>
@@ -18547,7 +19019,7 @@
         <p:spPr>
           <a:xfrm>
             <a:off x="469251" y="2029712"/>
-            <a:ext cx="5714545" cy="1474000"/>
+            <a:ext cx="4927631" cy="1354217"/>
           </a:xfrm>
           <a:prstGeom prst="rect">
             <a:avLst/>
@@ -18564,7 +19036,7 @@
               <a:buNone/>
             </a:pPr>
             <a:r>
-              <a:rPr sz="1100">
+              <a:rPr sz="1100" dirty="0">
                 <a:solidFill>
                   <a:srgbClr val="8A8A9A"/>
                 </a:solidFill>
@@ -18573,7 +19045,7 @@
               <a:t> 41 </a:t>
             </a:r>
             <a:r>
-              <a:rPr sz="1100">
+              <a:rPr sz="1100" dirty="0">
                 <a:solidFill>
                   <a:srgbClr val="9CDCFE"/>
                 </a:solidFill>
@@ -18582,7 +19054,7 @@
               <a:t>bar</a:t>
             </a:r>
             <a:r>
-              <a:rPr sz="1100">
+              <a:rPr sz="1100" dirty="0">
                 <a:solidFill>
                   <a:schemeClr val="tx2"/>
                 </a:solidFill>
@@ -18591,7 +19063,7 @@
               <a:t> = </a:t>
             </a:r>
             <a:r>
-              <a:rPr sz="1100">
+              <a:rPr sz="1100" dirty="0">
                 <a:solidFill>
                   <a:srgbClr val="CE9178"/>
                 </a:solidFill>
@@ -18605,7 +19077,7 @@
               <a:buNone/>
             </a:pPr>
             <a:r>
-              <a:rPr sz="1100">
+              <a:rPr sz="1100" dirty="0">
                 <a:solidFill>
                   <a:srgbClr val="8A8A9A"/>
                 </a:solidFill>
@@ -18614,7 +19086,7 @@
               <a:t> 42 </a:t>
             </a:r>
             <a:r>
-              <a:rPr sz="1100">
+              <a:rPr sz="1100" dirty="0">
                 <a:solidFill>
                   <a:srgbClr val="C586C0"/>
                 </a:solidFill>
@@ -18623,7 +19095,7 @@
               <a:t>if</a:t>
             </a:r>
             <a:r>
-              <a:rPr sz="1100">
+              <a:rPr sz="1100" dirty="0">
                 <a:solidFill>
                   <a:schemeClr val="tx2"/>
                 </a:solidFill>
@@ -18632,7 +19104,7 @@
               <a:t> </a:t>
             </a:r>
             <a:r>
-              <a:rPr sz="1100">
+              <a:rPr sz="1100" dirty="0">
                 <a:solidFill>
                   <a:srgbClr val="CE9178"/>
                 </a:solidFill>
@@ -18641,7 +19113,7 @@
               <a:t>'should'</a:t>
             </a:r>
             <a:r>
-              <a:rPr sz="1100">
+              <a:rPr sz="1100" dirty="0">
                 <a:solidFill>
                   <a:schemeClr val="tx2"/>
                 </a:solidFill>
@@ -18650,7 +19122,7 @@
               <a:t> </a:t>
             </a:r>
             <a:r>
-              <a:rPr sz="1100">
+              <a:rPr sz="1100" dirty="0">
                 <a:solidFill>
                   <a:srgbClr val="569CD6"/>
                 </a:solidFill>
@@ -18659,7 +19131,7 @@
               <a:t>in</a:t>
             </a:r>
             <a:r>
-              <a:rPr sz="1100">
+              <a:rPr sz="1100" dirty="0">
                 <a:solidFill>
                   <a:schemeClr val="tx2"/>
                 </a:solidFill>
@@ -18668,7 +19140,7 @@
               <a:t> </a:t>
             </a:r>
             <a:r>
-              <a:rPr sz="1100">
+              <a:rPr sz="1100" dirty="0">
                 <a:solidFill>
                   <a:srgbClr val="9CDCFE"/>
                 </a:solidFill>
@@ -18677,7 +19149,7 @@
               <a:t>bar</a:t>
             </a:r>
             <a:r>
-              <a:rPr sz="1100">
+              <a:rPr sz="1100" dirty="0">
                 <a:solidFill>
                   <a:schemeClr val="tx2"/>
                 </a:solidFill>
@@ -18691,7 +19163,7 @@
               <a:buNone/>
             </a:pPr>
             <a:r>
-              <a:rPr sz="1100">
+              <a:rPr sz="1100" dirty="0">
                 <a:solidFill>
                   <a:srgbClr val="8A8A9A"/>
                 </a:solidFill>
@@ -18700,7 +19172,7 @@
               <a:t> 43 </a:t>
             </a:r>
             <a:r>
-              <a:rPr sz="1100">
+              <a:rPr sz="1100" dirty="0">
                 <a:solidFill>
                   <a:schemeClr val="tx2"/>
                 </a:solidFill>
@@ -18709,7 +19181,7 @@
               <a:t>    </a:t>
             </a:r>
             <a:r>
-              <a:rPr sz="1100">
+              <a:rPr sz="1100" dirty="0">
                 <a:solidFill>
                   <a:srgbClr val="9CDCFE"/>
                 </a:solidFill>
@@ -18718,7 +19190,7 @@
               <a:t>bar</a:t>
             </a:r>
             <a:r>
-              <a:rPr sz="1100">
+              <a:rPr sz="1100" dirty="0">
                 <a:solidFill>
                   <a:schemeClr val="tx2"/>
                 </a:solidFill>
@@ -18727,7 +19199,7 @@
               <a:t> = </a:t>
             </a:r>
             <a:r>
-              <a:rPr sz="1100">
+              <a:rPr sz="1100" dirty="0">
                 <a:solidFill>
                   <a:srgbClr val="9CDCFE"/>
                 </a:solidFill>
@@ -18741,7 +19213,7 @@
               <a:buNone/>
             </a:pPr>
             <a:r>
-              <a:rPr sz="1100">
+              <a:rPr sz="1100" dirty="0">
                 <a:solidFill>
                   <a:srgbClr val="8A8A9A"/>
                 </a:solidFill>
@@ -18750,7 +19222,7 @@
               <a:t> 47 </a:t>
             </a:r>
             <a:r>
-              <a:rPr sz="1100">
+              <a:rPr sz="1100" dirty="0" err="1">
                 <a:solidFill>
                   <a:srgbClr val="9CDCFE"/>
                 </a:solidFill>
@@ -18759,7 +19231,7 @@
               <a:t>sql</a:t>
             </a:r>
             <a:r>
-              <a:rPr sz="1100">
+              <a:rPr sz="1100" dirty="0">
                 <a:solidFill>
                   <a:schemeClr val="tx2"/>
                 </a:solidFill>
@@ -18768,7 +19240,7 @@
               <a:t> = </a:t>
             </a:r>
             <a:r>
-              <a:rPr sz="1100">
+              <a:rPr sz="1100" dirty="0" err="1">
                 <a:solidFill>
                   <a:srgbClr val="569CD6"/>
                 </a:solidFill>
@@ -18777,13 +19249,22 @@
               <a:t>f</a:t>
             </a:r>
             <a:r>
-              <a:rPr sz="1100">
+              <a:rPr sz="1100" dirty="0" err="1">
                 <a:solidFill>
                   <a:srgbClr val="CE9178"/>
                 </a:solidFill>
                 <a:latin typeface="Maple Mono NF"/>
               </a:rPr>
-              <a:t>'SELECT username from USERS where password = ?'</a:t>
+              <a:t>'SELECT</a:t>
+            </a:r>
+            <a:r>
+              <a:rPr sz="1100" dirty="0">
+                <a:solidFill>
+                  <a:srgbClr val="CE9178"/>
+                </a:solidFill>
+                <a:latin typeface="Maple Mono NF"/>
+              </a:rPr>
+              <a:t> username from USERS where password = ?'</a:t>
             </a:r>
           </a:p>
           <a:p>
@@ -18791,7 +19272,7 @@
               <a:buNone/>
             </a:pPr>
             <a:r>
-              <a:rPr sz="1100">
+              <a:rPr sz="1100" dirty="0">
                 <a:solidFill>
                   <a:srgbClr val="8A8A9A"/>
                 </a:solidFill>
@@ -18800,7 +19281,7 @@
               <a:t> 48 </a:t>
             </a:r>
             <a:r>
-              <a:rPr sz="1100">
+              <a:rPr sz="1100" dirty="0">
                 <a:solidFill>
                   <a:srgbClr val="9CDCFE"/>
                 </a:solidFill>
@@ -18809,7 +19290,7 @@
               <a:t>con</a:t>
             </a:r>
             <a:r>
-              <a:rPr sz="1100">
+              <a:rPr sz="1100" dirty="0">
                 <a:solidFill>
                   <a:schemeClr val="tx2"/>
                 </a:solidFill>
@@ -18818,7 +19299,7 @@
               <a:t> = </a:t>
             </a:r>
             <a:r>
-              <a:rPr sz="1100">
+              <a:rPr sz="1100" dirty="0" err="1">
                 <a:solidFill>
                   <a:srgbClr val="9CDCFE"/>
                 </a:solidFill>
@@ -18827,7 +19308,7 @@
               <a:t>helpers</a:t>
             </a:r>
             <a:r>
-              <a:rPr sz="1100">
+              <a:rPr sz="1100" dirty="0" err="1">
                 <a:solidFill>
                   <a:schemeClr val="tx2"/>
                 </a:solidFill>
@@ -18836,7 +19317,7 @@
               <a:t>.</a:t>
             </a:r>
             <a:r>
-              <a:rPr sz="1100">
+              <a:rPr sz="1100" dirty="0" err="1">
                 <a:solidFill>
                   <a:srgbClr val="9CDCFE"/>
                 </a:solidFill>
@@ -18845,7 +19326,7 @@
               <a:t>db_sqlite</a:t>
             </a:r>
             <a:r>
-              <a:rPr sz="1100">
+              <a:rPr sz="1100" dirty="0" err="1">
                 <a:solidFill>
                   <a:schemeClr val="tx2"/>
                 </a:solidFill>
@@ -18854,7 +19335,7 @@
               <a:t>.</a:t>
             </a:r>
             <a:r>
-              <a:rPr sz="1100">
+              <a:rPr sz="1100" dirty="0" err="1">
                 <a:solidFill>
                   <a:srgbClr val="DCDCAA"/>
                 </a:solidFill>
@@ -18863,7 +19344,7 @@
               <a:t>get_connection</a:t>
             </a:r>
             <a:r>
-              <a:rPr sz="1100">
+              <a:rPr sz="1100" dirty="0">
                 <a:solidFill>
                   <a:schemeClr val="tx2"/>
                 </a:solidFill>
@@ -18877,7 +19358,7 @@
               <a:buNone/>
             </a:pPr>
             <a:r>
-              <a:rPr sz="1100">
+              <a:rPr sz="1100" dirty="0">
                 <a:solidFill>
                   <a:srgbClr val="8A8A9A"/>
                 </a:solidFill>
@@ -18886,7 +19367,7 @@
               <a:t> 49 </a:t>
             </a:r>
             <a:r>
-              <a:rPr sz="1100">
+              <a:rPr sz="1100" dirty="0">
                 <a:solidFill>
                   <a:srgbClr val="9CDCFE"/>
                 </a:solidFill>
@@ -18895,7 +19376,7 @@
               <a:t>cur</a:t>
             </a:r>
             <a:r>
-              <a:rPr sz="1100">
+              <a:rPr sz="1100" dirty="0">
                 <a:solidFill>
                   <a:schemeClr val="tx2"/>
                 </a:solidFill>
@@ -18904,7 +19385,7 @@
               <a:t> = </a:t>
             </a:r>
             <a:r>
-              <a:rPr sz="1100">
+              <a:rPr sz="1100" dirty="0" err="1">
                 <a:solidFill>
                   <a:srgbClr val="9CDCFE"/>
                 </a:solidFill>
@@ -18913,7 +19394,7 @@
               <a:t>con</a:t>
             </a:r>
             <a:r>
-              <a:rPr sz="1100">
+              <a:rPr sz="1100" dirty="0" err="1">
                 <a:solidFill>
                   <a:schemeClr val="tx2"/>
                 </a:solidFill>
@@ -18922,7 +19403,7 @@
               <a:t>.</a:t>
             </a:r>
             <a:r>
-              <a:rPr sz="1100">
+              <a:rPr sz="1100" dirty="0" err="1">
                 <a:solidFill>
                   <a:srgbClr val="DCDCAA"/>
                 </a:solidFill>
@@ -18931,7 +19412,7 @@
               <a:t>cursor</a:t>
             </a:r>
             <a:r>
-              <a:rPr sz="1100">
+              <a:rPr sz="1100" dirty="0">
                 <a:solidFill>
                   <a:schemeClr val="tx2"/>
                 </a:solidFill>
@@ -18945,7 +19426,7 @@
               <a:buNone/>
             </a:pPr>
             <a:r>
-              <a:rPr sz="1100">
+              <a:rPr sz="1100" dirty="0">
                 <a:solidFill>
                   <a:srgbClr val="8A8A9A"/>
                 </a:solidFill>
@@ -18954,7 +19435,7 @@
               <a:t>    </a:t>
             </a:r>
             <a:r>
-              <a:rPr sz="1100">
+              <a:rPr sz="1100" dirty="0">
                 <a:solidFill>
                   <a:schemeClr val="accent4"/>
                 </a:solidFill>
@@ -18968,7 +19449,7 @@
               <a:buNone/>
             </a:pPr>
             <a:r>
-              <a:rPr sz="1100">
+              <a:rPr sz="1100" dirty="0">
                 <a:solidFill>
                   <a:srgbClr val="8A8A9A"/>
                 </a:solidFill>
@@ -18977,7 +19458,7 @@
               <a:t> 50 </a:t>
             </a:r>
             <a:r>
-              <a:rPr sz="1100">
+              <a:rPr sz="1100" dirty="0" err="1">
                 <a:solidFill>
                   <a:srgbClr val="9CDCFE"/>
                 </a:solidFill>
@@ -18986,7 +19467,7 @@
               <a:t>cur</a:t>
             </a:r>
             <a:r>
-              <a:rPr sz="1100">
+              <a:rPr sz="1100" dirty="0" err="1">
                 <a:solidFill>
                   <a:schemeClr val="tx2"/>
                 </a:solidFill>
@@ -18995,7 +19476,7 @@
               <a:t>.</a:t>
             </a:r>
             <a:r>
-              <a:rPr sz="1100">
+              <a:rPr sz="1100" dirty="0" err="1">
                 <a:solidFill>
                   <a:srgbClr val="DCDCAA"/>
                 </a:solidFill>
@@ -19004,7 +19485,7 @@
               <a:t>execute</a:t>
             </a:r>
             <a:r>
-              <a:rPr sz="1100">
+              <a:rPr sz="1100" dirty="0">
                 <a:solidFill>
                   <a:schemeClr val="tx2"/>
                 </a:solidFill>
@@ -19013,7 +19494,7 @@
               <a:t>(</a:t>
             </a:r>
             <a:r>
-              <a:rPr sz="1100">
+              <a:rPr sz="1100" dirty="0" err="1">
                 <a:solidFill>
                   <a:srgbClr val="9CDCFE"/>
                 </a:solidFill>
@@ -19022,7 +19503,7 @@
               <a:t>sql</a:t>
             </a:r>
             <a:r>
-              <a:rPr sz="1100">
+              <a:rPr sz="1100" dirty="0">
                 <a:solidFill>
                   <a:schemeClr val="tx2"/>
                 </a:solidFill>
@@ -19031,7 +19512,7 @@
               <a:t>, (</a:t>
             </a:r>
             <a:r>
-              <a:rPr sz="1100">
+              <a:rPr sz="1100" dirty="0">
                 <a:solidFill>
                   <a:srgbClr val="9CDCFE"/>
                 </a:solidFill>
@@ -19040,7 +19521,7 @@
               <a:t>bar</a:t>
             </a:r>
             <a:r>
-              <a:rPr sz="1100">
+              <a:rPr sz="1100" dirty="0">
                 <a:solidFill>
                   <a:schemeClr val="tx2"/>
                 </a:solidFill>
@@ -19158,7 +19639,7 @@
         <p:spPr>
           <a:xfrm>
             <a:off x="319251" y="700000"/>
-            <a:ext cx="6014545" cy="509712"/>
+            <a:ext cx="6014545" cy="523220"/>
           </a:xfrm>
           <a:prstGeom prst="rect">
             <a:avLst/>
@@ -19172,10 +19653,11 @@
           <a:lstStyle/>
           <a:p>
             <a:r>
-              <a:rPr sz="1400" b="1">
+              <a:rPr sz="1400" dirty="0">
                 <a:solidFill>
                   <a:srgbClr val="28285E"/>
                 </a:solidFill>
+                <a:latin typeface="Fira Sans" panose="020B0503050000020004" pitchFamily="34" charset="0"/>
               </a:rPr>
               <a:t>The cookie value passes through a config object and reaches exec unchanged.</a:t>
             </a:r>
@@ -19191,7 +19673,7 @@
         <p:spPr>
           <a:xfrm>
             <a:off x="319251" y="1439712"/>
-            <a:ext cx="6014545" cy="200000"/>
+            <a:ext cx="4619854" cy="184666"/>
           </a:xfrm>
           <a:prstGeom prst="rect">
             <a:avLst/>
@@ -19205,10 +19687,11 @@
           <a:lstStyle/>
           <a:p>
             <a:r>
-              <a:rPr sz="1200" b="1">
+              <a:rPr sz="1200" dirty="0">
                 <a:solidFill>
                   <a:srgbClr val="28285E"/>
                 </a:solidFill>
+                <a:latin typeface="Fira Sans" panose="020B0503050000020004" pitchFamily="34" charset="0"/>
               </a:rPr>
               <a:t>BenchmarkTest00074.py, BenchmarkTest00074_post, lines 47 to 55</a:t>
             </a:r>
@@ -19425,7 +19908,7 @@
         <p:spPr>
           <a:xfrm>
             <a:off x="469251" y="2029712"/>
-            <a:ext cx="5714545" cy="1652000"/>
+            <a:ext cx="5692264" cy="1523494"/>
           </a:xfrm>
           <a:prstGeom prst="rect">
             <a:avLst/>
@@ -19442,7 +19925,7 @@
               <a:buNone/>
             </a:pPr>
             <a:r>
-              <a:rPr sz="1100">
+              <a:rPr sz="1100" dirty="0">
                 <a:solidFill>
                   <a:srgbClr val="8A8A9A"/>
                 </a:solidFill>
@@ -19451,7 +19934,7 @@
               <a:t> 47 </a:t>
             </a:r>
             <a:r>
-              <a:rPr sz="1100">
+              <a:rPr sz="1100" dirty="0">
                 <a:solidFill>
                   <a:srgbClr val="9CDCFE"/>
                 </a:solidFill>
@@ -19460,7 +19943,7 @@
               <a:t>conf90091</a:t>
             </a:r>
             <a:r>
-              <a:rPr sz="1100">
+              <a:rPr sz="1100" dirty="0">
                 <a:solidFill>
                   <a:schemeClr val="tx2"/>
                 </a:solidFill>
@@ -19469,7 +19952,7 @@
               <a:t>.</a:t>
             </a:r>
             <a:r>
-              <a:rPr sz="1100">
+              <a:rPr sz="1100" dirty="0">
                 <a:solidFill>
                   <a:srgbClr val="DCDCAA"/>
                 </a:solidFill>
@@ -19478,7 +19961,7 @@
               <a:t>set</a:t>
             </a:r>
             <a:r>
-              <a:rPr sz="1100">
+              <a:rPr sz="1100" dirty="0">
                 <a:solidFill>
                   <a:schemeClr val="tx2"/>
                 </a:solidFill>
@@ -19487,7 +19970,7 @@
               <a:t>(</a:t>
             </a:r>
             <a:r>
-              <a:rPr sz="1100">
+              <a:rPr sz="1100" dirty="0">
                 <a:solidFill>
                   <a:srgbClr val="CE9178"/>
                 </a:solidFill>
@@ -19496,7 +19979,7 @@
               <a:t>'section90091'</a:t>
             </a:r>
             <a:r>
-              <a:rPr sz="1100">
+              <a:rPr sz="1100" dirty="0">
                 <a:solidFill>
                   <a:schemeClr val="tx2"/>
                 </a:solidFill>
@@ -19505,7 +19988,7 @@
               <a:t>, </a:t>
             </a:r>
             <a:r>
-              <a:rPr sz="1100">
+              <a:rPr sz="1100" dirty="0">
                 <a:solidFill>
                   <a:srgbClr val="CE9178"/>
                 </a:solidFill>
@@ -19514,7 +19997,7 @@
               <a:t>'keyB-90091'</a:t>
             </a:r>
             <a:r>
-              <a:rPr sz="1100">
+              <a:rPr sz="1100" dirty="0">
                 <a:solidFill>
                   <a:schemeClr val="tx2"/>
                 </a:solidFill>
@@ -19523,7 +20006,7 @@
               <a:t>, </a:t>
             </a:r>
             <a:r>
-              <a:rPr sz="1100">
+              <a:rPr sz="1100" dirty="0">
                 <a:solidFill>
                   <a:srgbClr val="9CDCFE"/>
                 </a:solidFill>
@@ -19532,7 +20015,7 @@
               <a:t>param</a:t>
             </a:r>
             <a:r>
-              <a:rPr sz="1100">
+              <a:rPr sz="1100" dirty="0">
                 <a:solidFill>
                   <a:schemeClr val="tx2"/>
                 </a:solidFill>
@@ -19546,7 +20029,7 @@
               <a:buNone/>
             </a:pPr>
             <a:r>
-              <a:rPr sz="1100">
+              <a:rPr sz="1100" dirty="0">
                 <a:solidFill>
                   <a:srgbClr val="8A8A9A"/>
                 </a:solidFill>
@@ -19555,7 +20038,7 @@
               <a:t> 48 </a:t>
             </a:r>
             <a:r>
-              <a:rPr sz="1100">
+              <a:rPr sz="1100" dirty="0">
                 <a:solidFill>
                   <a:srgbClr val="9CDCFE"/>
                 </a:solidFill>
@@ -19564,7 +20047,7 @@
               <a:t>bar</a:t>
             </a:r>
             <a:r>
-              <a:rPr sz="1100">
+              <a:rPr sz="1100" dirty="0">
                 <a:solidFill>
                   <a:schemeClr val="tx2"/>
                 </a:solidFill>
@@ -19573,7 +20056,7 @@
               <a:t> = </a:t>
             </a:r>
             <a:r>
-              <a:rPr sz="1100">
+              <a:rPr sz="1100" dirty="0">
                 <a:solidFill>
                   <a:srgbClr val="9CDCFE"/>
                 </a:solidFill>
@@ -19582,7 +20065,7 @@
               <a:t>conf90091</a:t>
             </a:r>
             <a:r>
-              <a:rPr sz="1100">
+              <a:rPr sz="1100" dirty="0">
                 <a:solidFill>
                   <a:schemeClr val="tx2"/>
                 </a:solidFill>
@@ -19591,7 +20074,7 @@
               <a:t>.</a:t>
             </a:r>
             <a:r>
-              <a:rPr sz="1100">
+              <a:rPr sz="1100" dirty="0">
                 <a:solidFill>
                   <a:srgbClr val="DCDCAA"/>
                 </a:solidFill>
@@ -19600,7 +20083,7 @@
               <a:t>get</a:t>
             </a:r>
             <a:r>
-              <a:rPr sz="1100">
+              <a:rPr sz="1100" dirty="0">
                 <a:solidFill>
                   <a:schemeClr val="tx2"/>
                 </a:solidFill>
@@ -19609,7 +20092,7 @@
               <a:t>(</a:t>
             </a:r>
             <a:r>
-              <a:rPr sz="1100">
+              <a:rPr sz="1100" dirty="0">
                 <a:solidFill>
                   <a:srgbClr val="CE9178"/>
                 </a:solidFill>
@@ -19618,7 +20101,7 @@
               <a:t>'section90091'</a:t>
             </a:r>
             <a:r>
-              <a:rPr sz="1100">
+              <a:rPr sz="1100" dirty="0">
                 <a:solidFill>
                   <a:schemeClr val="tx2"/>
                 </a:solidFill>
@@ -19627,7 +20110,7 @@
               <a:t>, </a:t>
             </a:r>
             <a:r>
-              <a:rPr sz="1100">
+              <a:rPr sz="1100" dirty="0">
                 <a:solidFill>
                   <a:srgbClr val="CE9178"/>
                 </a:solidFill>
@@ -19636,7 +20119,7 @@
               <a:t>'keyB-90091'</a:t>
             </a:r>
             <a:r>
-              <a:rPr sz="1100">
+              <a:rPr sz="1100" dirty="0">
                 <a:solidFill>
                   <a:schemeClr val="tx2"/>
                 </a:solidFill>
@@ -19650,7 +20133,7 @@
               <a:buNone/>
             </a:pPr>
             <a:r>
-              <a:rPr sz="1100">
+              <a:rPr sz="1100" dirty="0">
                 <a:solidFill>
                   <a:srgbClr val="8A8A9A"/>
                 </a:solidFill>
@@ -19659,7 +20142,7 @@
               <a:t> 50 </a:t>
             </a:r>
             <a:r>
-              <a:rPr sz="1100">
+              <a:rPr sz="1100" dirty="0">
                 <a:solidFill>
                   <a:srgbClr val="C586C0"/>
                 </a:solidFill>
@@ -19668,7 +20151,7 @@
               <a:t>try</a:t>
             </a:r>
             <a:r>
-              <a:rPr sz="1100">
+              <a:rPr sz="1100" dirty="0">
                 <a:solidFill>
                   <a:schemeClr val="tx2"/>
                 </a:solidFill>
@@ -19682,7 +20165,7 @@
               <a:buNone/>
             </a:pPr>
             <a:r>
-              <a:rPr sz="1100">
+              <a:rPr sz="1100" dirty="0">
                 <a:solidFill>
                   <a:srgbClr val="8A8A9A"/>
                 </a:solidFill>
@@ -19691,7 +20174,7 @@
               <a:t>    </a:t>
             </a:r>
             <a:r>
-              <a:rPr sz="1100">
+              <a:rPr sz="1100" dirty="0">
                 <a:solidFill>
                   <a:schemeClr val="accent4"/>
                 </a:solidFill>
@@ -19705,7 +20188,7 @@
               <a:buNone/>
             </a:pPr>
             <a:r>
-              <a:rPr sz="1100">
+              <a:rPr sz="1100" dirty="0">
                 <a:solidFill>
                   <a:srgbClr val="8A8A9A"/>
                 </a:solidFill>
@@ -19714,7 +20197,7 @@
               <a:t> 51 </a:t>
             </a:r>
             <a:r>
-              <a:rPr sz="1100">
+              <a:rPr sz="1100" dirty="0">
                 <a:solidFill>
                   <a:schemeClr val="tx2"/>
                 </a:solidFill>
@@ -19723,7 +20206,7 @@
               <a:t>    </a:t>
             </a:r>
             <a:r>
-              <a:rPr sz="1100">
+              <a:rPr sz="1100" dirty="0">
                 <a:solidFill>
                   <a:srgbClr val="DCDCAA"/>
                 </a:solidFill>
@@ -19732,7 +20215,7 @@
               <a:t>exec</a:t>
             </a:r>
             <a:r>
-              <a:rPr sz="1100">
+              <a:rPr sz="1100" dirty="0">
                 <a:solidFill>
                   <a:schemeClr val="tx2"/>
                 </a:solidFill>
@@ -19741,7 +20224,7 @@
               <a:t>(</a:t>
             </a:r>
             <a:r>
-              <a:rPr sz="1100">
+              <a:rPr sz="1100" dirty="0">
                 <a:solidFill>
                   <a:srgbClr val="9CDCFE"/>
                 </a:solidFill>
@@ -19750,7 +20233,7 @@
               <a:t>bar</a:t>
             </a:r>
             <a:r>
-              <a:rPr sz="1100">
+              <a:rPr sz="1100" dirty="0">
                 <a:solidFill>
                   <a:schemeClr val="tx2"/>
                 </a:solidFill>
@@ -19764,7 +20247,7 @@
               <a:buNone/>
             </a:pPr>
             <a:r>
-              <a:rPr sz="1100">
+              <a:rPr sz="1100" dirty="0">
                 <a:solidFill>
                   <a:srgbClr val="8A8A9A"/>
                 </a:solidFill>
@@ -19773,7 +20256,7 @@
               <a:t> 52 </a:t>
             </a:r>
             <a:r>
-              <a:rPr sz="1100">
+              <a:rPr sz="1100" dirty="0">
                 <a:solidFill>
                   <a:srgbClr val="C586C0"/>
                 </a:solidFill>
@@ -19782,7 +20265,7 @@
               <a:t>except</a:t>
             </a:r>
             <a:r>
-              <a:rPr sz="1100">
+              <a:rPr sz="1100" dirty="0">
                 <a:solidFill>
                   <a:schemeClr val="tx2"/>
                 </a:solidFill>
@@ -19796,7 +20279,7 @@
               <a:buNone/>
             </a:pPr>
             <a:r>
-              <a:rPr sz="1100">
+              <a:rPr sz="1100" dirty="0">
                 <a:solidFill>
                   <a:srgbClr val="8A8A9A"/>
                 </a:solidFill>
@@ -19805,7 +20288,7 @@
               <a:t> 53 </a:t>
             </a:r>
             <a:r>
-              <a:rPr sz="1100">
+              <a:rPr sz="1100" dirty="0">
                 <a:solidFill>
                   <a:schemeClr val="tx2"/>
                 </a:solidFill>
@@ -19814,7 +20297,7 @@
               <a:t>    </a:t>
             </a:r>
             <a:r>
-              <a:rPr sz="1100">
+              <a:rPr sz="1100" dirty="0">
                 <a:solidFill>
                   <a:srgbClr val="9CDCFE"/>
                 </a:solidFill>
@@ -19823,7 +20306,7 @@
               <a:t>RESPONSE</a:t>
             </a:r>
             <a:r>
-              <a:rPr sz="1100">
+              <a:rPr sz="1100" dirty="0">
                 <a:solidFill>
                   <a:schemeClr val="tx2"/>
                 </a:solidFill>
@@ -19837,7 +20320,7 @@
               <a:buNone/>
             </a:pPr>
             <a:r>
-              <a:rPr sz="1100">
+              <a:rPr sz="1100" dirty="0">
                 <a:solidFill>
                   <a:srgbClr val="8A8A9A"/>
                 </a:solidFill>
@@ -19846,7 +20329,7 @@
               <a:t> 54 </a:t>
             </a:r>
             <a:r>
-              <a:rPr sz="1100">
+              <a:rPr sz="1100" dirty="0">
                 <a:solidFill>
                   <a:schemeClr val="tx2"/>
                 </a:solidFill>
@@ -19855,7 +20338,7 @@
               <a:t>        </a:t>
             </a:r>
             <a:r>
-              <a:rPr sz="1100">
+              <a:rPr sz="1100" dirty="0" err="1">
                 <a:solidFill>
                   <a:srgbClr val="569CD6"/>
                 </a:solidFill>
@@ -19864,16 +20347,25 @@
               <a:t>f</a:t>
             </a:r>
             <a:r>
-              <a:rPr sz="1100">
+              <a:rPr sz="1100" dirty="0" err="1">
                 <a:solidFill>
                   <a:srgbClr val="CE9178"/>
                 </a:solidFill>
                 <a:latin typeface="Maple Mono NF"/>
               </a:rPr>
-              <a:t>'Error executing statement \'</a:t>
-            </a:r>
-            <a:r>
-              <a:rPr sz="1100">
+              <a:t>'Error</a:t>
+            </a:r>
+            <a:r>
+              <a:rPr sz="1100" dirty="0">
+                <a:solidFill>
+                  <a:srgbClr val="CE9178"/>
+                </a:solidFill>
+                <a:latin typeface="Maple Mono NF"/>
+              </a:rPr>
+              <a:t> executing statement \'</a:t>
+            </a:r>
+            <a:r>
+              <a:rPr sz="1100" dirty="0">
                 <a:solidFill>
                   <a:srgbClr val="569CD6"/>
                 </a:solidFill>
@@ -19882,7 +20374,7 @@
               <a:t>{</a:t>
             </a:r>
             <a:r>
-              <a:rPr sz="1100">
+              <a:rPr sz="1100" dirty="0" err="1">
                 <a:solidFill>
                   <a:srgbClr val="DCDCAA"/>
                 </a:solidFill>
@@ -19891,7 +20383,7 @@
               <a:t>escape_for_html</a:t>
             </a:r>
             <a:r>
-              <a:rPr sz="1100">
+              <a:rPr sz="1100" dirty="0">
                 <a:solidFill>
                   <a:schemeClr val="tx2"/>
                 </a:solidFill>
@@ -19900,7 +20392,7 @@
               <a:t>(</a:t>
             </a:r>
             <a:r>
-              <a:rPr sz="1100">
+              <a:rPr sz="1100" dirty="0">
                 <a:solidFill>
                   <a:srgbClr val="9CDCFE"/>
                 </a:solidFill>
@@ -19909,7 +20401,7 @@
               <a:t>bar</a:t>
             </a:r>
             <a:r>
-              <a:rPr sz="1100">
+              <a:rPr sz="1100" dirty="0">
                 <a:solidFill>
                   <a:schemeClr val="tx2"/>
                 </a:solidFill>
@@ -19918,7 +20410,7 @@
               <a:t>)</a:t>
             </a:r>
             <a:r>
-              <a:rPr sz="1100">
+              <a:rPr sz="1100" dirty="0">
                 <a:solidFill>
                   <a:srgbClr val="569CD6"/>
                 </a:solidFill>
@@ -19927,7 +20419,7 @@
               <a:t>}</a:t>
             </a:r>
             <a:r>
-              <a:rPr sz="1100">
+              <a:rPr sz="1100" dirty="0">
                 <a:solidFill>
                   <a:srgbClr val="CE9178"/>
                 </a:solidFill>
@@ -19941,7 +20433,7 @@
               <a:buNone/>
             </a:pPr>
             <a:r>
-              <a:rPr sz="1100">
+              <a:rPr sz="1100" dirty="0">
                 <a:solidFill>
                   <a:srgbClr val="8A8A9A"/>
                 </a:solidFill>
@@ -19950,7 +20442,7 @@
               <a:t> 55 </a:t>
             </a:r>
             <a:r>
-              <a:rPr sz="1100">
+              <a:rPr sz="1100" dirty="0">
                 <a:solidFill>
                   <a:schemeClr val="tx2"/>
                 </a:solidFill>
@@ -20068,7 +20560,7 @@
         <p:spPr>
           <a:xfrm>
             <a:off x="319251" y="700000"/>
-            <a:ext cx="6014545" cy="509712"/>
+            <a:ext cx="6014545" cy="523220"/>
           </a:xfrm>
           <a:prstGeom prst="rect">
             <a:avLst/>
@@ -20082,10 +20574,11 @@
           <a:lstStyle/>
           <a:p>
             <a:r>
-              <a:rPr sz="1400" b="1">
+              <a:rPr sz="1400" dirty="0">
                 <a:solidFill>
                   <a:srgbClr val="28285E"/>
                 </a:solidFill>
+                <a:latin typeface="Fira Sans" panose="020B0503050000020004" pitchFamily="34" charset="0"/>
               </a:rPr>
               <a:t>The same cookie value reaches eval, but a check admits only a quoted string with no inner quote.</a:t>
             </a:r>
@@ -20101,7 +20594,7 @@
         <p:spPr>
           <a:xfrm>
             <a:off x="319251" y="1439712"/>
-            <a:ext cx="6014545" cy="200000"/>
+            <a:ext cx="4627870" cy="184666"/>
           </a:xfrm>
           <a:prstGeom prst="rect">
             <a:avLst/>
@@ -20115,10 +20608,11 @@
           <a:lstStyle/>
           <a:p>
             <a:r>
-              <a:rPr sz="1200" b="1">
+              <a:rPr sz="1200" dirty="0">
                 <a:solidFill>
                   <a:srgbClr val="28285E"/>
                 </a:solidFill>
+                <a:latin typeface="Fira Sans" panose="020B0503050000020004" pitchFamily="34" charset="0"/>
               </a:rPr>
               <a:t>BenchmarkTest00073.py, BenchmarkTest00073_post, lines 44 to 54</a:t>
             </a:r>
@@ -20335,7 +20829,7 @@
         <p:spPr>
           <a:xfrm>
             <a:off x="469251" y="2029712"/>
-            <a:ext cx="5714545" cy="1182726"/>
+            <a:ext cx="5714545" cy="1077218"/>
           </a:xfrm>
           <a:prstGeom prst="rect">
             <a:avLst/>
@@ -20352,7 +20846,7 @@
               <a:buNone/>
             </a:pPr>
             <a:r>
-              <a:rPr sz="1000">
+              <a:rPr sz="1000" dirty="0">
                 <a:solidFill>
                   <a:srgbClr val="8A8A9A"/>
                 </a:solidFill>
@@ -20361,7 +20855,7 @@
               <a:t> 44 </a:t>
             </a:r>
             <a:r>
-              <a:rPr sz="1000">
+              <a:rPr sz="1000" dirty="0">
                 <a:solidFill>
                   <a:srgbClr val="9CDCFE"/>
                 </a:solidFill>
@@ -20370,7 +20864,7 @@
               <a:t>bar</a:t>
             </a:r>
             <a:r>
-              <a:rPr sz="1000">
+              <a:rPr sz="1000" dirty="0">
                 <a:solidFill>
                   <a:schemeClr val="tx2"/>
                 </a:solidFill>
@@ -20379,7 +20873,7 @@
               <a:t> = </a:t>
             </a:r>
             <a:r>
-              <a:rPr sz="1000">
+              <a:rPr sz="1000" dirty="0">
                 <a:solidFill>
                   <a:srgbClr val="9CDCFE"/>
                 </a:solidFill>
@@ -20388,7 +20882,7 @@
               <a:t>string41416</a:t>
             </a:r>
             <a:r>
-              <a:rPr sz="1000">
+              <a:rPr sz="1000" dirty="0">
                 <a:solidFill>
                   <a:schemeClr val="tx2"/>
                 </a:solidFill>
@@ -20397,7 +20891,7 @@
               <a:t>[</a:t>
             </a:r>
             <a:r>
-              <a:rPr sz="1000">
+              <a:rPr sz="1000" dirty="0">
                 <a:solidFill>
                   <a:srgbClr val="B5CEA8"/>
                 </a:solidFill>
@@ -20406,7 +20900,7 @@
               <a:t>4</a:t>
             </a:r>
             <a:r>
-              <a:rPr sz="1000">
+              <a:rPr sz="1000" dirty="0">
                 <a:solidFill>
                   <a:schemeClr val="tx2"/>
                 </a:solidFill>
@@ -20415,7 +20909,7 @@
               <a:t>:-</a:t>
             </a:r>
             <a:r>
-              <a:rPr sz="1000">
+              <a:rPr sz="1000" dirty="0">
                 <a:solidFill>
                   <a:srgbClr val="B5CEA8"/>
                 </a:solidFill>
@@ -20424,7 +20918,7 @@
               <a:t>17</a:t>
             </a:r>
             <a:r>
-              <a:rPr sz="1000">
+              <a:rPr sz="1000" dirty="0">
                 <a:solidFill>
                   <a:schemeClr val="tx2"/>
                 </a:solidFill>
@@ -20438,7 +20932,7 @@
               <a:buNone/>
             </a:pPr>
             <a:r>
-              <a:rPr sz="1000">
+              <a:rPr sz="1000" dirty="0">
                 <a:solidFill>
                   <a:srgbClr val="8A8A9A"/>
                 </a:solidFill>
@@ -20447,7 +20941,7 @@
               <a:t>    </a:t>
             </a:r>
             <a:r>
-              <a:rPr sz="1000">
+              <a:rPr sz="1000" dirty="0">
                 <a:solidFill>
                   <a:schemeClr val="accent4"/>
                 </a:solidFill>
@@ -20461,7 +20955,7 @@
               <a:buNone/>
             </a:pPr>
             <a:r>
-              <a:rPr sz="1000">
+              <a:rPr sz="1000" dirty="0">
                 <a:solidFill>
                   <a:srgbClr val="8A8A9A"/>
                 </a:solidFill>
@@ -20470,7 +20964,7 @@
               <a:t> 46 </a:t>
             </a:r>
             <a:r>
-              <a:rPr sz="1000">
+              <a:rPr sz="1000" dirty="0">
                 <a:solidFill>
                   <a:srgbClr val="C586C0"/>
                 </a:solidFill>
@@ -20479,7 +20973,7 @@
               <a:t>if</a:t>
             </a:r>
             <a:r>
-              <a:rPr sz="1000">
+              <a:rPr sz="1000" dirty="0">
                 <a:solidFill>
                   <a:schemeClr val="tx2"/>
                 </a:solidFill>
@@ -20488,7 +20982,7 @@
               <a:t> </a:t>
             </a:r>
             <a:r>
-              <a:rPr sz="1000">
+              <a:rPr sz="1000" dirty="0">
                 <a:solidFill>
                   <a:srgbClr val="569CD6"/>
                 </a:solidFill>
@@ -20497,7 +20991,7 @@
               <a:t>not</a:t>
             </a:r>
             <a:r>
-              <a:rPr sz="1000">
+              <a:rPr sz="1000" dirty="0">
                 <a:solidFill>
                   <a:schemeClr val="tx2"/>
                 </a:solidFill>
@@ -20506,7 +21000,7 @@
               <a:t> </a:t>
             </a:r>
             <a:r>
-              <a:rPr sz="1000">
+              <a:rPr sz="1000" dirty="0" err="1">
                 <a:solidFill>
                   <a:srgbClr val="9CDCFE"/>
                 </a:solidFill>
@@ -20515,7 +21009,7 @@
               <a:t>bar</a:t>
             </a:r>
             <a:r>
-              <a:rPr sz="1000">
+              <a:rPr sz="1000" dirty="0" err="1">
                 <a:solidFill>
                   <a:schemeClr val="tx2"/>
                 </a:solidFill>
@@ -20524,7 +21018,7 @@
               <a:t>.</a:t>
             </a:r>
             <a:r>
-              <a:rPr sz="1000">
+              <a:rPr sz="1000" dirty="0" err="1">
                 <a:solidFill>
                   <a:srgbClr val="DCDCAA"/>
                 </a:solidFill>
@@ -20533,7 +21027,7 @@
               <a:t>startswith</a:t>
             </a:r>
             <a:r>
-              <a:rPr sz="1000">
+              <a:rPr sz="1000" dirty="0">
                 <a:solidFill>
                   <a:schemeClr val="tx2"/>
                 </a:solidFill>
@@ -20542,7 +21036,7 @@
               <a:t>(</a:t>
             </a:r>
             <a:r>
-              <a:rPr sz="1000">
+              <a:rPr sz="1000" dirty="0">
                 <a:solidFill>
                   <a:srgbClr val="CE9178"/>
                 </a:solidFill>
@@ -20551,7 +21045,7 @@
               <a:t>'\''</a:t>
             </a:r>
             <a:r>
-              <a:rPr sz="1000">
+              <a:rPr sz="1000" dirty="0">
                 <a:solidFill>
                   <a:schemeClr val="tx2"/>
                 </a:solidFill>
@@ -20560,7 +21054,7 @@
               <a:t>) </a:t>
             </a:r>
             <a:r>
-              <a:rPr sz="1000">
+              <a:rPr sz="1000" dirty="0">
                 <a:solidFill>
                   <a:srgbClr val="569CD6"/>
                 </a:solidFill>
@@ -20569,7 +21063,7 @@
               <a:t>or</a:t>
             </a:r>
             <a:r>
-              <a:rPr sz="1000">
+              <a:rPr sz="1000" dirty="0">
                 <a:solidFill>
                   <a:schemeClr val="tx2"/>
                 </a:solidFill>
@@ -20578,7 +21072,7 @@
               <a:t> </a:t>
             </a:r>
             <a:r>
-              <a:rPr sz="1000">
+              <a:rPr sz="1000" dirty="0">
                 <a:solidFill>
                   <a:srgbClr val="569CD6"/>
                 </a:solidFill>
@@ -20587,7 +21081,7 @@
               <a:t>not</a:t>
             </a:r>
             <a:r>
-              <a:rPr sz="1000">
+              <a:rPr sz="1000" dirty="0">
                 <a:solidFill>
                   <a:schemeClr val="tx2"/>
                 </a:solidFill>
@@ -20596,7 +21090,7 @@
               <a:t> </a:t>
             </a:r>
             <a:r>
-              <a:rPr sz="1000">
+              <a:rPr sz="1000" dirty="0" err="1">
                 <a:solidFill>
                   <a:srgbClr val="9CDCFE"/>
                 </a:solidFill>
@@ -20605,7 +21099,7 @@
               <a:t>bar</a:t>
             </a:r>
             <a:r>
-              <a:rPr sz="1000">
+              <a:rPr sz="1000" dirty="0" err="1">
                 <a:solidFill>
                   <a:schemeClr val="tx2"/>
                 </a:solidFill>
@@ -20614,7 +21108,7 @@
               <a:t>.</a:t>
             </a:r>
             <a:r>
-              <a:rPr sz="1000">
+              <a:rPr sz="1000" dirty="0" err="1">
                 <a:solidFill>
                   <a:srgbClr val="DCDCAA"/>
                 </a:solidFill>
@@ -20623,7 +21117,7 @@
               <a:t>endswith</a:t>
             </a:r>
             <a:r>
-              <a:rPr sz="1000">
+              <a:rPr sz="1000" dirty="0">
                 <a:solidFill>
                   <a:schemeClr val="tx2"/>
                 </a:solidFill>
@@ -20632,7 +21126,7 @@
               <a:t>(</a:t>
             </a:r>
             <a:r>
-              <a:rPr sz="1000">
+              <a:rPr sz="1000" dirty="0">
                 <a:solidFill>
                   <a:srgbClr val="CE9178"/>
                 </a:solidFill>
@@ -20641,7 +21135,7 @@
               <a:t>'\''</a:t>
             </a:r>
             <a:r>
-              <a:rPr sz="1000">
+              <a:rPr sz="1000" dirty="0">
                 <a:solidFill>
                   <a:schemeClr val="tx2"/>
                 </a:solidFill>
@@ -20650,7 +21144,7 @@
               <a:t>) </a:t>
             </a:r>
             <a:r>
-              <a:rPr sz="1000">
+              <a:rPr sz="1000" dirty="0">
                 <a:solidFill>
                   <a:srgbClr val="569CD6"/>
                 </a:solidFill>
@@ -20659,7 +21153,7 @@
               <a:t>or</a:t>
             </a:r>
             <a:r>
-              <a:rPr sz="1000">
+              <a:rPr sz="1000" dirty="0">
                 <a:solidFill>
                   <a:schemeClr val="tx2"/>
                 </a:solidFill>
@@ -20668,7 +21162,7 @@
               <a:t> </a:t>
             </a:r>
             <a:r>
-              <a:rPr sz="1000">
+              <a:rPr sz="1000" dirty="0">
                 <a:solidFill>
                   <a:srgbClr val="CE9178"/>
                 </a:solidFill>
@@ -20677,7 +21171,7 @@
               <a:t>'\''</a:t>
             </a:r>
             <a:r>
-              <a:rPr sz="1000">
+              <a:rPr sz="1000" dirty="0">
                 <a:solidFill>
                   <a:schemeClr val="tx2"/>
                 </a:solidFill>
@@ -20686,7 +21180,7 @@
               <a:t> </a:t>
             </a:r>
             <a:r>
-              <a:rPr sz="1000">
+              <a:rPr sz="1000" dirty="0">
                 <a:solidFill>
                   <a:srgbClr val="569CD6"/>
                 </a:solidFill>
@@ -20695,7 +21189,7 @@
               <a:t>in</a:t>
             </a:r>
             <a:r>
-              <a:rPr sz="1000">
+              <a:rPr sz="1000" dirty="0">
                 <a:solidFill>
                   <a:schemeClr val="tx2"/>
                 </a:solidFill>
@@ -20704,7 +21198,7 @@
               <a:t> </a:t>
             </a:r>
             <a:r>
-              <a:rPr sz="1000">
+              <a:rPr sz="1000" dirty="0">
                 <a:solidFill>
                   <a:srgbClr val="9CDCFE"/>
                 </a:solidFill>
@@ -20713,7 +21207,7 @@
               <a:t>bar</a:t>
             </a:r>
             <a:r>
-              <a:rPr sz="1000">
+              <a:rPr sz="1000" dirty="0">
                 <a:solidFill>
                   <a:schemeClr val="tx2"/>
                 </a:solidFill>
@@ -20722,7 +21216,7 @@
               <a:t>[</a:t>
             </a:r>
             <a:r>
-              <a:rPr sz="1000">
+              <a:rPr sz="1000" dirty="0">
                 <a:solidFill>
                   <a:srgbClr val="B5CEA8"/>
                 </a:solidFill>
@@ -20731,7 +21225,7 @@
               <a:t>1</a:t>
             </a:r>
             <a:r>
-              <a:rPr sz="1000">
+              <a:rPr sz="1000" dirty="0">
                 <a:solidFill>
                   <a:schemeClr val="tx2"/>
                 </a:solidFill>
@@ -20740,7 +21234,7 @@
               <a:t>:-</a:t>
             </a:r>
             <a:r>
-              <a:rPr sz="1000">
+              <a:rPr sz="1000" dirty="0">
                 <a:solidFill>
                   <a:srgbClr val="B5CEA8"/>
                 </a:solidFill>
@@ -20749,7 +21243,7 @@
               <a:t>1</a:t>
             </a:r>
             <a:r>
-              <a:rPr sz="1000">
+              <a:rPr sz="1000" dirty="0">
                 <a:solidFill>
                   <a:schemeClr val="tx2"/>
                 </a:solidFill>
@@ -20763,7 +21257,7 @@
               <a:buNone/>
             </a:pPr>
             <a:r>
-              <a:rPr sz="1000">
+              <a:rPr sz="1000" dirty="0">
                 <a:solidFill>
                   <a:srgbClr val="8A8A9A"/>
                 </a:solidFill>
@@ -20772,7 +21266,7 @@
               <a:t> 50 </a:t>
             </a:r>
             <a:r>
-              <a:rPr sz="1000">
+              <a:rPr sz="1000" dirty="0">
                 <a:solidFill>
                   <a:schemeClr val="tx2"/>
                 </a:solidFill>
@@ -20781,7 +21275,7 @@
               <a:t>    </a:t>
             </a:r>
             <a:r>
-              <a:rPr sz="1000">
+              <a:rPr sz="1000" dirty="0">
                 <a:solidFill>
                   <a:srgbClr val="C586C0"/>
                 </a:solidFill>
@@ -20790,7 +21284,7 @@
               <a:t>return</a:t>
             </a:r>
             <a:r>
-              <a:rPr sz="1000">
+              <a:rPr sz="1000" dirty="0">
                 <a:solidFill>
                   <a:schemeClr val="tx2"/>
                 </a:solidFill>
@@ -20799,7 +21293,7 @@
               <a:t> </a:t>
             </a:r>
             <a:r>
-              <a:rPr sz="1000">
+              <a:rPr sz="1000" dirty="0">
                 <a:solidFill>
                   <a:srgbClr val="9CDCFE"/>
                 </a:solidFill>
@@ -20813,7 +21307,7 @@
               <a:buNone/>
             </a:pPr>
             <a:r>
-              <a:rPr sz="1000">
+              <a:rPr sz="1000" dirty="0">
                 <a:solidFill>
                   <a:srgbClr val="8A8A9A"/>
                 </a:solidFill>
@@ -20822,7 +21316,7 @@
               <a:t> 52 </a:t>
             </a:r>
             <a:r>
-              <a:rPr sz="1000">
+              <a:rPr sz="1000" dirty="0">
                 <a:solidFill>
                   <a:srgbClr val="C586C0"/>
                 </a:solidFill>
@@ -20831,7 +21325,7 @@
               <a:t>try</a:t>
             </a:r>
             <a:r>
-              <a:rPr sz="1000">
+              <a:rPr sz="1000" dirty="0">
                 <a:solidFill>
                   <a:schemeClr val="tx2"/>
                 </a:solidFill>
@@ -20845,7 +21339,7 @@
               <a:buNone/>
             </a:pPr>
             <a:r>
-              <a:rPr sz="1000">
+              <a:rPr sz="1000" dirty="0">
                 <a:solidFill>
                   <a:srgbClr val="8A8A9A"/>
                 </a:solidFill>
@@ -20854,7 +21348,7 @@
               <a:t> 54 </a:t>
             </a:r>
             <a:r>
-              <a:rPr sz="1000">
+              <a:rPr sz="1000" dirty="0">
                 <a:solidFill>
                   <a:schemeClr val="tx2"/>
                 </a:solidFill>
@@ -20863,7 +21357,7 @@
               <a:t>        </a:t>
             </a:r>
             <a:r>
-              <a:rPr sz="1000">
+              <a:rPr sz="1000" dirty="0">
                 <a:solidFill>
                   <a:srgbClr val="DCDCAA"/>
                 </a:solidFill>
@@ -20872,7 +21366,7 @@
               <a:t>eval</a:t>
             </a:r>
             <a:r>
-              <a:rPr sz="1000">
+              <a:rPr sz="1000" dirty="0">
                 <a:solidFill>
                   <a:schemeClr val="tx2"/>
                 </a:solidFill>
@@ -20881,7 +21375,7 @@
               <a:t>(</a:t>
             </a:r>
             <a:r>
-              <a:rPr sz="1000">
+              <a:rPr sz="1000" dirty="0">
                 <a:solidFill>
                   <a:srgbClr val="9CDCFE"/>
                 </a:solidFill>
@@ -20890,7 +21384,7 @@
               <a:t>bar</a:t>
             </a:r>
             <a:r>
-              <a:rPr sz="1000">
+              <a:rPr sz="1000" dirty="0">
                 <a:solidFill>
                   <a:schemeClr val="tx2"/>
                 </a:solidFill>
@@ -21008,7 +21502,7 @@
         <p:spPr>
           <a:xfrm>
             <a:off x="319251" y="700000"/>
-            <a:ext cx="6014545" cy="509712"/>
+            <a:ext cx="6014545" cy="523220"/>
           </a:xfrm>
           <a:prstGeom prst="rect">
             <a:avLst/>
@@ -21022,10 +21516,11 @@
           <a:lstStyle/>
           <a:p>
             <a:r>
-              <a:rPr sz="1400" b="1">
+              <a:rPr sz="1400" dirty="0">
                 <a:solidFill>
                   <a:srgbClr val="28285E"/>
                 </a:solidFill>
+                <a:latin typeface="Fira Sans" panose="020B0503050000020004" pitchFamily="34" charset="0"/>
               </a:rPr>
               <a:t>No data flow is needed here. The code hashes a value it calls sensitive with MD5 and stores the digest.</a:t>
             </a:r>
@@ -21041,7 +21536,7 @@
         <p:spPr>
           <a:xfrm>
             <a:off x="319251" y="1439712"/>
-            <a:ext cx="6014545" cy="200000"/>
+            <a:ext cx="4619854" cy="184666"/>
           </a:xfrm>
           <a:prstGeom prst="rect">
             <a:avLst/>
@@ -21055,10 +21550,11 @@
           <a:lstStyle/>
           <a:p>
             <a:r>
-              <a:rPr sz="1200" b="1">
+              <a:rPr sz="1200" dirty="0">
                 <a:solidFill>
                   <a:srgbClr val="28285E"/>
                 </a:solidFill>
+                <a:latin typeface="Fira Sans" panose="020B0503050000020004" pitchFamily="34" charset="0"/>
               </a:rPr>
               <a:t>BenchmarkTest00057.py, BenchmarkTest00057_post, lines 65 to 70</a:t>
             </a:r>
@@ -21275,7 +21771,7 @@
         <p:spPr>
           <a:xfrm>
             <a:off x="469251" y="2029712"/>
-            <a:ext cx="5714545" cy="1020908"/>
+            <a:ext cx="5232202" cy="923330"/>
           </a:xfrm>
           <a:prstGeom prst="rect">
             <a:avLst/>
@@ -21292,7 +21788,7 @@
               <a:buNone/>
             </a:pPr>
             <a:r>
-              <a:rPr sz="1000">
+              <a:rPr sz="1000" dirty="0">
                 <a:solidFill>
                   <a:srgbClr val="8A8A9A"/>
                 </a:solidFill>
@@ -21301,7 +21797,7 @@
               <a:t>    </a:t>
             </a:r>
             <a:r>
-              <a:rPr sz="1000">
+              <a:rPr sz="1000" dirty="0">
                 <a:solidFill>
                   <a:schemeClr val="accent4"/>
                 </a:solidFill>
@@ -21315,7 +21811,7 @@
               <a:buNone/>
             </a:pPr>
             <a:r>
-              <a:rPr sz="1000">
+              <a:rPr sz="1000" dirty="0">
                 <a:solidFill>
                   <a:srgbClr val="8A8A9A"/>
                 </a:solidFill>
@@ -21324,7 +21820,7 @@
               <a:t> 65 </a:t>
             </a:r>
             <a:r>
-              <a:rPr sz="1000">
+              <a:rPr sz="1000" dirty="0">
                 <a:solidFill>
                   <a:srgbClr val="DCDCAA"/>
                 </a:solidFill>
@@ -21333,7 +21829,7 @@
               <a:t>hash</a:t>
             </a:r>
             <a:r>
-              <a:rPr sz="1000">
+              <a:rPr sz="1000" dirty="0">
                 <a:solidFill>
                   <a:schemeClr val="tx2"/>
                 </a:solidFill>
@@ -21342,7 +21838,7 @@
               <a:t> = </a:t>
             </a:r>
             <a:r>
-              <a:rPr sz="1000">
+              <a:rPr sz="1000" dirty="0">
                 <a:solidFill>
                   <a:srgbClr val="9CDCFE"/>
                 </a:solidFill>
@@ -21351,7 +21847,7 @@
               <a:t>hashlib</a:t>
             </a:r>
             <a:r>
-              <a:rPr sz="1000">
+              <a:rPr sz="1000" dirty="0">
                 <a:solidFill>
                   <a:schemeClr val="tx2"/>
                 </a:solidFill>
@@ -21360,7 +21856,7 @@
               <a:t>.</a:t>
             </a:r>
             <a:r>
-              <a:rPr sz="1000">
+              <a:rPr sz="1000" dirty="0">
                 <a:solidFill>
                   <a:srgbClr val="DCDCAA"/>
                 </a:solidFill>
@@ -21369,7 +21865,7 @@
               <a:t>md5</a:t>
             </a:r>
             <a:r>
-              <a:rPr sz="1000">
+              <a:rPr sz="1000" dirty="0">
                 <a:solidFill>
                   <a:schemeClr val="tx2"/>
                 </a:solidFill>
@@ -21383,7 +21879,7 @@
               <a:buNone/>
             </a:pPr>
             <a:r>
-              <a:rPr sz="1000">
+              <a:rPr sz="1000" dirty="0">
                 <a:solidFill>
                   <a:srgbClr val="8A8A9A"/>
                 </a:solidFill>
@@ -21392,7 +21888,7 @@
               <a:t> 66 </a:t>
             </a:r>
             <a:r>
-              <a:rPr sz="1000">
+              <a:rPr sz="1000" dirty="0" err="1">
                 <a:solidFill>
                   <a:srgbClr val="DCDCAA"/>
                 </a:solidFill>
@@ -21401,7 +21897,7 @@
               <a:t>hash</a:t>
             </a:r>
             <a:r>
-              <a:rPr sz="1000">
+              <a:rPr sz="1000" dirty="0" err="1">
                 <a:solidFill>
                   <a:schemeClr val="tx2"/>
                 </a:solidFill>
@@ -21410,7 +21906,7 @@
               <a:t>.</a:t>
             </a:r>
             <a:r>
-              <a:rPr sz="1000">
+              <a:rPr sz="1000" dirty="0" err="1">
                 <a:solidFill>
                   <a:srgbClr val="DCDCAA"/>
                 </a:solidFill>
@@ -21419,7 +21915,7 @@
               <a:t>update</a:t>
             </a:r>
             <a:r>
-              <a:rPr sz="1000">
+              <a:rPr sz="1000" dirty="0">
                 <a:solidFill>
                   <a:schemeClr val="tx2"/>
                 </a:solidFill>
@@ -21428,7 +21924,7 @@
               <a:t>(</a:t>
             </a:r>
             <a:r>
-              <a:rPr sz="1000">
+              <a:rPr sz="1000" dirty="0">
                 <a:solidFill>
                   <a:srgbClr val="DCDCAA"/>
                 </a:solidFill>
@@ -21437,7 +21933,7 @@
               <a:t>input</a:t>
             </a:r>
             <a:r>
-              <a:rPr sz="1000">
+              <a:rPr sz="1000" dirty="0">
                 <a:solidFill>
                   <a:schemeClr val="tx2"/>
                 </a:solidFill>
@@ -21451,7 +21947,7 @@
               <a:buNone/>
             </a:pPr>
             <a:r>
-              <a:rPr sz="1000">
+              <a:rPr sz="1000" dirty="0">
                 <a:solidFill>
                   <a:srgbClr val="8A8A9A"/>
                 </a:solidFill>
@@ -21460,7 +21956,7 @@
               <a:t> 68 </a:t>
             </a:r>
             <a:r>
-              <a:rPr sz="1000">
+              <a:rPr sz="1000" dirty="0">
                 <a:solidFill>
                   <a:srgbClr val="9CDCFE"/>
                 </a:solidFill>
@@ -21469,7 +21965,7 @@
               <a:t>result</a:t>
             </a:r>
             <a:r>
-              <a:rPr sz="1000">
+              <a:rPr sz="1000" dirty="0">
                 <a:solidFill>
                   <a:schemeClr val="tx2"/>
                 </a:solidFill>
@@ -21478,7 +21974,7 @@
               <a:t> = </a:t>
             </a:r>
             <a:r>
-              <a:rPr sz="1000">
+              <a:rPr sz="1000" dirty="0" err="1">
                 <a:solidFill>
                   <a:srgbClr val="DCDCAA"/>
                 </a:solidFill>
@@ -21487,7 +21983,7 @@
               <a:t>hash</a:t>
             </a:r>
             <a:r>
-              <a:rPr sz="1000">
+              <a:rPr sz="1000" dirty="0" err="1">
                 <a:solidFill>
                   <a:schemeClr val="tx2"/>
                 </a:solidFill>
@@ -21496,7 +21992,7 @@
               <a:t>.</a:t>
             </a:r>
             <a:r>
-              <a:rPr sz="1000">
+              <a:rPr sz="1000" dirty="0" err="1">
                 <a:solidFill>
                   <a:srgbClr val="DCDCAA"/>
                 </a:solidFill>
@@ -21505,7 +22001,7 @@
               <a:t>digest</a:t>
             </a:r>
             <a:r>
-              <a:rPr sz="1000">
+              <a:rPr sz="1000" dirty="0">
                 <a:solidFill>
                   <a:schemeClr val="tx2"/>
                 </a:solidFill>
@@ -21519,7 +22015,7 @@
               <a:buNone/>
             </a:pPr>
             <a:r>
-              <a:rPr sz="1000">
+              <a:rPr sz="1000" dirty="0">
                 <a:solidFill>
                   <a:srgbClr val="8A8A9A"/>
                 </a:solidFill>
@@ -21528,7 +22024,7 @@
               <a:t> 69 </a:t>
             </a:r>
             <a:r>
-              <a:rPr sz="1000">
+              <a:rPr sz="1000" dirty="0">
                 <a:solidFill>
                   <a:srgbClr val="9CDCFE"/>
                 </a:solidFill>
@@ -21537,7 +22033,7 @@
               <a:t>f</a:t>
             </a:r>
             <a:r>
-              <a:rPr sz="1000">
+              <a:rPr sz="1000" dirty="0">
                 <a:solidFill>
                   <a:schemeClr val="tx2"/>
                 </a:solidFill>
@@ -21546,7 +22042,7 @@
               <a:t> = </a:t>
             </a:r>
             <a:r>
-              <a:rPr sz="1000">
+              <a:rPr sz="1000" dirty="0">
                 <a:solidFill>
                   <a:srgbClr val="DCDCAA"/>
                 </a:solidFill>
@@ -21555,7 +22051,7 @@
               <a:t>open</a:t>
             </a:r>
             <a:r>
-              <a:rPr sz="1000">
+              <a:rPr sz="1000" dirty="0">
                 <a:solidFill>
                   <a:schemeClr val="tx2"/>
                 </a:solidFill>
@@ -21564,7 +22060,7 @@
               <a:t>(</a:t>
             </a:r>
             <a:r>
-              <a:rPr sz="1000">
+              <a:rPr sz="1000" dirty="0">
                 <a:solidFill>
                   <a:srgbClr val="569CD6"/>
                 </a:solidFill>
@@ -21573,7 +22069,7 @@
               <a:t>f</a:t>
             </a:r>
             <a:r>
-              <a:rPr sz="1000">
+              <a:rPr sz="1000" dirty="0">
                 <a:solidFill>
                   <a:srgbClr val="CE9178"/>
                 </a:solidFill>
@@ -21582,7 +22078,7 @@
               <a:t>'</a:t>
             </a:r>
             <a:r>
-              <a:rPr sz="1000">
+              <a:rPr sz="1000" dirty="0">
                 <a:solidFill>
                   <a:srgbClr val="569CD6"/>
                 </a:solidFill>
@@ -21591,7 +22087,7 @@
               <a:t>{</a:t>
             </a:r>
             <a:r>
-              <a:rPr sz="1000">
+              <a:rPr sz="1000" dirty="0" err="1">
                 <a:solidFill>
                   <a:srgbClr val="9CDCFE"/>
                 </a:solidFill>
@@ -21600,7 +22096,7 @@
               <a:t>helpers</a:t>
             </a:r>
             <a:r>
-              <a:rPr sz="1000">
+              <a:rPr sz="1000" dirty="0" err="1">
                 <a:solidFill>
                   <a:schemeClr val="tx2"/>
                 </a:solidFill>
@@ -21609,7 +22105,7 @@
               <a:t>.</a:t>
             </a:r>
             <a:r>
-              <a:rPr sz="1000">
+              <a:rPr sz="1000" dirty="0" err="1">
                 <a:solidFill>
                   <a:srgbClr val="9CDCFE"/>
                 </a:solidFill>
@@ -21618,7 +22114,7 @@
               <a:t>utils</a:t>
             </a:r>
             <a:r>
-              <a:rPr sz="1000">
+              <a:rPr sz="1000" dirty="0" err="1">
                 <a:solidFill>
                   <a:schemeClr val="tx2"/>
                 </a:solidFill>
@@ -21627,7 +22123,7 @@
               <a:t>.</a:t>
             </a:r>
             <a:r>
-              <a:rPr sz="1000">
+              <a:rPr sz="1000" dirty="0" err="1">
                 <a:solidFill>
                   <a:srgbClr val="9CDCFE"/>
                 </a:solidFill>
@@ -21636,7 +22132,7 @@
               <a:t>TESTFILES_DIR</a:t>
             </a:r>
             <a:r>
-              <a:rPr sz="1000">
+              <a:rPr sz="1000" dirty="0">
                 <a:solidFill>
                   <a:srgbClr val="569CD6"/>
                 </a:solidFill>
@@ -21645,16 +22141,34 @@
               <a:t>}</a:t>
             </a:r>
             <a:r>
-              <a:rPr sz="1000">
+              <a:rPr sz="1000" dirty="0">
                 <a:solidFill>
                   <a:srgbClr val="CE9178"/>
                 </a:solidFill>
                 <a:latin typeface="Maple Mono NF"/>
               </a:rPr>
-              <a:t>/passwordFile.txt'</a:t>
-            </a:r>
-            <a:r>
-              <a:rPr sz="1000">
+              <a:t>/</a:t>
+            </a:r>
+            <a:r>
+              <a:rPr sz="1000" dirty="0" err="1">
+                <a:solidFill>
+                  <a:srgbClr val="CE9178"/>
+                </a:solidFill>
+                <a:latin typeface="Maple Mono NF"/>
+              </a:rPr>
+              <a:t>passwordFile.txt</a:t>
+            </a:r>
+            <a:r>
+              <a:rPr sz="1000" dirty="0">
+                <a:solidFill>
+                  <a:srgbClr val="CE9178"/>
+                </a:solidFill>
+                <a:latin typeface="Maple Mono NF"/>
+              </a:rPr>
+              <a:t>'</a:t>
+            </a:r>
+            <a:r>
+              <a:rPr sz="1000" dirty="0">
                 <a:solidFill>
                   <a:schemeClr val="tx2"/>
                 </a:solidFill>
@@ -21663,7 +22177,7 @@
               <a:t>, </a:t>
             </a:r>
             <a:r>
-              <a:rPr sz="1000">
+              <a:rPr sz="1000" dirty="0">
                 <a:solidFill>
                   <a:srgbClr val="CE9178"/>
                 </a:solidFill>
@@ -21672,7 +22186,7 @@
               <a:t>'a'</a:t>
             </a:r>
             <a:r>
-              <a:rPr sz="1000">
+              <a:rPr sz="1000" dirty="0">
                 <a:solidFill>
                   <a:schemeClr val="tx2"/>
                 </a:solidFill>
@@ -21686,7 +22200,7 @@
               <a:buNone/>
             </a:pPr>
             <a:r>
-              <a:rPr sz="1000">
+              <a:rPr sz="1000" dirty="0">
                 <a:solidFill>
                   <a:srgbClr val="8A8A9A"/>
                 </a:solidFill>
@@ -21695,7 +22209,7 @@
               <a:t> 70 </a:t>
             </a:r>
             <a:r>
-              <a:rPr sz="1000">
+              <a:rPr sz="1000" dirty="0" err="1">
                 <a:solidFill>
                   <a:srgbClr val="9CDCFE"/>
                 </a:solidFill>
@@ -21704,7 +22218,7 @@
               <a:t>f</a:t>
             </a:r>
             <a:r>
-              <a:rPr sz="1000">
+              <a:rPr sz="1000" dirty="0" err="1">
                 <a:solidFill>
                   <a:schemeClr val="tx2"/>
                 </a:solidFill>
@@ -21713,7 +22227,7 @@
               <a:t>.</a:t>
             </a:r>
             <a:r>
-              <a:rPr sz="1000">
+              <a:rPr sz="1000" dirty="0" err="1">
                 <a:solidFill>
                   <a:srgbClr val="DCDCAA"/>
                 </a:solidFill>
@@ -21722,7 +22236,7 @@
               <a:t>write</a:t>
             </a:r>
             <a:r>
-              <a:rPr sz="1000">
+              <a:rPr sz="1000" dirty="0">
                 <a:solidFill>
                   <a:schemeClr val="tx2"/>
                 </a:solidFill>
@@ -21731,7 +22245,7 @@
               <a:t>(</a:t>
             </a:r>
             <a:r>
-              <a:rPr sz="1000">
+              <a:rPr sz="1000" dirty="0" err="1">
                 <a:solidFill>
                   <a:srgbClr val="569CD6"/>
                 </a:solidFill>
@@ -21740,16 +22254,25 @@
               <a:t>f</a:t>
             </a:r>
             <a:r>
-              <a:rPr sz="1000">
+              <a:rPr sz="1000" dirty="0" err="1">
                 <a:solidFill>
                   <a:srgbClr val="CE9178"/>
                 </a:solidFill>
                 <a:latin typeface="Maple Mono NF"/>
               </a:rPr>
-              <a:t>'hash_value=</a:t>
-            </a:r>
-            <a:r>
-              <a:rPr sz="1000">
+              <a:t>'hash_value</a:t>
+            </a:r>
+            <a:r>
+              <a:rPr sz="1000" dirty="0">
+                <a:solidFill>
+                  <a:srgbClr val="CE9178"/>
+                </a:solidFill>
+                <a:latin typeface="Maple Mono NF"/>
+              </a:rPr>
+              <a:t>=</a:t>
+            </a:r>
+            <a:r>
+              <a:rPr sz="1000" dirty="0">
                 <a:solidFill>
                   <a:srgbClr val="569CD6"/>
                 </a:solidFill>
@@ -21758,7 +22281,7 @@
               <a:t>{</a:t>
             </a:r>
             <a:r>
-              <a:rPr sz="1000">
+              <a:rPr sz="1000" dirty="0">
                 <a:solidFill>
                   <a:srgbClr val="9CDCFE"/>
                 </a:solidFill>
@@ -21767,7 +22290,7 @@
               <a:t>base64</a:t>
             </a:r>
             <a:r>
-              <a:rPr sz="1000">
+              <a:rPr sz="1000" dirty="0">
                 <a:solidFill>
                   <a:schemeClr val="tx2"/>
                 </a:solidFill>
@@ -21776,7 +22299,7 @@
               <a:t>.</a:t>
             </a:r>
             <a:r>
-              <a:rPr sz="1000">
+              <a:rPr sz="1000" dirty="0">
                 <a:solidFill>
                   <a:srgbClr val="DCDCAA"/>
                 </a:solidFill>
@@ -21785,7 +22308,7 @@
               <a:t>b64encode</a:t>
             </a:r>
             <a:r>
-              <a:rPr sz="1000">
+              <a:rPr sz="1000" dirty="0">
                 <a:solidFill>
                   <a:schemeClr val="tx2"/>
                 </a:solidFill>
@@ -21794,7 +22317,7 @@
               <a:t>(</a:t>
             </a:r>
             <a:r>
-              <a:rPr sz="1000">
+              <a:rPr sz="1000" dirty="0">
                 <a:solidFill>
                   <a:srgbClr val="9CDCFE"/>
                 </a:solidFill>
@@ -21803,7 +22326,7 @@
               <a:t>result</a:t>
             </a:r>
             <a:r>
-              <a:rPr sz="1000">
+              <a:rPr sz="1000" dirty="0">
                 <a:solidFill>
                   <a:schemeClr val="tx2"/>
                 </a:solidFill>
@@ -21812,7 +22335,7 @@
               <a:t>)</a:t>
             </a:r>
             <a:r>
-              <a:rPr sz="1000">
+              <a:rPr sz="1000" dirty="0">
                 <a:solidFill>
                   <a:srgbClr val="569CD6"/>
                 </a:solidFill>
@@ -21821,7 +22344,7 @@
               <a:t>}</a:t>
             </a:r>
             <a:r>
-              <a:rPr sz="1000">
+              <a:rPr sz="1000" dirty="0">
                 <a:solidFill>
                   <a:srgbClr val="CE9178"/>
                 </a:solidFill>
@@ -21830,7 +22353,7 @@
               <a:t>\n'</a:t>
             </a:r>
             <a:r>
-              <a:rPr sz="1000">
+              <a:rPr sz="1000" dirty="0">
                 <a:solidFill>
                   <a:schemeClr val="tx2"/>
                 </a:solidFill>
@@ -21948,7 +22471,7 @@
         <p:spPr>
           <a:xfrm>
             <a:off x="319251" y="700000"/>
-            <a:ext cx="6014545" cy="509712"/>
+            <a:ext cx="6014545" cy="523220"/>
           </a:xfrm>
           <a:prstGeom prst="rect">
             <a:avLst/>
@@ -21962,10 +22485,11 @@
           <a:lstStyle/>
           <a:p>
             <a:r>
-              <a:rPr sz="1400" b="1">
+              <a:rPr sz="1400" dirty="0">
                 <a:solidFill>
                   <a:srgbClr val="28285E"/>
                 </a:solidFill>
+                <a:latin typeface="Fira Sans" panose="020B0503050000020004" pitchFamily="34" charset="0"/>
               </a:rPr>
               <a:t>The rule fires on line 55, a parse of a file the program ships. The flaw is the query on line 56.</a:t>
             </a:r>
@@ -21981,7 +22505,7 @@
         <p:spPr>
           <a:xfrm>
             <a:off x="319251" y="1439712"/>
-            <a:ext cx="6014545" cy="200000"/>
+            <a:ext cx="4615046" cy="184666"/>
           </a:xfrm>
           <a:prstGeom prst="rect">
             <a:avLst/>
@@ -21995,10 +22519,11 @@
           <a:lstStyle/>
           <a:p>
             <a:r>
-              <a:rPr sz="1200" b="1">
+              <a:rPr sz="1200" dirty="0">
                 <a:solidFill>
                   <a:srgbClr val="28285E"/>
                 </a:solidFill>
+                <a:latin typeface="Fira Sans" panose="020B0503050000020004" pitchFamily="34" charset="0"/>
               </a:rPr>
               <a:t>BenchmarkTest00013.py, BenchmarkTest00013_post, lines 48 to 57</a:t>
             </a:r>
@@ -22215,7 +22740,7 @@
         <p:spPr>
           <a:xfrm>
             <a:off x="469251" y="2029712"/>
-            <a:ext cx="5714545" cy="1118000"/>
+            <a:ext cx="5182509" cy="1015663"/>
           </a:xfrm>
           <a:prstGeom prst="rect">
             <a:avLst/>
@@ -22232,7 +22757,7 @@
               <a:buNone/>
             </a:pPr>
             <a:r>
-              <a:rPr sz="1100">
+              <a:rPr sz="1100" dirty="0">
                 <a:solidFill>
                   <a:srgbClr val="8A8A9A"/>
                 </a:solidFill>
@@ -22241,7 +22766,7 @@
               <a:t> 48 </a:t>
             </a:r>
             <a:r>
-              <a:rPr sz="1100">
+              <a:rPr sz="1100" dirty="0">
                 <a:solidFill>
                   <a:srgbClr val="9CDCFE"/>
                 </a:solidFill>
@@ -22250,7 +22775,7 @@
               <a:t>bar</a:t>
             </a:r>
             <a:r>
-              <a:rPr sz="1100">
+              <a:rPr sz="1100" dirty="0">
                 <a:solidFill>
                   <a:schemeClr val="tx2"/>
                 </a:solidFill>
@@ -22259,7 +22784,7 @@
               <a:t> = </a:t>
             </a:r>
             <a:r>
-              <a:rPr sz="1100">
+              <a:rPr sz="1100" dirty="0" err="1">
                 <a:solidFill>
                   <a:srgbClr val="9CDCFE"/>
                 </a:solidFill>
@@ -22268,7 +22793,7 @@
               <a:t>lst</a:t>
             </a:r>
             <a:r>
-              <a:rPr sz="1100">
+              <a:rPr sz="1100" dirty="0">
                 <a:solidFill>
                   <a:schemeClr val="tx2"/>
                 </a:solidFill>
@@ -22277,7 +22802,7 @@
               <a:t>[</a:t>
             </a:r>
             <a:r>
-              <a:rPr sz="1100">
+              <a:rPr sz="1100" dirty="0">
                 <a:solidFill>
                   <a:srgbClr val="B5CEA8"/>
                 </a:solidFill>
@@ -22286,7 +22811,7 @@
               <a:t>1</a:t>
             </a:r>
             <a:r>
-              <a:rPr sz="1100">
+              <a:rPr sz="1100" dirty="0">
                 <a:solidFill>
                   <a:schemeClr val="tx2"/>
                 </a:solidFill>
@@ -22300,7 +22825,7 @@
               <a:buNone/>
             </a:pPr>
             <a:r>
-              <a:rPr sz="1100">
+              <a:rPr sz="1100" dirty="0">
                 <a:solidFill>
                   <a:srgbClr val="8A8A9A"/>
                 </a:solidFill>
@@ -22309,7 +22834,7 @@
               <a:t>    </a:t>
             </a:r>
             <a:r>
-              <a:rPr sz="1100">
+              <a:rPr sz="1100" dirty="0">
                 <a:solidFill>
                   <a:schemeClr val="accent4"/>
                 </a:solidFill>
@@ -22323,7 +22848,7 @@
               <a:buNone/>
             </a:pPr>
             <a:r>
-              <a:rPr sz="1100">
+              <a:rPr sz="1100" dirty="0">
                 <a:solidFill>
                   <a:srgbClr val="8A8A9A"/>
                 </a:solidFill>
@@ -22332,7 +22857,7 @@
               <a:t> 55 </a:t>
             </a:r>
             <a:r>
-              <a:rPr sz="1100">
+              <a:rPr sz="1100" dirty="0">
                 <a:solidFill>
                   <a:srgbClr val="9CDCFE"/>
                 </a:solidFill>
@@ -22341,7 +22866,7 @@
               <a:t>root</a:t>
             </a:r>
             <a:r>
-              <a:rPr sz="1100">
+              <a:rPr sz="1100" dirty="0">
                 <a:solidFill>
                   <a:schemeClr val="tx2"/>
                 </a:solidFill>
@@ -22350,7 +22875,7 @@
               <a:t> = </a:t>
             </a:r>
             <a:r>
-              <a:rPr sz="1100">
+              <a:rPr sz="1100" dirty="0" err="1">
                 <a:solidFill>
                   <a:srgbClr val="9CDCFE"/>
                 </a:solidFill>
@@ -22359,7 +22884,7 @@
               <a:t>ET</a:t>
             </a:r>
             <a:r>
-              <a:rPr sz="1100">
+              <a:rPr sz="1100" dirty="0" err="1">
                 <a:solidFill>
                   <a:schemeClr val="tx2"/>
                 </a:solidFill>
@@ -22368,7 +22893,7 @@
               <a:t>.</a:t>
             </a:r>
             <a:r>
-              <a:rPr sz="1100">
+              <a:rPr sz="1100" dirty="0" err="1">
                 <a:solidFill>
                   <a:srgbClr val="DCDCAA"/>
                 </a:solidFill>
@@ -22377,7 +22902,7 @@
               <a:t>parse</a:t>
             </a:r>
             <a:r>
-              <a:rPr sz="1100">
+              <a:rPr sz="1100" dirty="0">
                 <a:solidFill>
                   <a:schemeClr val="tx2"/>
                 </a:solidFill>
@@ -22386,7 +22911,7 @@
               <a:t>(</a:t>
             </a:r>
             <a:r>
-              <a:rPr sz="1100">
+              <a:rPr sz="1100" dirty="0">
                 <a:solidFill>
                   <a:srgbClr val="569CD6"/>
                 </a:solidFill>
@@ -22395,7 +22920,7 @@
               <a:t>f</a:t>
             </a:r>
             <a:r>
-              <a:rPr sz="1100">
+              <a:rPr sz="1100" dirty="0">
                 <a:solidFill>
                   <a:srgbClr val="CE9178"/>
                 </a:solidFill>
@@ -22404,7 +22929,7 @@
               <a:t>'</a:t>
             </a:r>
             <a:r>
-              <a:rPr sz="1100">
+              <a:rPr sz="1100" dirty="0">
                 <a:solidFill>
                   <a:srgbClr val="569CD6"/>
                 </a:solidFill>
@@ -22413,7 +22938,7 @@
               <a:t>{</a:t>
             </a:r>
             <a:r>
-              <a:rPr sz="1100">
+              <a:rPr sz="1100" dirty="0" err="1">
                 <a:solidFill>
                   <a:srgbClr val="9CDCFE"/>
                 </a:solidFill>
@@ -22422,7 +22947,7 @@
               <a:t>helpers</a:t>
             </a:r>
             <a:r>
-              <a:rPr sz="1100">
+              <a:rPr sz="1100" dirty="0" err="1">
                 <a:solidFill>
                   <a:schemeClr val="tx2"/>
                 </a:solidFill>
@@ -22431,7 +22956,7 @@
               <a:t>.</a:t>
             </a:r>
             <a:r>
-              <a:rPr sz="1100">
+              <a:rPr sz="1100" dirty="0" err="1">
                 <a:solidFill>
                   <a:srgbClr val="9CDCFE"/>
                 </a:solidFill>
@@ -22440,7 +22965,7 @@
               <a:t>utils</a:t>
             </a:r>
             <a:r>
-              <a:rPr sz="1100">
+              <a:rPr sz="1100" dirty="0" err="1">
                 <a:solidFill>
                   <a:schemeClr val="tx2"/>
                 </a:solidFill>
@@ -22449,7 +22974,7 @@
               <a:t>.</a:t>
             </a:r>
             <a:r>
-              <a:rPr sz="1100">
+              <a:rPr sz="1100" dirty="0" err="1">
                 <a:solidFill>
                   <a:srgbClr val="9CDCFE"/>
                 </a:solidFill>
@@ -22458,7 +22983,7 @@
               <a:t>RES_DIR</a:t>
             </a:r>
             <a:r>
-              <a:rPr sz="1100">
+              <a:rPr sz="1100" dirty="0">
                 <a:solidFill>
                   <a:srgbClr val="569CD6"/>
                 </a:solidFill>
@@ -22467,16 +22992,34 @@
               <a:t>}</a:t>
             </a:r>
             <a:r>
-              <a:rPr sz="1100">
+              <a:rPr sz="1100" dirty="0">
                 <a:solidFill>
                   <a:srgbClr val="CE9178"/>
                 </a:solidFill>
                 <a:latin typeface="Maple Mono NF"/>
               </a:rPr>
-              <a:t>/employees.xml'</a:t>
-            </a:r>
-            <a:r>
-              <a:rPr sz="1100">
+              <a:t>/</a:t>
+            </a:r>
+            <a:r>
+              <a:rPr sz="1100" dirty="0" err="1">
+                <a:solidFill>
+                  <a:srgbClr val="CE9178"/>
+                </a:solidFill>
+                <a:latin typeface="Maple Mono NF"/>
+              </a:rPr>
+              <a:t>employees.xml</a:t>
+            </a:r>
+            <a:r>
+              <a:rPr sz="1100" dirty="0">
+                <a:solidFill>
+                  <a:srgbClr val="CE9178"/>
+                </a:solidFill>
+                <a:latin typeface="Maple Mono NF"/>
+              </a:rPr>
+              <a:t>'</a:t>
+            </a:r>
+            <a:r>
+              <a:rPr sz="1100" dirty="0">
                 <a:solidFill>
                   <a:schemeClr val="tx2"/>
                 </a:solidFill>
@@ -22490,7 +23033,7 @@
               <a:buNone/>
             </a:pPr>
             <a:r>
-              <a:rPr sz="1100">
+              <a:rPr sz="1100" dirty="0">
                 <a:solidFill>
                   <a:srgbClr val="8A8A9A"/>
                 </a:solidFill>
@@ -22499,7 +23042,7 @@
               <a:t>    </a:t>
             </a:r>
             <a:r>
-              <a:rPr sz="1100">
+              <a:rPr sz="1100" dirty="0">
                 <a:solidFill>
                   <a:schemeClr val="accent4"/>
                 </a:solidFill>
@@ -22513,7 +23056,7 @@
               <a:buNone/>
             </a:pPr>
             <a:r>
-              <a:rPr sz="1100">
+              <a:rPr sz="1100" dirty="0">
                 <a:solidFill>
                   <a:srgbClr val="8A8A9A"/>
                 </a:solidFill>
@@ -22522,7 +23065,7 @@
               <a:t> 56 </a:t>
             </a:r>
             <a:r>
-              <a:rPr sz="1100">
+              <a:rPr sz="1100" dirty="0">
                 <a:solidFill>
                   <a:srgbClr val="9CDCFE"/>
                 </a:solidFill>
@@ -22531,7 +23074,7 @@
               <a:t>query</a:t>
             </a:r>
             <a:r>
-              <a:rPr sz="1100">
+              <a:rPr sz="1100" dirty="0">
                 <a:solidFill>
                   <a:schemeClr val="tx2"/>
                 </a:solidFill>
@@ -22540,7 +23083,7 @@
               <a:t> = </a:t>
             </a:r>
             <a:r>
-              <a:rPr sz="1100">
+              <a:rPr sz="1100" dirty="0">
                 <a:solidFill>
                   <a:srgbClr val="569CD6"/>
                 </a:solidFill>
@@ -22549,16 +23092,34 @@
               <a:t>f</a:t>
             </a:r>
             <a:r>
-              <a:rPr sz="1100">
+              <a:rPr sz="1100" dirty="0">
                 <a:solidFill>
                   <a:srgbClr val="CE9178"/>
                 </a:solidFill>
                 <a:latin typeface="Maple Mono NF"/>
               </a:rPr>
-              <a:t>"/Employees/Employee[@emplid=\'</a:t>
-            </a:r>
-            <a:r>
-              <a:rPr sz="1100">
+              <a:t>"/Employees/Employee[@</a:t>
+            </a:r>
+            <a:r>
+              <a:rPr sz="1100" dirty="0" err="1">
+                <a:solidFill>
+                  <a:srgbClr val="CE9178"/>
+                </a:solidFill>
+                <a:latin typeface="Maple Mono NF"/>
+              </a:rPr>
+              <a:t>emplid</a:t>
+            </a:r>
+            <a:r>
+              <a:rPr sz="1100" dirty="0">
+                <a:solidFill>
+                  <a:srgbClr val="CE9178"/>
+                </a:solidFill>
+                <a:latin typeface="Maple Mono NF"/>
+              </a:rPr>
+              <a:t>=\'</a:t>
+            </a:r>
+            <a:r>
+              <a:rPr sz="1100" dirty="0">
                 <a:solidFill>
                   <a:srgbClr val="569CD6"/>
                 </a:solidFill>
@@ -22567,7 +23128,7 @@
               <a:t>{</a:t>
             </a:r>
             <a:r>
-              <a:rPr sz="1100">
+              <a:rPr sz="1100" dirty="0">
                 <a:solidFill>
                   <a:srgbClr val="9CDCFE"/>
                 </a:solidFill>
@@ -22576,7 +23137,7 @@
               <a:t>bar</a:t>
             </a:r>
             <a:r>
-              <a:rPr sz="1100">
+              <a:rPr sz="1100" dirty="0">
                 <a:solidFill>
                   <a:srgbClr val="569CD6"/>
                 </a:solidFill>
@@ -22585,7 +23146,7 @@
               <a:t>}</a:t>
             </a:r>
             <a:r>
-              <a:rPr sz="1100">
+              <a:rPr sz="1100" dirty="0">
                 <a:solidFill>
                   <a:srgbClr val="CE9178"/>
                 </a:solidFill>
@@ -22599,7 +23160,7 @@
               <a:buNone/>
             </a:pPr>
             <a:r>
-              <a:rPr sz="1100">
+              <a:rPr sz="1100" dirty="0">
                 <a:solidFill>
                   <a:srgbClr val="8A8A9A"/>
                 </a:solidFill>
@@ -22608,7 +23169,7 @@
               <a:t> 57 </a:t>
             </a:r>
             <a:r>
-              <a:rPr sz="1100">
+              <a:rPr sz="1100" dirty="0">
                 <a:solidFill>
                   <a:srgbClr val="9CDCFE"/>
                 </a:solidFill>
@@ -22617,7 +23178,7 @@
               <a:t>nodes</a:t>
             </a:r>
             <a:r>
-              <a:rPr sz="1100">
+              <a:rPr sz="1100" dirty="0">
                 <a:solidFill>
                   <a:schemeClr val="tx2"/>
                 </a:solidFill>
@@ -22626,7 +23187,7 @@
               <a:t> = </a:t>
             </a:r>
             <a:r>
-              <a:rPr sz="1100">
+              <a:rPr sz="1100" dirty="0" err="1">
                 <a:solidFill>
                   <a:srgbClr val="9CDCFE"/>
                 </a:solidFill>
@@ -22635,7 +23196,7 @@
               <a:t>elementpath</a:t>
             </a:r>
             <a:r>
-              <a:rPr sz="1100">
+              <a:rPr sz="1100" dirty="0" err="1">
                 <a:solidFill>
                   <a:schemeClr val="tx2"/>
                 </a:solidFill>
@@ -22644,7 +23205,7 @@
               <a:t>.</a:t>
             </a:r>
             <a:r>
-              <a:rPr sz="1100">
+              <a:rPr sz="1100" dirty="0" err="1">
                 <a:solidFill>
                   <a:srgbClr val="DCDCAA"/>
                 </a:solidFill>
@@ -22653,7 +23214,7 @@
               <a:t>select</a:t>
             </a:r>
             <a:r>
-              <a:rPr sz="1100">
+              <a:rPr sz="1100" dirty="0">
                 <a:solidFill>
                   <a:schemeClr val="tx2"/>
                 </a:solidFill>
@@ -22662,7 +23223,7 @@
               <a:t>(</a:t>
             </a:r>
             <a:r>
-              <a:rPr sz="1100">
+              <a:rPr sz="1100" dirty="0">
                 <a:solidFill>
                   <a:srgbClr val="9CDCFE"/>
                 </a:solidFill>
@@ -22671,7 +23232,7 @@
               <a:t>root</a:t>
             </a:r>
             <a:r>
-              <a:rPr sz="1100">
+              <a:rPr sz="1100" dirty="0">
                 <a:solidFill>
                   <a:schemeClr val="tx2"/>
                 </a:solidFill>
@@ -22680,7 +23241,7 @@
               <a:t>, </a:t>
             </a:r>
             <a:r>
-              <a:rPr sz="1100">
+              <a:rPr sz="1100" dirty="0">
                 <a:solidFill>
                   <a:srgbClr val="9CDCFE"/>
                 </a:solidFill>
@@ -22689,7 +23250,7 @@
               <a:t>query</a:t>
             </a:r>
             <a:r>
-              <a:rPr sz="1100">
+              <a:rPr sz="1100" dirty="0">
                 <a:solidFill>
                   <a:schemeClr val="tx2"/>
                 </a:solidFill>
@@ -22801,7 +23362,7 @@
           <a:p>
             <a:pPr algn="ctr"/>
             <a:r>
-              <a:rPr sz="4000" b="1">
+              <a:rPr sz="4000" b="1" dirty="0">
                 <a:solidFill>
                   <a:schemeClr val="tx2"/>
                 </a:solidFill>
@@ -22867,7 +23428,7 @@
         <p:spPr>
           <a:xfrm>
             <a:off x="319251" y="700000"/>
-            <a:ext cx="6014545" cy="509712"/>
+            <a:ext cx="6014545" cy="523220"/>
           </a:xfrm>
           <a:prstGeom prst="rect">
             <a:avLst/>
@@ -22881,10 +23442,11 @@
           <a:lstStyle/>
           <a:p>
             <a:r>
-              <a:rPr sz="1400" b="1">
+              <a:rPr sz="1400" dirty="0">
                 <a:solidFill>
                   <a:srgbClr val="28285E"/>
                 </a:solidFill>
+                <a:latin typeface="Fira Sans" panose="020B0503050000020004" pitchFamily="34" charset="0"/>
               </a:rPr>
               <a:t>On the development set we can measure the scanner against the answer key. The 99 cases hold 34 real flaws.</a:t>
             </a:r>
@@ -23350,12 +23912,20 @@
           <a:p>
             <a:pPr algn="ctr"/>
             <a:r>
-              <a:rPr sz="1400" b="0">
-                <a:solidFill>
-                  <a:schemeClr val="tx2"/>
-                </a:solidFill>
-              </a:rPr>
-              <a:t>Triage decides, for each alert, whether the match is a flaw an attacker can reach, from the code and the threat model.</a:t>
+              <a:rPr sz="1400" b="1" dirty="0">
+                <a:solidFill>
+                  <a:schemeClr val="tx2"/>
+                </a:solidFill>
+              </a:rPr>
+              <a:t>Triage</a:t>
+            </a:r>
+            <a:r>
+              <a:rPr sz="1400" b="0" dirty="0">
+                <a:solidFill>
+                  <a:schemeClr val="tx2"/>
+                </a:solidFill>
+              </a:rPr>
+              <a:t> decides, for each alert, whether the match is a flaw an attacker can reach, from the code and the threat model.</a:t>
             </a:r>
           </a:p>
         </p:txBody>
@@ -23744,26 +24314,29 @@
           <a:p>
             <a:pPr algn="r"/>
             <a:r>
-              <a:rPr lang="en-US" sz="1050" i="1" baseline="30000" dirty="0">
+              <a:rPr lang="en-US" sz="1050" baseline="30000" dirty="0">
                 <a:solidFill>
                   <a:schemeClr val="bg2"/>
                 </a:solidFill>
+                <a:latin typeface="Fira Sans" panose="020B0503050000020004" pitchFamily="34" charset="0"/>
               </a:rPr>
               <a:t>[1] </a:t>
             </a:r>
             <a:r>
-              <a:rPr lang="en-US" sz="1050" i="1" dirty="0">
+              <a:rPr lang="en-US" sz="1050" dirty="0">
                 <a:solidFill>
                   <a:schemeClr val="bg2"/>
                 </a:solidFill>
+                <a:latin typeface="Fira Sans" panose="020B0503050000020004" pitchFamily="34" charset="0"/>
               </a:rPr>
               <a:t>S</a:t>
             </a:r>
             <a:r>
-              <a:rPr sz="1050" i="1" dirty="0">
+              <a:rPr sz="1050" dirty="0">
                 <a:solidFill>
                   <a:schemeClr val="bg2"/>
                 </a:solidFill>
+                <a:latin typeface="Fira Sans" panose="020B0503050000020004" pitchFamily="34" charset="0"/>
               </a:rPr>
               <a:t>ifting the Noise, arXiv 2601.22952, January 2026.</a:t>
             </a:r>
@@ -24132,10 +24705,11 @@
           <a:lstStyle/>
           <a:p>
             <a:r>
-              <a:rPr sz="1400" b="1">
+              <a:rPr sz="1400" dirty="0">
                 <a:solidFill>
                   <a:srgbClr val="28285E"/>
                 </a:solidFill>
+                <a:latin typeface="Fira Sans" panose="020B0503050000020004" pitchFamily="34" charset="0"/>
               </a:rPr>
               <a:t>One row, in the brief's format, for the guarded eval.</a:t>
             </a:r>
@@ -24151,7 +24725,7 @@
         <p:spPr>
           <a:xfrm>
             <a:off x="319251" y="1240576"/>
-            <a:ext cx="6014545" cy="200000"/>
+            <a:ext cx="4996561" cy="184666"/>
           </a:xfrm>
           <a:prstGeom prst="rect">
             <a:avLst/>
@@ -24165,12 +24739,31 @@
           <a:lstStyle/>
           <a:p>
             <a:r>
-              <a:rPr sz="1200" b="1">
+              <a:rPr sz="1200" dirty="0">
                 <a:solidFill>
                   <a:srgbClr val="28285E"/>
                 </a:solidFill>
-              </a:rPr>
-              <a:t>A report.json row in the brief's format, filled in for BenchmarkTest00073</a:t>
+                <a:latin typeface="Fira Sans" panose="020B0503050000020004" pitchFamily="34" charset="0"/>
+              </a:rPr>
+              <a:t>A </a:t>
+            </a:r>
+            <a:r>
+              <a:rPr sz="1200" dirty="0" err="1">
+                <a:solidFill>
+                  <a:srgbClr val="28285E"/>
+                </a:solidFill>
+                <a:latin typeface="Fira Sans" panose="020B0503050000020004" pitchFamily="34" charset="0"/>
+              </a:rPr>
+              <a:t>report.json</a:t>
+            </a:r>
+            <a:r>
+              <a:rPr sz="1200" dirty="0">
+                <a:solidFill>
+                  <a:srgbClr val="28285E"/>
+                </a:solidFill>
+                <a:latin typeface="Fira Sans" panose="020B0503050000020004" pitchFamily="34" charset="0"/>
+              </a:rPr>
+              <a:t> row in the brief's format, filled in for BenchmarkTest00073</a:t>
             </a:r>
           </a:p>
         </p:txBody>
@@ -24385,7 +24978,7 @@
         <p:spPr>
           <a:xfrm>
             <a:off x="469251" y="1830576"/>
-            <a:ext cx="5714545" cy="1991816"/>
+            <a:ext cx="5693866" cy="1846659"/>
           </a:xfrm>
           <a:prstGeom prst="rect">
             <a:avLst/>
@@ -24402,7 +24995,7 @@
               <a:buNone/>
             </a:pPr>
             <a:r>
-              <a:rPr sz="1000">
+              <a:rPr sz="1000" dirty="0">
                 <a:solidFill>
                   <a:schemeClr val="tx2"/>
                 </a:solidFill>
@@ -24416,7 +25009,7 @@
               <a:buNone/>
             </a:pPr>
             <a:r>
-              <a:rPr sz="1000">
+              <a:rPr sz="1000" dirty="0">
                 <a:solidFill>
                   <a:schemeClr val="tx2"/>
                 </a:solidFill>
@@ -24425,16 +25018,34 @@
               <a:t>  </a:t>
             </a:r>
             <a:r>
-              <a:rPr sz="1000">
+              <a:rPr sz="1000" dirty="0">
                 <a:solidFill>
                   <a:srgbClr val="9CDCFE"/>
                 </a:solidFill>
                 <a:latin typeface="Maple Mono NF"/>
               </a:rPr>
-              <a:t>"alert_id"</a:t>
-            </a:r>
-            <a:r>
-              <a:rPr sz="1000">
+              <a:t>"</a:t>
+            </a:r>
+            <a:r>
+              <a:rPr sz="1000" dirty="0" err="1">
+                <a:solidFill>
+                  <a:srgbClr val="9CDCFE"/>
+                </a:solidFill>
+                <a:latin typeface="Maple Mono NF"/>
+              </a:rPr>
+              <a:t>alert_id</a:t>
+            </a:r>
+            <a:r>
+              <a:rPr sz="1000" dirty="0">
+                <a:solidFill>
+                  <a:srgbClr val="9CDCFE"/>
+                </a:solidFill>
+                <a:latin typeface="Maple Mono NF"/>
+              </a:rPr>
+              <a:t>"</a:t>
+            </a:r>
+            <a:r>
+              <a:rPr sz="1000" dirty="0">
                 <a:solidFill>
                   <a:schemeClr val="tx2"/>
                 </a:solidFill>
@@ -24443,7 +25054,7 @@
               <a:t>: </a:t>
             </a:r>
             <a:r>
-              <a:rPr sz="1000">
+              <a:rPr sz="1000" dirty="0">
                 <a:solidFill>
                   <a:srgbClr val="CE9178"/>
                 </a:solidFill>
@@ -24452,7 +25063,7 @@
               <a:t>"owasp-BenchmarkTest00073-py-54-B307"</a:t>
             </a:r>
             <a:r>
-              <a:rPr sz="1000">
+              <a:rPr sz="1000" dirty="0">
                 <a:solidFill>
                   <a:schemeClr val="tx2"/>
                 </a:solidFill>
@@ -24466,7 +25077,7 @@
               <a:buNone/>
             </a:pPr>
             <a:r>
-              <a:rPr sz="1000">
+              <a:rPr sz="1000" dirty="0">
                 <a:solidFill>
                   <a:schemeClr val="tx2"/>
                 </a:solidFill>
@@ -24475,16 +25086,34 @@
               <a:t>  </a:t>
             </a:r>
             <a:r>
-              <a:rPr sz="1000">
+              <a:rPr sz="1000" dirty="0">
                 <a:solidFill>
                   <a:srgbClr val="9CDCFE"/>
                 </a:solidFill>
                 <a:latin typeface="Maple Mono NF"/>
               </a:rPr>
-              <a:t>"test_id"</a:t>
-            </a:r>
-            <a:r>
-              <a:rPr sz="1000">
+              <a:t>"</a:t>
+            </a:r>
+            <a:r>
+              <a:rPr sz="1000" dirty="0" err="1">
+                <a:solidFill>
+                  <a:srgbClr val="9CDCFE"/>
+                </a:solidFill>
+                <a:latin typeface="Maple Mono NF"/>
+              </a:rPr>
+              <a:t>test_id</a:t>
+            </a:r>
+            <a:r>
+              <a:rPr sz="1000" dirty="0">
+                <a:solidFill>
+                  <a:srgbClr val="9CDCFE"/>
+                </a:solidFill>
+                <a:latin typeface="Maple Mono NF"/>
+              </a:rPr>
+              <a:t>"</a:t>
+            </a:r>
+            <a:r>
+              <a:rPr sz="1000" dirty="0">
                 <a:solidFill>
                   <a:schemeClr val="tx2"/>
                 </a:solidFill>
@@ -24493,7 +25122,7 @@
               <a:t>: </a:t>
             </a:r>
             <a:r>
-              <a:rPr sz="1000">
+              <a:rPr sz="1000" dirty="0">
                 <a:solidFill>
                   <a:srgbClr val="CE9178"/>
                 </a:solidFill>
@@ -24502,7 +25131,7 @@
               <a:t>"B307"</a:t>
             </a:r>
             <a:r>
-              <a:rPr sz="1000">
+              <a:rPr sz="1000" dirty="0">
                 <a:solidFill>
                   <a:schemeClr val="tx2"/>
                 </a:solidFill>
@@ -24516,7 +25145,7 @@
               <a:buNone/>
             </a:pPr>
             <a:r>
-              <a:rPr sz="1000">
+              <a:rPr sz="1000" dirty="0">
                 <a:solidFill>
                   <a:schemeClr val="tx2"/>
                 </a:solidFill>
@@ -24525,7 +25154,7 @@
               <a:t>  </a:t>
             </a:r>
             <a:r>
-              <a:rPr sz="1000">
+              <a:rPr sz="1000" dirty="0">
                 <a:solidFill>
                   <a:srgbClr val="9CDCFE"/>
                 </a:solidFill>
@@ -24534,7 +25163,7 @@
               <a:t>"line"</a:t>
             </a:r>
             <a:r>
-              <a:rPr sz="1000">
+              <a:rPr sz="1000" dirty="0">
                 <a:solidFill>
                   <a:schemeClr val="tx2"/>
                 </a:solidFill>
@@ -24543,7 +25172,7 @@
               <a:t>: </a:t>
             </a:r>
             <a:r>
-              <a:rPr sz="1000">
+              <a:rPr sz="1000" dirty="0">
                 <a:solidFill>
                   <a:srgbClr val="B5CEA8"/>
                 </a:solidFill>
@@ -24552,7 +25181,7 @@
               <a:t>54</a:t>
             </a:r>
             <a:r>
-              <a:rPr sz="1000">
+              <a:rPr sz="1000" dirty="0">
                 <a:solidFill>
                   <a:schemeClr val="tx2"/>
                 </a:solidFill>
@@ -24566,7 +25195,7 @@
               <a:buNone/>
             </a:pPr>
             <a:r>
-              <a:rPr sz="1000">
+              <a:rPr sz="1000" dirty="0">
                 <a:solidFill>
                   <a:schemeClr val="tx2"/>
                 </a:solidFill>
@@ -24575,7 +25204,7 @@
               <a:t>  </a:t>
             </a:r>
             <a:r>
-              <a:rPr sz="1000">
+              <a:rPr sz="1000" dirty="0">
                 <a:solidFill>
                   <a:srgbClr val="9CDCFE"/>
                 </a:solidFill>
@@ -24584,7 +25213,7 @@
               <a:t>"label"</a:t>
             </a:r>
             <a:r>
-              <a:rPr sz="1000">
+              <a:rPr sz="1000" dirty="0">
                 <a:solidFill>
                   <a:schemeClr val="tx2"/>
                 </a:solidFill>
@@ -24593,7 +25222,7 @@
               <a:t>: </a:t>
             </a:r>
             <a:r>
-              <a:rPr sz="1000">
+              <a:rPr sz="1000" dirty="0">
                 <a:solidFill>
                   <a:srgbClr val="B5CEA8"/>
                 </a:solidFill>
@@ -24602,7 +25231,7 @@
               <a:t>0</a:t>
             </a:r>
             <a:r>
-              <a:rPr sz="1000">
+              <a:rPr sz="1000" dirty="0">
                 <a:solidFill>
                   <a:schemeClr val="tx2"/>
                 </a:solidFill>
@@ -24616,7 +25245,7 @@
               <a:buNone/>
             </a:pPr>
             <a:r>
-              <a:rPr sz="1000">
+              <a:rPr sz="1000" dirty="0">
                 <a:solidFill>
                   <a:schemeClr val="tx2"/>
                 </a:solidFill>
@@ -24625,7 +25254,7 @@
               <a:t>  </a:t>
             </a:r>
             <a:r>
-              <a:rPr sz="1000">
+              <a:rPr sz="1000" dirty="0">
                 <a:solidFill>
                   <a:srgbClr val="9CDCFE"/>
                 </a:solidFill>
@@ -24634,7 +25263,7 @@
               <a:t>"status"</a:t>
             </a:r>
             <a:r>
-              <a:rPr sz="1000">
+              <a:rPr sz="1000" dirty="0">
                 <a:solidFill>
                   <a:schemeClr val="tx2"/>
                 </a:solidFill>
@@ -24643,7 +25272,7 @@
               <a:t>: </a:t>
             </a:r>
             <a:r>
-              <a:rPr sz="1000">
+              <a:rPr sz="1000" dirty="0">
                 <a:solidFill>
                   <a:srgbClr val="CE9178"/>
                 </a:solidFill>
@@ -24652,7 +25281,7 @@
               <a:t>"classified"</a:t>
             </a:r>
             <a:r>
-              <a:rPr sz="1000">
+              <a:rPr sz="1000" dirty="0">
                 <a:solidFill>
                   <a:schemeClr val="tx2"/>
                 </a:solidFill>
@@ -24666,7 +25295,7 @@
               <a:buNone/>
             </a:pPr>
             <a:r>
-              <a:rPr sz="1000">
+              <a:rPr sz="1000" dirty="0">
                 <a:solidFill>
                   <a:schemeClr val="tx2"/>
                 </a:solidFill>
@@ -24675,7 +25304,7 @@
               <a:t>  </a:t>
             </a:r>
             <a:r>
-              <a:rPr sz="1000">
+              <a:rPr sz="1000" dirty="0">
                 <a:solidFill>
                   <a:srgbClr val="9CDCFE"/>
                 </a:solidFill>
@@ -24684,7 +25313,7 @@
               <a:t>"rationale"</a:t>
             </a:r>
             <a:r>
-              <a:rPr sz="1000">
+              <a:rPr sz="1000" dirty="0">
                 <a:solidFill>
                   <a:schemeClr val="tx2"/>
                 </a:solidFill>
@@ -24693,7 +25322,7 @@
               <a:t>: </a:t>
             </a:r>
             <a:r>
-              <a:rPr sz="1000">
+              <a:rPr sz="1000" dirty="0">
                 <a:solidFill>
                   <a:srgbClr val="CE9178"/>
                 </a:solidFill>
@@ -24702,7 +25331,7 @@
               <a:t>"Line 46 admits only a quoted literal; eval runs no code."</a:t>
             </a:r>
             <a:r>
-              <a:rPr sz="1000">
+              <a:rPr sz="1000" dirty="0">
                 <a:solidFill>
                   <a:schemeClr val="tx2"/>
                 </a:solidFill>
@@ -24716,7 +25345,7 @@
               <a:buNone/>
             </a:pPr>
             <a:r>
-              <a:rPr sz="1000">
+              <a:rPr sz="1000" dirty="0">
                 <a:solidFill>
                   <a:schemeClr val="tx2"/>
                 </a:solidFill>
@@ -24725,7 +25354,7 @@
               <a:t>  </a:t>
             </a:r>
             <a:r>
-              <a:rPr sz="1000">
+              <a:rPr sz="1000" dirty="0">
                 <a:solidFill>
                   <a:srgbClr val="9CDCFE"/>
                 </a:solidFill>
@@ -24734,7 +25363,7 @@
               <a:t>"evidence"</a:t>
             </a:r>
             <a:r>
-              <a:rPr sz="1000">
+              <a:rPr sz="1000" dirty="0">
                 <a:solidFill>
                   <a:schemeClr val="tx2"/>
                 </a:solidFill>
@@ -24748,7 +25377,7 @@
               <a:buNone/>
             </a:pPr>
             <a:r>
-              <a:rPr sz="1000">
+              <a:rPr sz="1000" dirty="0">
                 <a:solidFill>
                   <a:schemeClr val="tx2"/>
                 </a:solidFill>
@@ -24757,7 +25386,7 @@
               <a:t>    {</a:t>
             </a:r>
             <a:r>
-              <a:rPr sz="1000">
+              <a:rPr sz="1000" dirty="0">
                 <a:solidFill>
                   <a:srgbClr val="9CDCFE"/>
                 </a:solidFill>
@@ -24766,7 +25395,7 @@
               <a:t>"path"</a:t>
             </a:r>
             <a:r>
-              <a:rPr sz="1000">
+              <a:rPr sz="1000" dirty="0">
                 <a:solidFill>
                   <a:schemeClr val="tx2"/>
                 </a:solidFill>
@@ -24775,16 +25404,34 @@
               <a:t>: </a:t>
             </a:r>
             <a:r>
-              <a:rPr sz="1000">
+              <a:rPr sz="1000" dirty="0">
                 <a:solidFill>
                   <a:srgbClr val="CE9178"/>
                 </a:solidFill>
                 <a:latin typeface="Maple Mono NF"/>
               </a:rPr>
-              <a:t>"testcode/BenchmarkTest00073.py"</a:t>
-            </a:r>
-            <a:r>
-              <a:rPr sz="1000">
+              <a:t>"</a:t>
+            </a:r>
+            <a:r>
+              <a:rPr sz="1000" dirty="0" err="1">
+                <a:solidFill>
+                  <a:srgbClr val="CE9178"/>
+                </a:solidFill>
+                <a:latin typeface="Maple Mono NF"/>
+              </a:rPr>
+              <a:t>testcode</a:t>
+            </a:r>
+            <a:r>
+              <a:rPr sz="1000" dirty="0">
+                <a:solidFill>
+                  <a:srgbClr val="CE9178"/>
+                </a:solidFill>
+                <a:latin typeface="Maple Mono NF"/>
+              </a:rPr>
+              <a:t>/BenchmarkTest00073.py"</a:t>
+            </a:r>
+            <a:r>
+              <a:rPr sz="1000" dirty="0">
                 <a:solidFill>
                   <a:schemeClr val="tx2"/>
                 </a:solidFill>
@@ -24798,7 +25445,7 @@
               <a:buNone/>
             </a:pPr>
             <a:r>
-              <a:rPr sz="1000">
+              <a:rPr sz="1000" dirty="0">
                 <a:solidFill>
                   <a:schemeClr val="tx2"/>
                 </a:solidFill>
@@ -24807,16 +25454,34 @@
               <a:t>     </a:t>
             </a:r>
             <a:r>
-              <a:rPr sz="1000">
+              <a:rPr sz="1000" dirty="0">
                 <a:solidFill>
                   <a:srgbClr val="9CDCFE"/>
                 </a:solidFill>
                 <a:latin typeface="Maple Mono NF"/>
               </a:rPr>
-              <a:t>"start_line"</a:t>
-            </a:r>
-            <a:r>
-              <a:rPr sz="1000">
+              <a:t>"</a:t>
+            </a:r>
+            <a:r>
+              <a:rPr sz="1000" dirty="0" err="1">
+                <a:solidFill>
+                  <a:srgbClr val="9CDCFE"/>
+                </a:solidFill>
+                <a:latin typeface="Maple Mono NF"/>
+              </a:rPr>
+              <a:t>start_line</a:t>
+            </a:r>
+            <a:r>
+              <a:rPr sz="1000" dirty="0">
+                <a:solidFill>
+                  <a:srgbClr val="9CDCFE"/>
+                </a:solidFill>
+                <a:latin typeface="Maple Mono NF"/>
+              </a:rPr>
+              <a:t>"</a:t>
+            </a:r>
+            <a:r>
+              <a:rPr sz="1000" dirty="0">
                 <a:solidFill>
                   <a:schemeClr val="tx2"/>
                 </a:solidFill>
@@ -24825,7 +25490,7 @@
               <a:t>: </a:t>
             </a:r>
             <a:r>
-              <a:rPr sz="1000">
+              <a:rPr sz="1000" dirty="0">
                 <a:solidFill>
                   <a:srgbClr val="B5CEA8"/>
                 </a:solidFill>
@@ -24834,7 +25499,7 @@
               <a:t>44</a:t>
             </a:r>
             <a:r>
-              <a:rPr sz="1000">
+              <a:rPr sz="1000" dirty="0">
                 <a:solidFill>
                   <a:schemeClr val="tx2"/>
                 </a:solidFill>
@@ -24843,16 +25508,34 @@
               <a:t>, </a:t>
             </a:r>
             <a:r>
-              <a:rPr sz="1000">
+              <a:rPr sz="1000" dirty="0">
                 <a:solidFill>
                   <a:srgbClr val="9CDCFE"/>
                 </a:solidFill>
                 <a:latin typeface="Maple Mono NF"/>
               </a:rPr>
-              <a:t>"end_line"</a:t>
-            </a:r>
-            <a:r>
-              <a:rPr sz="1000">
+              <a:t>"</a:t>
+            </a:r>
+            <a:r>
+              <a:rPr sz="1000" dirty="0" err="1">
+                <a:solidFill>
+                  <a:srgbClr val="9CDCFE"/>
+                </a:solidFill>
+                <a:latin typeface="Maple Mono NF"/>
+              </a:rPr>
+              <a:t>end_line</a:t>
+            </a:r>
+            <a:r>
+              <a:rPr sz="1000" dirty="0">
+                <a:solidFill>
+                  <a:srgbClr val="9CDCFE"/>
+                </a:solidFill>
+                <a:latin typeface="Maple Mono NF"/>
+              </a:rPr>
+              <a:t>"</a:t>
+            </a:r>
+            <a:r>
+              <a:rPr sz="1000" dirty="0">
                 <a:solidFill>
                   <a:schemeClr val="tx2"/>
                 </a:solidFill>
@@ -24861,7 +25544,7 @@
               <a:t>: </a:t>
             </a:r>
             <a:r>
-              <a:rPr sz="1000">
+              <a:rPr sz="1000" dirty="0">
                 <a:solidFill>
                   <a:srgbClr val="B5CEA8"/>
                 </a:solidFill>
@@ -24870,7 +25553,7 @@
               <a:t>54</a:t>
             </a:r>
             <a:r>
-              <a:rPr sz="1000">
+              <a:rPr sz="1000" dirty="0">
                 <a:solidFill>
                   <a:schemeClr val="tx2"/>
                 </a:solidFill>
@@ -24884,7 +25567,7 @@
               <a:buNone/>
             </a:pPr>
             <a:r>
-              <a:rPr sz="1000">
+              <a:rPr sz="1000" dirty="0">
                 <a:solidFill>
                   <a:schemeClr val="tx2"/>
                 </a:solidFill>
@@ -24898,7 +25581,7 @@
               <a:buNone/>
             </a:pPr>
             <a:r>
-              <a:rPr sz="1000">
+              <a:rPr sz="1000" dirty="0">
                 <a:solidFill>
                   <a:schemeClr val="tx2"/>
                 </a:solidFill>
@@ -25010,7 +25693,7 @@
           <a:p>
             <a:pPr algn="ctr"/>
             <a:r>
-              <a:rPr sz="4000" b="1">
+              <a:rPr sz="4000" dirty="0">
                 <a:solidFill>
                   <a:schemeClr val="tx2"/>
                 </a:solidFill>
@@ -25226,23 +25909,7 @@
                   <a:schemeClr val="tx1"/>
                 </a:solidFill>
               </a:rPr>
-              <a:t> removes a proven flaw and keeps the </a:t>
-            </a:r>
-            <a:r>
-              <a:rPr sz="1400" b="0" dirty="0" err="1">
-                <a:solidFill>
-                  <a:schemeClr val="tx1"/>
-                </a:solidFill>
-              </a:rPr>
-              <a:t>behaviour</a:t>
-            </a:r>
-            <a:r>
-              <a:rPr sz="1400" b="0" dirty="0">
-                <a:solidFill>
-                  <a:schemeClr val="tx1"/>
-                </a:solidFill>
-              </a:rPr>
-              <a:t>.</a:t>
+              <a:t> removes a proven flaw and keeps the behavior.</a:t>
             </a:r>
           </a:p>
         </p:txBody>
@@ -25255,8 +25922,8 @@
         </p:nvSpPr>
         <p:spPr>
           <a:xfrm>
-            <a:off x="319251" y="3045076"/>
-            <a:ext cx="6014545" cy="669712"/>
+            <a:off x="258263" y="3045076"/>
+            <a:ext cx="6136522" cy="669712"/>
           </a:xfrm>
           <a:prstGeom prst="rect">
             <a:avLst/>
@@ -25291,12 +25958,28 @@
           <a:p>
             <a:pPr algn="ctr"/>
             <a:r>
-              <a:rPr sz="1400" b="0">
-                <a:solidFill>
-                  <a:schemeClr val="tx2"/>
-                </a:solidFill>
-              </a:rPr>
-              <a:t>Vulnerability management is the work of finding the flaws an attacker could use, deciding which are real, proving it, and fixing them.</a:t>
+              <a:rPr sz="1400" b="0" dirty="0">
+                <a:solidFill>
+                  <a:schemeClr val="tx2"/>
+                </a:solidFill>
+              </a:rPr>
+              <a:t>Vulnerability management is the </a:t>
+            </a:r>
+            <a:r>
+              <a:rPr sz="1400" b="1" u="sng" dirty="0">
+                <a:solidFill>
+                  <a:schemeClr val="tx2"/>
+                </a:solidFill>
+              </a:rPr>
+              <a:t>work of finding the flaws an attacker could use, deciding which are real, proving it, and fixing them</a:t>
+            </a:r>
+            <a:r>
+              <a:rPr sz="1400" b="0" dirty="0">
+                <a:solidFill>
+                  <a:schemeClr val="tx2"/>
+                </a:solidFill>
+              </a:rPr>
+              <a:t>.</a:t>
             </a:r>
           </a:p>
         </p:txBody>
@@ -25309,8 +25992,8 @@
         </p:nvSpPr>
         <p:spPr>
           <a:xfrm>
-            <a:off x="319251" y="3944788"/>
-            <a:ext cx="6014545" cy="544308"/>
+            <a:off x="258263" y="3944788"/>
+            <a:ext cx="6136522" cy="544308"/>
           </a:xfrm>
           <a:prstGeom prst="rect">
             <a:avLst/>
@@ -25343,7 +26026,7 @@
           <a:p>
             <a:pPr algn="ctr"/>
             <a:r>
-              <a:rPr sz="1200" b="1">
+              <a:rPr sz="1200" b="1" dirty="0">
                 <a:solidFill>
                   <a:srgbClr val="28285E"/>
                 </a:solidFill>
@@ -25408,7 +26091,7 @@
         <p:spPr>
           <a:xfrm>
             <a:off x="319251" y="700000"/>
-            <a:ext cx="6014545" cy="509712"/>
+            <a:ext cx="6014545" cy="523220"/>
           </a:xfrm>
           <a:prstGeom prst="rect">
             <a:avLst/>
@@ -25422,10 +26105,11 @@
           <a:lstStyle/>
           <a:p>
             <a:r>
-              <a:rPr sz="1400" b="1">
+              <a:rPr sz="1400" b="1" dirty="0">
                 <a:solidFill>
                   <a:srgbClr val="28285E"/>
                 </a:solidFill>
+                <a:latin typeface="Fira Sans" panose="020B0503050000020004" pitchFamily="34" charset="0"/>
               </a:rPr>
               <a:t>Tools discover flaws in different ways, and each way has its own blind spots.</a:t>
             </a:r>
@@ -25438,7 +26122,13 @@
           <p:cNvGraphicFramePr>
             <a:graphicFrameLocks noGrp="1"/>
           </p:cNvGraphicFramePr>
-          <p:nvPr/>
+          <p:nvPr>
+            <p:extLst>
+              <p:ext uri="{D42A27DB-BD31-4B8C-83A1-F6EECF244321}">
+                <p14:modId xmlns:p14="http://schemas.microsoft.com/office/powerpoint/2010/main" val="1006688553"/>
+              </p:ext>
+            </p:extLst>
+          </p:nvPr>
         </p:nvGraphicFramePr>
         <p:xfrm>
           <a:off x="319251" y="1439712"/>
@@ -25573,12 +26263,20 @@
                         <a:buNone/>
                       </a:pPr>
                       <a:r>
-                        <a:rPr sz="1100" b="0">
+                        <a:rPr sz="1100" b="1" dirty="0">
                           <a:solidFill>
                             <a:schemeClr val="tx1"/>
                           </a:solidFill>
                         </a:rPr>
-                        <a:t>matches rules against the source, without running it</a:t>
+                        <a:t>matches rules against the source</a:t>
+                      </a:r>
+                      <a:r>
+                        <a:rPr sz="1100" b="0" dirty="0">
+                          <a:solidFill>
+                            <a:schemeClr val="tx1"/>
+                          </a:solidFill>
+                        </a:rPr>
+                        <a:t>, without running it</a:t>
                       </a:r>
                     </a:p>
                   </a:txBody>
@@ -25652,12 +26350,20 @@
                         <a:buNone/>
                       </a:pPr>
                       <a:r>
-                        <a:rPr sz="1100" b="0">
+                        <a:rPr sz="1100" b="1" u="none" dirty="0">
                           <a:solidFill>
                             <a:schemeClr val="tx1"/>
                           </a:solidFill>
                         </a:rPr>
-                        <a:t>runs the program and attacks it from outside, watching it</a:t>
+                        <a:t>runs the program and attacks it from outside</a:t>
+                      </a:r>
+                      <a:r>
+                        <a:rPr sz="1100" b="0" dirty="0">
+                          <a:solidFill>
+                            <a:schemeClr val="tx1"/>
+                          </a:solidFill>
+                        </a:rPr>
+                        <a:t>, watching it</a:t>
                       </a:r>
                     </a:p>
                   </a:txBody>
@@ -25731,12 +26437,20 @@
                         <a:buNone/>
                       </a:pPr>
                       <a:r>
-                        <a:rPr sz="1100" b="0">
+                        <a:rPr sz="1100" b="1" dirty="0">
                           <a:solidFill>
                             <a:schemeClr val="tx1"/>
                           </a:solidFill>
                         </a:rPr>
-                        <a:t>feeds the program generated inputs and keeps the crashes</a:t>
+                        <a:t>feeds the program generated inputs</a:t>
+                      </a:r>
+                      <a:r>
+                        <a:rPr sz="1100" b="0" dirty="0">
+                          <a:solidFill>
+                            <a:schemeClr val="tx1"/>
+                          </a:solidFill>
+                        </a:rPr>
+                        <a:t> and keeps the crashes</a:t>
                       </a:r>
                     </a:p>
                   </a:txBody>
@@ -25810,12 +26524,28 @@
                         <a:buNone/>
                       </a:pPr>
                       <a:r>
-                        <a:rPr sz="1100" b="0">
+                        <a:rPr sz="1100" b="0" dirty="0">
                           <a:solidFill>
                             <a:schemeClr val="tx1"/>
                           </a:solidFill>
                         </a:rPr>
-                        <a:t>checks the program's libraries against published flaw records</a:t>
+                        <a:t>checks the </a:t>
+                      </a:r>
+                      <a:r>
+                        <a:rPr sz="1100" b="1" dirty="0">
+                          <a:solidFill>
+                            <a:schemeClr val="tx1"/>
+                          </a:solidFill>
+                        </a:rPr>
+                        <a:t>program's libraries against published flaw</a:t>
+                      </a:r>
+                      <a:r>
+                        <a:rPr sz="1100" b="0" dirty="0">
+                          <a:solidFill>
+                            <a:schemeClr val="tx1"/>
+                          </a:solidFill>
+                        </a:rPr>
+                        <a:t> records</a:t>
                       </a:r>
                     </a:p>
                   </a:txBody>
@@ -25891,7 +26621,7 @@
           <a:p>
             <a:pPr algn="ctr"/>
             <a:r>
-              <a:rPr sz="1400" b="0" dirty="0">
+              <a:rPr sz="1400" dirty="0">
                 <a:solidFill>
                   <a:schemeClr val="tx2"/>
                 </a:solidFill>
@@ -26013,7 +26743,7 @@
         <p:spPr>
           <a:xfrm>
             <a:off x="319251" y="700000"/>
-            <a:ext cx="6014545" cy="509712"/>
+            <a:ext cx="6014545" cy="523220"/>
           </a:xfrm>
           <a:prstGeom prst="rect">
             <a:avLst/>
@@ -26027,12 +26757,31 @@
           <a:lstStyle/>
           <a:p>
             <a:r>
-              <a:rPr sz="1400" b="1">
+              <a:rPr sz="1400" dirty="0">
                 <a:solidFill>
                   <a:srgbClr val="28285E"/>
                 </a:solidFill>
-              </a:rPr>
-              <a:t>A rule is a pattern, a message and metadata. This one is Bandit's B610 as GitLab ported it to Semgrep.</a:t>
+                <a:latin typeface="Fira Sans" panose="020B0503050000020004" pitchFamily="34" charset="0"/>
+              </a:rPr>
+              <a:t>A rule is a pattern, a message and metadata. This one is Bandit's B610 as GitLab ported it to </a:t>
+            </a:r>
+            <a:r>
+              <a:rPr sz="1400" dirty="0" err="1">
+                <a:solidFill>
+                  <a:srgbClr val="28285E"/>
+                </a:solidFill>
+                <a:latin typeface="Fira Sans" panose="020B0503050000020004" pitchFamily="34" charset="0"/>
+              </a:rPr>
+              <a:t>Semgrep</a:t>
+            </a:r>
+            <a:r>
+              <a:rPr sz="1400" dirty="0">
+                <a:solidFill>
+                  <a:srgbClr val="28285E"/>
+                </a:solidFill>
+                <a:latin typeface="Fira Sans" panose="020B0503050000020004" pitchFamily="34" charset="0"/>
+              </a:rPr>
+              <a:t>.</a:t>
             </a:r>
           </a:p>
         </p:txBody>
@@ -26046,7 +26795,7 @@
         <p:spPr>
           <a:xfrm>
             <a:off x="319251" y="1439712"/>
-            <a:ext cx="6014545" cy="200000"/>
+            <a:ext cx="5288307" cy="184666"/>
           </a:xfrm>
           <a:prstGeom prst="rect">
             <a:avLst/>
@@ -26060,12 +26809,49 @@
           <a:lstStyle/>
           <a:p>
             <a:r>
-              <a:rPr sz="1200" b="1">
+              <a:rPr sz="1200" dirty="0">
                 <a:solidFill>
                   <a:srgbClr val="28285E"/>
                 </a:solidFill>
-              </a:rPr>
-              <a:t>GitLab's Semgrep analyzer, rules/bandit.yml, lines 1231 to 1242, cuts marked</a:t>
+                <a:latin typeface="Fira Sans" panose="020B0503050000020004" pitchFamily="34" charset="0"/>
+              </a:rPr>
+              <a:t>GitLab's </a:t>
+            </a:r>
+            <a:r>
+              <a:rPr sz="1200" dirty="0" err="1">
+                <a:solidFill>
+                  <a:srgbClr val="28285E"/>
+                </a:solidFill>
+                <a:latin typeface="Fira Sans" panose="020B0503050000020004" pitchFamily="34" charset="0"/>
+              </a:rPr>
+              <a:t>Semgrep</a:t>
+            </a:r>
+            <a:r>
+              <a:rPr sz="1200" dirty="0">
+                <a:solidFill>
+                  <a:srgbClr val="28285E"/>
+                </a:solidFill>
+                <a:latin typeface="Fira Sans" panose="020B0503050000020004" pitchFamily="34" charset="0"/>
+              </a:rPr>
+              <a:t> analyzer, rules/</a:t>
+            </a:r>
+            <a:r>
+              <a:rPr sz="1200" dirty="0" err="1">
+                <a:solidFill>
+                  <a:srgbClr val="28285E"/>
+                </a:solidFill>
+                <a:latin typeface="Fira Sans" panose="020B0503050000020004" pitchFamily="34" charset="0"/>
+              </a:rPr>
+              <a:t>bandit.yml</a:t>
+            </a:r>
+            <a:r>
+              <a:rPr sz="1200" dirty="0">
+                <a:solidFill>
+                  <a:srgbClr val="28285E"/>
+                </a:solidFill>
+                <a:latin typeface="Fira Sans" panose="020B0503050000020004" pitchFamily="34" charset="0"/>
+              </a:rPr>
+              <a:t>, lines 1231 to 1242, cuts marked</a:t>
             </a:r>
           </a:p>
         </p:txBody>
@@ -27136,74 +27922,83 @@
           <a:lstStyle/>
           <a:p>
             <a:r>
-              <a:rPr sz="1400" b="1" dirty="0">
+              <a:rPr sz="1400" dirty="0">
                 <a:solidFill>
                   <a:srgbClr val="28285E"/>
                 </a:solidFill>
+                <a:latin typeface="Fira Sans" panose="020B0503050000020004" pitchFamily="34" charset="0"/>
               </a:rPr>
               <a:t>A </a:t>
             </a:r>
             <a:r>
-              <a:rPr sz="1400" b="1" dirty="0" err="1">
+              <a:rPr sz="1400" dirty="0" err="1">
                 <a:solidFill>
                   <a:srgbClr val="28285E"/>
                 </a:solidFill>
+                <a:latin typeface="Fira Sans" panose="020B0503050000020004" pitchFamily="34" charset="0"/>
               </a:rPr>
               <a:t>Semgrep</a:t>
             </a:r>
             <a:r>
-              <a:rPr sz="1400" b="1" dirty="0">
+              <a:rPr sz="1400" dirty="0">
                 <a:solidFill>
                   <a:srgbClr val="28285E"/>
                 </a:solidFill>
+                <a:latin typeface="Fira Sans" panose="020B0503050000020004" pitchFamily="34" charset="0"/>
               </a:rPr>
               <a:t> rule is a pattern with </a:t>
             </a:r>
             <a:r>
-              <a:rPr lang="en-US" sz="1400" b="1" dirty="0">
+              <a:rPr lang="en-US" sz="1400" dirty="0">
                 <a:solidFill>
                   <a:srgbClr val="28285E"/>
                 </a:solidFill>
+                <a:latin typeface="Fira Sans" panose="020B0503050000020004" pitchFamily="34" charset="0"/>
               </a:rPr>
               <a:t>gaps</a:t>
             </a:r>
             <a:r>
-              <a:rPr sz="1400" b="1" dirty="0">
+              <a:rPr sz="1400" dirty="0">
                 <a:solidFill>
                   <a:srgbClr val="28285E"/>
                 </a:solidFill>
+                <a:latin typeface="Fira Sans" panose="020B0503050000020004" pitchFamily="34" charset="0"/>
               </a:rPr>
               <a:t>, and a finding is the code that fill</a:t>
             </a:r>
             <a:r>
-              <a:rPr lang="en-US" sz="1400" b="1" dirty="0">
+              <a:rPr lang="en-US" sz="1400" dirty="0">
                 <a:solidFill>
                   <a:srgbClr val="28285E"/>
                 </a:solidFill>
+                <a:latin typeface="Fira Sans" panose="020B0503050000020004" pitchFamily="34" charset="0"/>
               </a:rPr>
               <a:t>s </a:t>
             </a:r>
             <a:r>
-              <a:rPr sz="1400" b="1" dirty="0">
+              <a:rPr sz="1400" dirty="0">
                 <a:solidFill>
                   <a:srgbClr val="28285E"/>
                 </a:solidFill>
+                <a:latin typeface="Fira Sans" panose="020B0503050000020004" pitchFamily="34" charset="0"/>
               </a:rPr>
               <a:t>the</a:t>
             </a:r>
             <a:r>
-              <a:rPr lang="en-US" sz="1400" b="1" dirty="0">
+              <a:rPr lang="en-US" sz="1400" dirty="0">
                 <a:solidFill>
                   <a:srgbClr val="28285E"/>
                 </a:solidFill>
+                <a:latin typeface="Fira Sans" panose="020B0503050000020004" pitchFamily="34" charset="0"/>
               </a:rPr>
               <a:t>se gaps</a:t>
             </a:r>
             <a:r>
-              <a:rPr sz="1400" b="1" dirty="0">
+              <a:rPr sz="1400" dirty="0">
                 <a:solidFill>
                   <a:srgbClr val="28285E"/>
                 </a:solidFill>
+                <a:latin typeface="Fira Sans" panose="020B0503050000020004" pitchFamily="34" charset="0"/>
               </a:rPr>
               <a:t>.</a:t>
             </a:r>
